--- a/docs/第八周_GOTSF项目演示.pptx
+++ b/docs/第八周_GOTSF项目演示.pptx
@@ -1,33 +1,125 @@
 
 <file path=ppt/presentation.xml><?xml version="1.0" encoding="utf-8"?>
-<p:presentation xmlns:p="http://schemas.openxmlformats.org/presentationml/2006/main">
+<p:presentation xmlns:a="http://schemas.openxmlformats.org/drawingml/2006/main" xmlns:r="http://schemas.openxmlformats.org/officeDocument/2006/relationships" xmlns:p="http://schemas.openxmlformats.org/presentationml/2006/main">
   <p:sldMasterIdLst>
-    <p:sldMasterId xmlns:r="http://schemas.openxmlformats.org/officeDocument/2006/relationships" id="2147483648" r:id="R0b4fc25ae7df404b"/>
+    <p:sldMasterId id="2147483648" r:id="rId1"/>
   </p:sldMasterIdLst>
   <p:notesMasterIdLst>
-    <p:notesMasterId xmlns:r="http://schemas.openxmlformats.org/officeDocument/2006/relationships" r:id="R76e0da13d0a54a13"/>
+    <p:notesMasterId r:id="rId4"/>
   </p:notesMasterIdLst>
   <p:sldIdLst>
-    <p:sldId xmlns:r="http://schemas.openxmlformats.org/officeDocument/2006/relationships" id="256" r:id="R3b2617739c8b45b7"/>
-    <p:sldId xmlns:r="http://schemas.openxmlformats.org/officeDocument/2006/relationships" id="257" r:id="Ref84995d976140f8"/>
-    <p:sldId xmlns:r="http://schemas.openxmlformats.org/officeDocument/2006/relationships" id="258" r:id="R36c01db766574765"/>
-    <p:sldId xmlns:r="http://schemas.openxmlformats.org/officeDocument/2006/relationships" id="259" r:id="Re88db51bb78647e2"/>
-    <p:sldId xmlns:r="http://schemas.openxmlformats.org/officeDocument/2006/relationships" id="260" r:id="R0ec63483c5b541bb"/>
-    <p:sldId xmlns:r="http://schemas.openxmlformats.org/officeDocument/2006/relationships" id="261" r:id="Rcbb9cb6957424385"/>
-    <p:sldId xmlns:r="http://schemas.openxmlformats.org/officeDocument/2006/relationships" id="262" r:id="Rab481674cc4e4a45"/>
-    <p:sldId xmlns:r="http://schemas.openxmlformats.org/officeDocument/2006/relationships" id="263" r:id="Rf557d21c5f614d78"/>
+    <p:sldId id="256" r:id="rId3"/>
+    <p:sldId id="257" r:id="rId5"/>
+    <p:sldId id="258" r:id="rId6"/>
+    <p:sldId id="259" r:id="rId7"/>
+    <p:sldId id="260" r:id="rId8"/>
+    <p:sldId id="261" r:id="rId9"/>
+    <p:sldId id="262" r:id="rId10"/>
+    <p:sldId id="263" r:id="rId11"/>
   </p:sldIdLst>
   <p:sldSz cx="12192000" cy="6858000"/>
   <p:notesSz cx="6858000" cy="9144000"/>
+  <p:defaultTextStyle>
+    <a:lvl1pPr marL="0" algn="l" defTabSz="914400" rtl="0" eaLnBrk="1" latinLnBrk="0" hangingPunct="1">
+      <a:defRPr sz="1800" kern="1200">
+        <a:solidFill>
+          <a:schemeClr val="tx1"/>
+        </a:solidFill>
+        <a:latin typeface="+mn-lt"/>
+        <a:ea typeface="+mn-ea"/>
+        <a:cs typeface="+mn-cs"/>
+      </a:defRPr>
+    </a:lvl1pPr>
+    <a:lvl2pPr marL="457200" algn="l" defTabSz="914400" rtl="0" eaLnBrk="1" latinLnBrk="0" hangingPunct="1">
+      <a:defRPr sz="1800" kern="1200">
+        <a:solidFill>
+          <a:schemeClr val="tx1"/>
+        </a:solidFill>
+        <a:latin typeface="+mn-lt"/>
+        <a:ea typeface="+mn-ea"/>
+        <a:cs typeface="+mn-cs"/>
+      </a:defRPr>
+    </a:lvl2pPr>
+    <a:lvl3pPr marL="914400" algn="l" defTabSz="914400" rtl="0" eaLnBrk="1" latinLnBrk="0" hangingPunct="1">
+      <a:defRPr sz="1800" kern="1200">
+        <a:solidFill>
+          <a:schemeClr val="tx1"/>
+        </a:solidFill>
+        <a:latin typeface="+mn-lt"/>
+        <a:ea typeface="+mn-ea"/>
+        <a:cs typeface="+mn-cs"/>
+      </a:defRPr>
+    </a:lvl3pPr>
+    <a:lvl4pPr marL="1371600" algn="l" defTabSz="914400" rtl="0" eaLnBrk="1" latinLnBrk="0" hangingPunct="1">
+      <a:defRPr sz="1800" kern="1200">
+        <a:solidFill>
+          <a:schemeClr val="tx1"/>
+        </a:solidFill>
+        <a:latin typeface="+mn-lt"/>
+        <a:ea typeface="+mn-ea"/>
+        <a:cs typeface="+mn-cs"/>
+      </a:defRPr>
+    </a:lvl4pPr>
+    <a:lvl5pPr marL="1828800" algn="l" defTabSz="914400" rtl="0" eaLnBrk="1" latinLnBrk="0" hangingPunct="1">
+      <a:defRPr sz="1800" kern="1200">
+        <a:solidFill>
+          <a:schemeClr val="tx1"/>
+        </a:solidFill>
+        <a:latin typeface="+mn-lt"/>
+        <a:ea typeface="+mn-ea"/>
+        <a:cs typeface="+mn-cs"/>
+      </a:defRPr>
+    </a:lvl5pPr>
+    <a:lvl6pPr marL="2286000" algn="l" defTabSz="914400" rtl="0" eaLnBrk="1" latinLnBrk="0" hangingPunct="1">
+      <a:defRPr sz="1800" kern="1200">
+        <a:solidFill>
+          <a:schemeClr val="tx1"/>
+        </a:solidFill>
+        <a:latin typeface="+mn-lt"/>
+        <a:ea typeface="+mn-ea"/>
+        <a:cs typeface="+mn-cs"/>
+      </a:defRPr>
+    </a:lvl6pPr>
+    <a:lvl7pPr marL="2743200" algn="l" defTabSz="914400" rtl="0" eaLnBrk="1" latinLnBrk="0" hangingPunct="1">
+      <a:defRPr sz="1800" kern="1200">
+        <a:solidFill>
+          <a:schemeClr val="tx1"/>
+        </a:solidFill>
+        <a:latin typeface="+mn-lt"/>
+        <a:ea typeface="+mn-ea"/>
+        <a:cs typeface="+mn-cs"/>
+      </a:defRPr>
+    </a:lvl7pPr>
+    <a:lvl8pPr marL="3200400" algn="l" defTabSz="914400" rtl="0" eaLnBrk="1" latinLnBrk="0" hangingPunct="1">
+      <a:defRPr sz="1800" kern="1200">
+        <a:solidFill>
+          <a:schemeClr val="tx1"/>
+        </a:solidFill>
+        <a:latin typeface="+mn-lt"/>
+        <a:ea typeface="+mn-ea"/>
+        <a:cs typeface="+mn-cs"/>
+      </a:defRPr>
+    </a:lvl8pPr>
+    <a:lvl9pPr marL="3657600" algn="l" defTabSz="914400" rtl="0" eaLnBrk="1" latinLnBrk="0" hangingPunct="1">
+      <a:defRPr sz="1800" kern="1200">
+        <a:solidFill>
+          <a:schemeClr val="tx1"/>
+        </a:solidFill>
+        <a:latin typeface="+mn-lt"/>
+        <a:ea typeface="+mn-ea"/>
+        <a:cs typeface="+mn-cs"/>
+      </a:defRPr>
+    </a:lvl9pPr>
+  </p:defaultTextStyle>
 </p:presentation>
 </file>
 
 <file path=ppt/notesMasters/notesMaster1.xml><?xml version="1.0" encoding="utf-8"?>
-<p:notesMaster xmlns:p="http://schemas.openxmlformats.org/presentationml/2006/main">
+<p:notesMaster xmlns:a="http://schemas.openxmlformats.org/drawingml/2006/main" xmlns:r="http://schemas.openxmlformats.org/officeDocument/2006/relationships" xmlns:p="http://schemas.openxmlformats.org/presentationml/2006/main">
   <p:cSld>
     <p:bg>
       <p:bgRef idx="1001">
-        <a:schemeClr xmlns:a="http://schemas.openxmlformats.org/drawingml/2006/main" val="bg1"/>
+        <a:schemeClr val="bg1"/>
       </p:bgRef>
     </p:bg>
     <p:spTree>
@@ -36,9 +128,7 @@
         <p:cNvGrpSpPr/>
         <p:nvPr/>
       </p:nvGrpSpPr>
-      <p:grpSpPr>
-        <a:xfrm xmlns:a="http://schemas.openxmlformats.org/drawingml/2006/main"/>
-      </p:grpSpPr>
+      <p:grpSpPr/>
       <p:sp>
         <p:nvSpPr>
           <p:cNvPr id="2" name="Header Placeholder"/>
@@ -48,14 +138,14 @@
           </p:nvPr>
         </p:nvSpPr>
         <p:spPr>
-          <a:prstGeom xmlns:a="http://schemas.openxmlformats.org/drawingml/2006/main" prst="rect">
+          <a:prstGeom prst="rect">
             <a:avLst/>
           </a:prstGeom>
         </p:spPr>
         <p:txBody>
-          <a:bodyPr xmlns:a="http://schemas.openxmlformats.org/drawingml/2006/main"/>
-          <a:lstStyle xmlns:a="http://schemas.openxmlformats.org/drawingml/2006/main"/>
-          <a:p xmlns:a="http://schemas.openxmlformats.org/drawingml/2006/main"/>
+          <a:bodyPr/>
+          <a:lstStyle/>
+          <a:p/>
         </p:txBody>
       </p:sp>
       <p:sp>
@@ -67,14 +157,14 @@
           </p:nvPr>
         </p:nvSpPr>
         <p:spPr>
-          <a:prstGeom xmlns:a="http://schemas.openxmlformats.org/drawingml/2006/main" prst="rect">
+          <a:prstGeom prst="rect">
             <a:avLst/>
           </a:prstGeom>
         </p:spPr>
         <p:txBody>
-          <a:bodyPr xmlns:a="http://schemas.openxmlformats.org/drawingml/2006/main"/>
-          <a:lstStyle xmlns:a="http://schemas.openxmlformats.org/drawingml/2006/main"/>
-          <a:p xmlns:a="http://schemas.openxmlformats.org/drawingml/2006/main"/>
+          <a:bodyPr/>
+          <a:lstStyle/>
+          <a:p/>
         </p:txBody>
       </p:sp>
       <p:sp>
@@ -86,14 +176,14 @@
           </p:nvPr>
         </p:nvSpPr>
         <p:spPr>
-          <a:prstGeom xmlns:a="http://schemas.openxmlformats.org/drawingml/2006/main" prst="rect">
+          <a:prstGeom prst="rect">
             <a:avLst/>
           </a:prstGeom>
         </p:spPr>
         <p:txBody>
-          <a:bodyPr xmlns:a="http://schemas.openxmlformats.org/drawingml/2006/main"/>
-          <a:lstStyle xmlns:a="http://schemas.openxmlformats.org/drawingml/2006/main"/>
-          <a:p xmlns:a="http://schemas.openxmlformats.org/drawingml/2006/main"/>
+          <a:bodyPr/>
+          <a:lstStyle/>
+          <a:p/>
         </p:txBody>
       </p:sp>
       <p:sp>
@@ -105,14 +195,14 @@
           </p:nvPr>
         </p:nvSpPr>
         <p:spPr>
-          <a:prstGeom xmlns:a="http://schemas.openxmlformats.org/drawingml/2006/main" prst="rect">
+          <a:prstGeom prst="rect">
             <a:avLst/>
           </a:prstGeom>
         </p:spPr>
         <p:txBody>
-          <a:bodyPr xmlns:a="http://schemas.openxmlformats.org/drawingml/2006/main"/>
-          <a:lstStyle xmlns:a="http://schemas.openxmlformats.org/drawingml/2006/main"/>
-          <a:p xmlns:a="http://schemas.openxmlformats.org/drawingml/2006/main"/>
+          <a:bodyPr/>
+          <a:lstStyle/>
+          <a:p/>
         </p:txBody>
       </p:sp>
       <p:sp>
@@ -124,14 +214,14 @@
           </p:nvPr>
         </p:nvSpPr>
         <p:spPr>
-          <a:prstGeom xmlns:a="http://schemas.openxmlformats.org/drawingml/2006/main" prst="rect">
+          <a:prstGeom prst="rect">
             <a:avLst/>
           </a:prstGeom>
         </p:spPr>
         <p:txBody>
-          <a:bodyPr xmlns:a="http://schemas.openxmlformats.org/drawingml/2006/main"/>
-          <a:lstStyle xmlns:a="http://schemas.openxmlformats.org/drawingml/2006/main"/>
-          <a:p xmlns:a="http://schemas.openxmlformats.org/drawingml/2006/main"/>
+          <a:bodyPr/>
+          <a:lstStyle/>
+          <a:p/>
         </p:txBody>
       </p:sp>
       <p:sp>
@@ -143,274 +233,29 @@
           </p:nvPr>
         </p:nvSpPr>
         <p:spPr>
-          <a:prstGeom xmlns:a="http://schemas.openxmlformats.org/drawingml/2006/main" prst="rect">
+          <a:prstGeom prst="rect">
             <a:avLst/>
           </a:prstGeom>
         </p:spPr>
         <p:txBody>
-          <a:bodyPr xmlns:a="http://schemas.openxmlformats.org/drawingml/2006/main"/>
-          <a:lstStyle xmlns:a="http://schemas.openxmlformats.org/drawingml/2006/main"/>
-          <a:p xmlns:a="http://schemas.openxmlformats.org/drawingml/2006/main"/>
+          <a:bodyPr/>
+          <a:lstStyle/>
+          <a:p/>
         </p:txBody>
       </p:sp>
     </p:spTree>
   </p:cSld>
   <p:clrMap bg1="lt1" tx1="dk1" bg2="lt2" tx2="dk2" accent1="accent1" accent2="accent2" accent3="accent3" accent4="accent4" accent5="accent5" accent6="accent6" hlink="hlink" folHlink="folHlink"/>
   <p:notesStyle>
-    <a:lvl1pPr xmlns:a="http://schemas.openxmlformats.org/drawingml/2006/main" marL="0" algn="l" defTabSz="914400" rtl="0" eaLnBrk="1" latinLnBrk="0" hangingPunct="1">
+    <a:lvl1pPr marL="0" algn="l" defTabSz="914400" rtl="0" eaLnBrk="1" latinLnBrk="0" hangingPunct="1">
       <a:defRPr sz="1200" kern="1200"/>
     </a:lvl1pPr>
   </p:notesStyle>
 </p:notesMaster>
 </file>
 
-<file path=ppt/notesMasters/theme/theme3.xml><?xml version="1.0" encoding="utf-8"?>
-<a:theme xmlns:a="http://schemas.openxmlformats.org/drawingml/2006/main" name="ChatGPT">
-  <a:themeElements>
-    <a:clrScheme name="ChatGPT">
-      <a:dk1>
-        <a:srgbClr val="000000"/>
-      </a:dk1>
-      <a:lt1>
-        <a:srgbClr val="FFFFFF"/>
-      </a:lt1>
-      <a:dk2>
-        <a:srgbClr val="0E2841"/>
-      </a:dk2>
-      <a:lt2>
-        <a:srgbClr val="E8E8E8"/>
-      </a:lt2>
-      <a:accent1>
-        <a:srgbClr val="156082"/>
-      </a:accent1>
-      <a:accent2>
-        <a:srgbClr val="E97132"/>
-      </a:accent2>
-      <a:accent3>
-        <a:srgbClr val="196B24"/>
-      </a:accent3>
-      <a:accent4>
-        <a:srgbClr val="0F9ED5"/>
-      </a:accent4>
-      <a:accent5>
-        <a:srgbClr val="A02B93"/>
-      </a:accent5>
-      <a:accent6>
-        <a:srgbClr val="4EA72E"/>
-      </a:accent6>
-      <a:hlink>
-        <a:srgbClr val="467886"/>
-      </a:hlink>
-      <a:folHlink>
-        <a:srgbClr val="96607D"/>
-      </a:folHlink>
-    </a:clrScheme>
-    <a:fontScheme name="Office">
-      <a:majorFont>
-        <a:latin typeface="Calibri Light"/>
-        <a:ea typeface="Calibri Light"/>
-        <a:cs typeface="Calibri Light"/>
-      </a:majorFont>
-      <a:minorFont>
-        <a:latin typeface="Calibri"/>
-        <a:ea typeface="Calibri"/>
-        <a:cs typeface="Calibri"/>
-      </a:minorFont>
-    </a:fontScheme>
-    <a:fmtScheme name="ChatGPT">
-      <a:fillStyleLst>
-        <a:solidFill>
-          <a:schemeClr val="phClr"/>
-        </a:solidFill>
-        <a:gradFill>
-          <a:gsLst>
-            <a:gs pos="0">
-              <a:schemeClr val="phClr">
-                <a:tint val="67000"/>
-                <a:lumMod val="110000"/>
-                <a:satMod val="105000"/>
-              </a:schemeClr>
-            </a:gs>
-            <a:gs pos="50000">
-              <a:schemeClr val="phClr">
-                <a:tint val="73000"/>
-                <a:lumMod val="105000"/>
-                <a:satMod val="103000"/>
-              </a:schemeClr>
-            </a:gs>
-            <a:gs pos="100000">
-              <a:schemeClr val="phClr">
-                <a:tint val="81000"/>
-                <a:lumMod val="105000"/>
-                <a:satMod val="109000"/>
-              </a:schemeClr>
-            </a:gs>
-          </a:gsLst>
-          <a:lin ang="5400000" scaled="0"/>
-        </a:gradFill>
-        <a:gradFill>
-          <a:gsLst>
-            <a:gs pos="0">
-              <a:schemeClr val="phClr">
-                <a:tint val="94000"/>
-                <a:lumMod val="102000"/>
-                <a:satMod val="103000"/>
-              </a:schemeClr>
-            </a:gs>
-            <a:gs pos="50000">
-              <a:schemeClr val="phClr">
-                <a:shade val="100000"/>
-                <a:lumMod val="100000"/>
-                <a:satMod val="110000"/>
-              </a:schemeClr>
-            </a:gs>
-            <a:gs pos="100000">
-              <a:schemeClr val="phClr">
-                <a:shade val="78000"/>
-                <a:lumMod val="99000"/>
-                <a:satMod val="120000"/>
-              </a:schemeClr>
-            </a:gs>
-          </a:gsLst>
-          <a:lin ang="5400000" scaled="0"/>
-        </a:gradFill>
-      </a:fillStyleLst>
-      <a:lnStyleLst>
-        <a:ln w="12700">
-          <a:solidFill>
-            <a:schemeClr val="phClr"/>
-          </a:solidFill>
-          <a:prstDash val="solid"/>
-        </a:ln>
-        <a:ln w="19050">
-          <a:solidFill>
-            <a:schemeClr val="phClr"/>
-          </a:solidFill>
-          <a:prstDash val="solid"/>
-        </a:ln>
-        <a:ln w="25400">
-          <a:solidFill>
-            <a:schemeClr val="phClr"/>
-          </a:solidFill>
-          <a:prstDash val="solid"/>
-        </a:ln>
-      </a:lnStyleLst>
-      <a:effectStyleLst>
-        <a:effectStyle>
-          <a:effectLst/>
-        </a:effectStyle>
-        <a:effectStyle>
-          <a:effectLst/>
-        </a:effectStyle>
-        <a:effectStyle>
-          <a:effectLst>
-            <a:outerShdw blurRad="57150" dist="19050" dir="5400000">
-              <a:srgbClr val="000000">
-                <a:alpha val="16000"/>
-              </a:srgbClr>
-            </a:outerShdw>
-          </a:effectLst>
-        </a:effectStyle>
-        <a:effectStyle>
-          <a:effectLst>
-            <a:outerShdw blurRad="19050" dist="9525" dir="5400000">
-              <a:srgbClr val="000000">
-                <a:alpha val="6000"/>
-              </a:srgbClr>
-            </a:outerShdw>
-          </a:effectLst>
-        </a:effectStyle>
-        <a:effectStyle>
-          <a:effectLst>
-            <a:outerShdw blurRad="28575" dist="9525" dir="5400000">
-              <a:srgbClr val="000000">
-                <a:alpha val="8000"/>
-              </a:srgbClr>
-            </a:outerShdw>
-          </a:effectLst>
-        </a:effectStyle>
-        <a:effectStyle>
-          <a:effectLst>
-            <a:outerShdw blurRad="57150" dist="19050" dir="5400000">
-              <a:srgbClr val="000000">
-                <a:alpha val="10000"/>
-              </a:srgbClr>
-            </a:outerShdw>
-          </a:effectLst>
-        </a:effectStyle>
-        <a:effectStyle>
-          <a:effectLst>
-            <a:outerShdw blurRad="114300" dist="38100" dir="5400000">
-              <a:srgbClr val="000000">
-                <a:alpha val="12000"/>
-              </a:srgbClr>
-            </a:outerShdw>
-          </a:effectLst>
-        </a:effectStyle>
-        <a:effectStyle>
-          <a:effectLst>
-            <a:outerShdw blurRad="171450" dist="57150" dir="5400000">
-              <a:srgbClr val="000000">
-                <a:alpha val="16000"/>
-              </a:srgbClr>
-            </a:outerShdw>
-          </a:effectLst>
-        </a:effectStyle>
-        <a:effectStyle>
-          <a:effectLst>
-            <a:outerShdw blurRad="266700" dist="95250" dir="5400000">
-              <a:srgbClr val="000000">
-                <a:alpha val="24000"/>
-              </a:srgbClr>
-            </a:outerShdw>
-          </a:effectLst>
-        </a:effectStyle>
-      </a:effectStyleLst>
-      <a:bgFillStyleLst>
-        <a:solidFill>
-          <a:schemeClr val="phClr"/>
-        </a:solidFill>
-        <a:solidFill>
-          <a:schemeClr val="phClr">
-            <a:tint val="95000"/>
-            <a:satMod val="170000"/>
-          </a:schemeClr>
-        </a:solidFill>
-        <a:gradFill>
-          <a:gsLst>
-            <a:gs pos="0">
-              <a:schemeClr val="phClr">
-                <a:tint val="93000"/>
-                <a:shade val="98000"/>
-                <a:lumMod val="102000"/>
-                <a:satMod val="150000"/>
-              </a:schemeClr>
-            </a:gs>
-            <a:gs pos="50000">
-              <a:schemeClr val="phClr">
-                <a:tint val="98000"/>
-                <a:shade val="90000"/>
-                <a:lumMod val="103000"/>
-                <a:satMod val="130000"/>
-              </a:schemeClr>
-            </a:gs>
-            <a:gs pos="100000">
-              <a:schemeClr val="phClr">
-                <a:shade val="63000"/>
-                <a:satMod val="120000"/>
-              </a:schemeClr>
-            </a:gs>
-          </a:gsLst>
-          <a:lin ang="5400000" scaled="0"/>
-        </a:gradFill>
-      </a:bgFillStyleLst>
-    </a:fmtScheme>
-  </a:themeElements>
-</a:theme>
-</file>
-
 <file path=ppt/notesSlides/notesSlide1.xml><?xml version="1.0" encoding="utf-8"?>
-<p:notes xmlns:p="http://schemas.openxmlformats.org/presentationml/2006/main">
+<p:notes xmlns:a="http://schemas.openxmlformats.org/drawingml/2006/main" xmlns:r="http://schemas.openxmlformats.org/officeDocument/2006/relationships" xmlns:p="http://schemas.openxmlformats.org/presentationml/2006/main">
   <p:cSld>
     <p:spTree>
       <p:nvGrpSpPr>
@@ -418,17 +263,15 @@
         <p:cNvGrpSpPr/>
         <p:nvPr/>
       </p:nvGrpSpPr>
-      <p:grpSpPr>
-        <a:xfrm xmlns:a="http://schemas.openxmlformats.org/drawingml/2006/main"/>
-      </p:grpSpPr>
+      <p:grpSpPr/>
       <p:sp>
         <p:nvSpPr>
           <p:cNvPr id="2" name="Slide Image Placeholder 1"/>
           <p:cNvSpPr>
-            <a:spLocks xmlns:a="http://schemas.openxmlformats.org/drawingml/2006/main" noGrp="1"/>
+            <a:spLocks noGrp="1"/>
           </p:cNvSpPr>
           <p:nvPr>
-            <p:ph type="sldImg" idx="0"/>
+            <p:ph type="sldImg"/>
           </p:nvPr>
         </p:nvSpPr>
         <p:spPr/>
@@ -437,7 +280,7 @@
         <p:nvSpPr>
           <p:cNvPr id="3" name="Notes Placeholder 2"/>
           <p:cNvSpPr>
-            <a:spLocks xmlns:a="http://schemas.openxmlformats.org/drawingml/2006/main" noGrp="1"/>
+            <a:spLocks noGrp="1"/>
           </p:cNvSpPr>
           <p:nvPr>
             <p:ph type="body" idx="1"/>
@@ -445,9 +288,9 @@
         </p:nvSpPr>
         <p:spPr/>
         <p:txBody>
-          <a:bodyPr xmlns:a="http://schemas.openxmlformats.org/drawingml/2006/main"/>
-          <a:lstStyle xmlns:a="http://schemas.openxmlformats.org/drawingml/2006/main"/>
-          <a:p xmlns:a="http://schemas.openxmlformats.org/drawingml/2006/main">
+          <a:bodyPr/>
+          <a:lstStyle/>
+          <a:p>
             <a:r>
               <a:t>讲述范围：本次收敛为 GOTSF 独立工程。旧 Week1 至 Week7 保留备份。当前系统为离线实验和交互分析，不是实时生产告警平台。来源：本地 core 与 assets，docs/第八周_GOTSF项目技术报告.docx。</a:t>
             </a:r>
@@ -458,7 +301,7 @@
         <p:nvSpPr>
           <p:cNvPr id="4" name="Slide Number Placeholder 3"/>
           <p:cNvSpPr>
-            <a:spLocks xmlns:a="http://schemas.openxmlformats.org/drawingml/2006/main" noGrp="1"/>
+            <a:spLocks noGrp="1"/>
           </p:cNvSpPr>
           <p:nvPr>
             <p:ph type="sldNum" idx="5"/>
@@ -466,21 +309,21 @@
         </p:nvSpPr>
         <p:spPr/>
         <p:txBody>
-          <a:bodyPr xmlns:a="http://schemas.openxmlformats.org/drawingml/2006/main"/>
-          <a:lstStyle xmlns:a="http://schemas.openxmlformats.org/drawingml/2006/main"/>
-          <a:p xmlns:a="http://schemas.openxmlformats.org/drawingml/2006/main"/>
+          <a:bodyPr/>
+          <a:lstStyle/>
+          <a:p/>
         </p:txBody>
       </p:sp>
     </p:spTree>
   </p:cSld>
   <p:clrMapOvr>
-    <a:masterClrMapping xmlns:a="http://schemas.openxmlformats.org/drawingml/2006/main"/>
+    <a:masterClrMapping/>
   </p:clrMapOvr>
 </p:notes>
 </file>
 
 <file path=ppt/notesSlides/notesSlide2.xml><?xml version="1.0" encoding="utf-8"?>
-<p:notes xmlns:p="http://schemas.openxmlformats.org/presentationml/2006/main">
+<p:notes xmlns:a="http://schemas.openxmlformats.org/drawingml/2006/main" xmlns:r="http://schemas.openxmlformats.org/officeDocument/2006/relationships" xmlns:p="http://schemas.openxmlformats.org/presentationml/2006/main">
   <p:cSld>
     <p:spTree>
       <p:nvGrpSpPr>
@@ -488,17 +331,15 @@
         <p:cNvGrpSpPr/>
         <p:nvPr/>
       </p:nvGrpSpPr>
-      <p:grpSpPr>
-        <a:xfrm xmlns:a="http://schemas.openxmlformats.org/drawingml/2006/main"/>
-      </p:grpSpPr>
+      <p:grpSpPr/>
       <p:sp>
         <p:nvSpPr>
           <p:cNvPr id="2" name="Slide Image Placeholder 1"/>
           <p:cNvSpPr>
-            <a:spLocks xmlns:a="http://schemas.openxmlformats.org/drawingml/2006/main" noGrp="1"/>
+            <a:spLocks noGrp="1"/>
           </p:cNvSpPr>
           <p:nvPr>
-            <p:ph type="sldImg" idx="0"/>
+            <p:ph type="sldImg"/>
           </p:nvPr>
         </p:nvSpPr>
         <p:spPr/>
@@ -507,7 +348,7 @@
         <p:nvSpPr>
           <p:cNvPr id="3" name="Notes Placeholder 2"/>
           <p:cNvSpPr>
-            <a:spLocks xmlns:a="http://schemas.openxmlformats.org/drawingml/2006/main" noGrp="1"/>
+            <a:spLocks noGrp="1"/>
           </p:cNvSpPr>
           <p:nvPr>
             <p:ph type="body" idx="1"/>
@@ -515,9 +356,9 @@
         </p:nvSpPr>
         <p:spPr/>
         <p:txBody>
-          <a:bodyPr xmlns:a="http://schemas.openxmlformats.org/drawingml/2006/main"/>
-          <a:lstStyle xmlns:a="http://schemas.openxmlformats.org/drawingml/2006/main"/>
-          <a:p xmlns:a="http://schemas.openxmlformats.org/drawingml/2006/main">
+          <a:bodyPr/>
+          <a:lstStyle/>
+          <a:p>
             <a:r>
               <a:t>来源：assets/prediction/data/manifest.json；assets/anomaly/DLPRB/reference_assignments.json；evidence/migration_audit.json。预测最终使用训练加验证的 960 窗口拟合。检测每项跨 90 小区汇总，两个测试段各 168 小时，分开展示。</a:t>
             </a:r>
@@ -528,7 +369,7 @@
         <p:nvSpPr>
           <p:cNvPr id="4" name="Slide Number Placeholder 3"/>
           <p:cNvSpPr>
-            <a:spLocks xmlns:a="http://schemas.openxmlformats.org/drawingml/2006/main" noGrp="1"/>
+            <a:spLocks noGrp="1"/>
           </p:cNvSpPr>
           <p:nvPr>
             <p:ph type="sldNum" idx="5"/>
@@ -536,21 +377,21 @@
         </p:nvSpPr>
         <p:spPr/>
         <p:txBody>
-          <a:bodyPr xmlns:a="http://schemas.openxmlformats.org/drawingml/2006/main"/>
-          <a:lstStyle xmlns:a="http://schemas.openxmlformats.org/drawingml/2006/main"/>
-          <a:p xmlns:a="http://schemas.openxmlformats.org/drawingml/2006/main"/>
+          <a:bodyPr/>
+          <a:lstStyle/>
+          <a:p/>
         </p:txBody>
       </p:sp>
     </p:spTree>
   </p:cSld>
   <p:clrMapOvr>
-    <a:masterClrMapping xmlns:a="http://schemas.openxmlformats.org/drawingml/2006/main"/>
+    <a:masterClrMapping/>
   </p:clrMapOvr>
 </p:notes>
 </file>
 
 <file path=ppt/notesSlides/notesSlide3.xml><?xml version="1.0" encoding="utf-8"?>
-<p:notes xmlns:p="http://schemas.openxmlformats.org/presentationml/2006/main">
+<p:notes xmlns:a="http://schemas.openxmlformats.org/drawingml/2006/main" xmlns:r="http://schemas.openxmlformats.org/officeDocument/2006/relationships" xmlns:p="http://schemas.openxmlformats.org/presentationml/2006/main">
   <p:cSld>
     <p:spTree>
       <p:nvGrpSpPr>
@@ -558,17 +399,15 @@
         <p:cNvGrpSpPr/>
         <p:nvPr/>
       </p:nvGrpSpPr>
-      <p:grpSpPr>
-        <a:xfrm xmlns:a="http://schemas.openxmlformats.org/drawingml/2006/main"/>
-      </p:grpSpPr>
+      <p:grpSpPr/>
       <p:sp>
         <p:nvSpPr>
           <p:cNvPr id="2" name="Slide Image Placeholder 1"/>
           <p:cNvSpPr>
-            <a:spLocks xmlns:a="http://schemas.openxmlformats.org/drawingml/2006/main" noGrp="1"/>
+            <a:spLocks noGrp="1"/>
           </p:cNvSpPr>
           <p:nvPr>
-            <p:ph type="sldImg" idx="0"/>
+            <p:ph type="sldImg"/>
           </p:nvPr>
         </p:nvSpPr>
         <p:spPr/>
@@ -577,7 +416,7 @@
         <p:nvSpPr>
           <p:cNvPr id="3" name="Notes Placeholder 2"/>
           <p:cNvSpPr>
-            <a:spLocks xmlns:a="http://schemas.openxmlformats.org/drawingml/2006/main" noGrp="1"/>
+            <a:spLocks noGrp="1"/>
           </p:cNvSpPr>
           <p:nvPr>
             <p:ph type="body" idx="1"/>
@@ -585,9 +424,9 @@
         </p:nvSpPr>
         <p:spPr/>
         <p:txBody>
-          <a:bodyPr xmlns:a="http://schemas.openxmlformats.org/drawingml/2006/main"/>
-          <a:lstStyle xmlns:a="http://schemas.openxmlformats.org/drawingml/2006/main"/>
-          <a:p xmlns:a="http://schemas.openxmlformats.org/drawingml/2006/main">
+          <a:bodyPr/>
+          <a:lstStyle/>
+          <a:p>
             <a:r>
               <a:t>来源：core/models.py；assets/prediction/models/LSTM/run.json；assets/prediction/data/manifest.json。各时间步共享权重，初始隐藏状态与记忆状态默认零。Adam/MSE；最终固定 80 轮，选择阶段使用验证平均 RMSE 与 patience=12。预测不是多步递归。</a:t>
             </a:r>
@@ -598,7 +437,7 @@
         <p:nvSpPr>
           <p:cNvPr id="4" name="Slide Number Placeholder 3"/>
           <p:cNvSpPr>
-            <a:spLocks xmlns:a="http://schemas.openxmlformats.org/drawingml/2006/main" noGrp="1"/>
+            <a:spLocks noGrp="1"/>
           </p:cNvSpPr>
           <p:nvPr>
             <p:ph type="sldNum" idx="5"/>
@@ -606,21 +445,21 @@
         </p:nvSpPr>
         <p:spPr/>
         <p:txBody>
-          <a:bodyPr xmlns:a="http://schemas.openxmlformats.org/drawingml/2006/main"/>
-          <a:lstStyle xmlns:a="http://schemas.openxmlformats.org/drawingml/2006/main"/>
-          <a:p xmlns:a="http://schemas.openxmlformats.org/drawingml/2006/main"/>
+          <a:bodyPr/>
+          <a:lstStyle/>
+          <a:p/>
         </p:txBody>
       </p:sp>
     </p:spTree>
   </p:cSld>
   <p:clrMapOvr>
-    <a:masterClrMapping xmlns:a="http://schemas.openxmlformats.org/drawingml/2006/main"/>
+    <a:masterClrMapping/>
   </p:clrMapOvr>
 </p:notes>
 </file>
 
 <file path=ppt/notesSlides/notesSlide4.xml><?xml version="1.0" encoding="utf-8"?>
-<p:notes xmlns:p="http://schemas.openxmlformats.org/presentationml/2006/main">
+<p:notes xmlns:a="http://schemas.openxmlformats.org/drawingml/2006/main" xmlns:r="http://schemas.openxmlformats.org/officeDocument/2006/relationships" xmlns:p="http://schemas.openxmlformats.org/presentationml/2006/main">
   <p:cSld>
     <p:spTree>
       <p:nvGrpSpPr>
@@ -628,17 +467,15 @@
         <p:cNvGrpSpPr/>
         <p:nvPr/>
       </p:nvGrpSpPr>
-      <p:grpSpPr>
-        <a:xfrm xmlns:a="http://schemas.openxmlformats.org/drawingml/2006/main"/>
-      </p:grpSpPr>
+      <p:grpSpPr/>
       <p:sp>
         <p:nvSpPr>
           <p:cNvPr id="2" name="Slide Image Placeholder 1"/>
           <p:cNvSpPr>
-            <a:spLocks xmlns:a="http://schemas.openxmlformats.org/drawingml/2006/main" noGrp="1"/>
+            <a:spLocks noGrp="1"/>
           </p:cNvSpPr>
           <p:nvPr>
-            <p:ph type="sldImg" idx="0"/>
+            <p:ph type="sldImg"/>
           </p:nvPr>
         </p:nvSpPr>
         <p:spPr/>
@@ -647,7 +484,7 @@
         <p:nvSpPr>
           <p:cNvPr id="3" name="Notes Placeholder 2"/>
           <p:cNvSpPr>
-            <a:spLocks xmlns:a="http://schemas.openxmlformats.org/drawingml/2006/main" noGrp="1"/>
+            <a:spLocks noGrp="1"/>
           </p:cNvSpPr>
           <p:nvPr>
             <p:ph type="body" idx="1"/>
@@ -655,9 +492,9 @@
         </p:nvSpPr>
         <p:spPr/>
         <p:txBody>
-          <a:bodyPr xmlns:a="http://schemas.openxmlformats.org/drawingml/2006/main"/>
-          <a:lstStyle xmlns:a="http://schemas.openxmlformats.org/drawingml/2006/main"/>
-          <a:p xmlns:a="http://schemas.openxmlformats.org/drawingml/2006/main">
+          <a:bodyPr/>
+          <a:lstStyle/>
+          <a:p>
             <a:r>
               <a:t>来源：evidence/current_prediction_metrics.csv，2026-10-03 本机 CPU 复算。MAE/RMSE 在 Z-score 尺度；不是物理误差单位。输入沿用原全源统计预处理，存在信息泄漏局限，不能作为严格部署基准，也不证明优于所有其他算法。</a:t>
             </a:r>
@@ -668,7 +505,7 @@
         <p:nvSpPr>
           <p:cNvPr id="4" name="Slide Number Placeholder 3"/>
           <p:cNvSpPr>
-            <a:spLocks xmlns:a="http://schemas.openxmlformats.org/drawingml/2006/main" noGrp="1"/>
+            <a:spLocks noGrp="1"/>
           </p:cNvSpPr>
           <p:nvPr>
             <p:ph type="sldNum" idx="5"/>
@@ -676,21 +513,21 @@
         </p:nvSpPr>
         <p:spPr/>
         <p:txBody>
-          <a:bodyPr xmlns:a="http://schemas.openxmlformats.org/drawingml/2006/main"/>
-          <a:lstStyle xmlns:a="http://schemas.openxmlformats.org/drawingml/2006/main"/>
-          <a:p xmlns:a="http://schemas.openxmlformats.org/drawingml/2006/main"/>
+          <a:bodyPr/>
+          <a:lstStyle/>
+          <a:p/>
         </p:txBody>
       </p:sp>
     </p:spTree>
   </p:cSld>
   <p:clrMapOvr>
-    <a:masterClrMapping xmlns:a="http://schemas.openxmlformats.org/drawingml/2006/main"/>
+    <a:masterClrMapping/>
   </p:clrMapOvr>
 </p:notes>
 </file>
 
 <file path=ppt/notesSlides/notesSlide5.xml><?xml version="1.0" encoding="utf-8"?>
-<p:notes xmlns:p="http://schemas.openxmlformats.org/presentationml/2006/main">
+<p:notes xmlns:a="http://schemas.openxmlformats.org/drawingml/2006/main" xmlns:r="http://schemas.openxmlformats.org/officeDocument/2006/relationships" xmlns:p="http://schemas.openxmlformats.org/presentationml/2006/main">
   <p:cSld>
     <p:spTree>
       <p:nvGrpSpPr>
@@ -698,17 +535,15 @@
         <p:cNvGrpSpPr/>
         <p:nvPr/>
       </p:nvGrpSpPr>
-      <p:grpSpPr>
-        <a:xfrm xmlns:a="http://schemas.openxmlformats.org/drawingml/2006/main"/>
-      </p:grpSpPr>
+      <p:grpSpPr/>
       <p:sp>
         <p:nvSpPr>
           <p:cNvPr id="2" name="Slide Image Placeholder 1"/>
           <p:cNvSpPr>
-            <a:spLocks xmlns:a="http://schemas.openxmlformats.org/drawingml/2006/main" noGrp="1"/>
+            <a:spLocks noGrp="1"/>
           </p:cNvSpPr>
           <p:nvPr>
-            <p:ph type="sldImg" idx="0"/>
+            <p:ph type="sldImg"/>
           </p:nvPr>
         </p:nvSpPr>
         <p:spPr/>
@@ -717,7 +552,7 @@
         <p:nvSpPr>
           <p:cNvPr id="3" name="Notes Placeholder 2"/>
           <p:cNvSpPr>
-            <a:spLocks xmlns:a="http://schemas.openxmlformats.org/drawingml/2006/main" noGrp="1"/>
+            <a:spLocks noGrp="1"/>
           </p:cNvSpPr>
           <p:nvPr>
             <p:ph type="body" idx="1"/>
@@ -725,9 +560,9 @@
         </p:nvSpPr>
         <p:spPr/>
         <p:txBody>
-          <a:bodyPr xmlns:a="http://schemas.openxmlformats.org/drawingml/2006/main"/>
-          <a:lstStyle xmlns:a="http://schemas.openxmlformats.org/drawingml/2006/main"/>
-          <a:p xmlns:a="http://schemas.openxmlformats.org/drawingml/2006/main">
+          <a:bodyPr/>
+          <a:lstStyle/>
+          <a:p>
             <a:r>
               <a:t>实际截图：week7/用户说明书制作/screenshots/02_prediction_result.png，原系统操作记录。新工程保留同一交互流程，自动化页面测试通过。演示顺序：自定义输入，第一测试窗口，DLPRB 最后 3 小时加 0.30，点击应用后再预测。解释原始预测、当前预测与变化量；0.30 是 Z-score，不是 30%。支持恢复、下载和历史结果筛选。</a:t>
             </a:r>
@@ -738,7 +573,7 @@
         <p:nvSpPr>
           <p:cNvPr id="4" name="Slide Number Placeholder 3"/>
           <p:cNvSpPr>
-            <a:spLocks xmlns:a="http://schemas.openxmlformats.org/drawingml/2006/main" noGrp="1"/>
+            <a:spLocks noGrp="1"/>
           </p:cNvSpPr>
           <p:nvPr>
             <p:ph type="sldNum" idx="5"/>
@@ -746,21 +581,21 @@
         </p:nvSpPr>
         <p:spPr/>
         <p:txBody>
-          <a:bodyPr xmlns:a="http://schemas.openxmlformats.org/drawingml/2006/main"/>
-          <a:lstStyle xmlns:a="http://schemas.openxmlformats.org/drawingml/2006/main"/>
-          <a:p xmlns:a="http://schemas.openxmlformats.org/drawingml/2006/main"/>
+          <a:bodyPr/>
+          <a:lstStyle/>
+          <a:p/>
         </p:txBody>
       </p:sp>
     </p:spTree>
   </p:cSld>
   <p:clrMapOvr>
-    <a:masterClrMapping xmlns:a="http://schemas.openxmlformats.org/drawingml/2006/main"/>
+    <a:masterClrMapping/>
   </p:clrMapOvr>
 </p:notes>
 </file>
 
 <file path=ppt/notesSlides/notesSlide6.xml><?xml version="1.0" encoding="utf-8"?>
-<p:notes xmlns:p="http://schemas.openxmlformats.org/presentationml/2006/main">
+<p:notes xmlns:a="http://schemas.openxmlformats.org/drawingml/2006/main" xmlns:r="http://schemas.openxmlformats.org/officeDocument/2006/relationships" xmlns:p="http://schemas.openxmlformats.org/presentationml/2006/main">
   <p:cSld>
     <p:spTree>
       <p:nvGrpSpPr>
@@ -768,17 +603,15 @@
         <p:cNvGrpSpPr/>
         <p:nvPr/>
       </p:nvGrpSpPr>
-      <p:grpSpPr>
-        <a:xfrm xmlns:a="http://schemas.openxmlformats.org/drawingml/2006/main"/>
-      </p:grpSpPr>
+      <p:grpSpPr/>
       <p:sp>
         <p:nvSpPr>
           <p:cNvPr id="2" name="Slide Image Placeholder 1"/>
           <p:cNvSpPr>
-            <a:spLocks xmlns:a="http://schemas.openxmlformats.org/drawingml/2006/main" noGrp="1"/>
+            <a:spLocks noGrp="1"/>
           </p:cNvSpPr>
           <p:nvPr>
-            <p:ph type="sldImg" idx="0"/>
+            <p:ph type="sldImg"/>
           </p:nvPr>
         </p:nvSpPr>
         <p:spPr/>
@@ -787,7 +620,7 @@
         <p:nvSpPr>
           <p:cNvPr id="3" name="Notes Placeholder 2"/>
           <p:cNvSpPr>
-            <a:spLocks xmlns:a="http://schemas.openxmlformats.org/drawingml/2006/main" noGrp="1"/>
+            <a:spLocks noGrp="1"/>
           </p:cNvSpPr>
           <p:nvPr>
             <p:ph type="body" idx="1"/>
@@ -795,9 +628,9 @@
         </p:nvSpPr>
         <p:spPr/>
         <p:txBody>
-          <a:bodyPr xmlns:a="http://schemas.openxmlformats.org/drawingml/2006/main"/>
-          <a:lstStyle xmlns:a="http://schemas.openxmlformats.org/drawingml/2006/main"/>
-          <a:p xmlns:a="http://schemas.openxmlformats.org/drawingml/2006/main">
+          <a:bodyPr/>
+          <a:lstStyle/>
+          <a:p>
             <a:r>
               <a:t>实际截图：week7/用户说明书制作/screenshots/07_custom_anomaly_result.png。场景：孤立森林，0_0 小区，test_5w-6w，小时 840，把 DLPRB 改为 2；分数约 -0.1026→0.2945，有效阈值约 0.1464。其他 3 项不变。系统支持 3σ、IQR、孤立森林、One-Class SVM。每项独立检测，记录级任一异常即异常；分数不是概率，缺失状态不强行判正常。来源：core/anomaly.py、tests/test_system.py。</a:t>
             </a:r>
@@ -808,7 +641,7 @@
         <p:nvSpPr>
           <p:cNvPr id="4" name="Slide Number Placeholder 3"/>
           <p:cNvSpPr>
-            <a:spLocks xmlns:a="http://schemas.openxmlformats.org/drawingml/2006/main" noGrp="1"/>
+            <a:spLocks noGrp="1"/>
           </p:cNvSpPr>
           <p:nvPr>
             <p:ph type="sldNum" idx="5"/>
@@ -816,21 +649,21 @@
         </p:nvSpPr>
         <p:spPr/>
         <p:txBody>
-          <a:bodyPr xmlns:a="http://schemas.openxmlformats.org/drawingml/2006/main"/>
-          <a:lstStyle xmlns:a="http://schemas.openxmlformats.org/drawingml/2006/main"/>
-          <a:p xmlns:a="http://schemas.openxmlformats.org/drawingml/2006/main"/>
+          <a:bodyPr/>
+          <a:lstStyle/>
+          <a:p/>
         </p:txBody>
       </p:sp>
     </p:spTree>
   </p:cSld>
   <p:clrMapOvr>
-    <a:masterClrMapping xmlns:a="http://schemas.openxmlformats.org/drawingml/2006/main"/>
+    <a:masterClrMapping/>
   </p:clrMapOvr>
 </p:notes>
 </file>
 
 <file path=ppt/notesSlides/notesSlide7.xml><?xml version="1.0" encoding="utf-8"?>
-<p:notes xmlns:p="http://schemas.openxmlformats.org/presentationml/2006/main">
+<p:notes xmlns:a="http://schemas.openxmlformats.org/drawingml/2006/main" xmlns:r="http://schemas.openxmlformats.org/officeDocument/2006/relationships" xmlns:p="http://schemas.openxmlformats.org/presentationml/2006/main">
   <p:cSld>
     <p:spTree>
       <p:nvGrpSpPr>
@@ -838,17 +671,15 @@
         <p:cNvGrpSpPr/>
         <p:nvPr/>
       </p:nvGrpSpPr>
-      <p:grpSpPr>
-        <a:xfrm xmlns:a="http://schemas.openxmlformats.org/drawingml/2006/main"/>
-      </p:grpSpPr>
+      <p:grpSpPr/>
       <p:sp>
         <p:nvSpPr>
           <p:cNvPr id="2" name="Slide Image Placeholder 1"/>
           <p:cNvSpPr>
-            <a:spLocks xmlns:a="http://schemas.openxmlformats.org/drawingml/2006/main" noGrp="1"/>
+            <a:spLocks noGrp="1"/>
           </p:cNvSpPr>
           <p:nvPr>
-            <p:ph type="sldImg" idx="0"/>
+            <p:ph type="sldImg"/>
           </p:nvPr>
         </p:nvSpPr>
         <p:spPr/>
@@ -857,7 +688,7 @@
         <p:nvSpPr>
           <p:cNvPr id="3" name="Notes Placeholder 2"/>
           <p:cNvSpPr>
-            <a:spLocks xmlns:a="http://schemas.openxmlformats.org/drawingml/2006/main" noGrp="1"/>
+            <a:spLocks noGrp="1"/>
           </p:cNvSpPr>
           <p:nvPr>
             <p:ph type="body" idx="1"/>
@@ -865,9 +696,9 @@
         </p:nvSpPr>
         <p:spPr/>
         <p:txBody>
-          <a:bodyPr xmlns:a="http://schemas.openxmlformats.org/drawingml/2006/main"/>
-          <a:lstStyle xmlns:a="http://schemas.openxmlformats.org/drawingml/2006/main"/>
-          <a:p xmlns:a="http://schemas.openxmlformats.org/drawingml/2006/main">
+          <a:bodyPr/>
+          <a:lstStyle/>
+          <a:p>
             <a:r>
               <a:t>来源：evidence/root_cause_case.csv；原第六周_异常根因分析报告.docx GOTSF 案例。对象 1_1，One-Class SVM，事件 1724 至 1750，共 27 点。87 点邻域残差 Spearman：传输量与传输时间 rho=0.924，Bonferroni 164 比较后 p=7.954e-14，区间 [0.714,0.981]，沿用原实验口径。本版是离线案例，不是网页自动因果诊断。</a:t>
             </a:r>
@@ -878,7 +709,7 @@
         <p:nvSpPr>
           <p:cNvPr id="4" name="Slide Number Placeholder 3"/>
           <p:cNvSpPr>
-            <a:spLocks xmlns:a="http://schemas.openxmlformats.org/drawingml/2006/main" noGrp="1"/>
+            <a:spLocks noGrp="1"/>
           </p:cNvSpPr>
           <p:nvPr>
             <p:ph type="sldNum" idx="5"/>
@@ -886,21 +717,21 @@
         </p:nvSpPr>
         <p:spPr/>
         <p:txBody>
-          <a:bodyPr xmlns:a="http://schemas.openxmlformats.org/drawingml/2006/main"/>
-          <a:lstStyle xmlns:a="http://schemas.openxmlformats.org/drawingml/2006/main"/>
-          <a:p xmlns:a="http://schemas.openxmlformats.org/drawingml/2006/main"/>
+          <a:bodyPr/>
+          <a:lstStyle/>
+          <a:p/>
         </p:txBody>
       </p:sp>
     </p:spTree>
   </p:cSld>
   <p:clrMapOvr>
-    <a:masterClrMapping xmlns:a="http://schemas.openxmlformats.org/drawingml/2006/main"/>
+    <a:masterClrMapping/>
   </p:clrMapOvr>
 </p:notes>
 </file>
 
 <file path=ppt/notesSlides/notesSlide8.xml><?xml version="1.0" encoding="utf-8"?>
-<p:notes xmlns:p="http://schemas.openxmlformats.org/presentationml/2006/main">
+<p:notes xmlns:a="http://schemas.openxmlformats.org/drawingml/2006/main" xmlns:r="http://schemas.openxmlformats.org/officeDocument/2006/relationships" xmlns:p="http://schemas.openxmlformats.org/presentationml/2006/main">
   <p:cSld>
     <p:spTree>
       <p:nvGrpSpPr>
@@ -908,17 +739,15 @@
         <p:cNvGrpSpPr/>
         <p:nvPr/>
       </p:nvGrpSpPr>
-      <p:grpSpPr>
-        <a:xfrm xmlns:a="http://schemas.openxmlformats.org/drawingml/2006/main"/>
-      </p:grpSpPr>
+      <p:grpSpPr/>
       <p:sp>
         <p:nvSpPr>
           <p:cNvPr id="2" name="Slide Image Placeholder 1"/>
           <p:cNvSpPr>
-            <a:spLocks xmlns:a="http://schemas.openxmlformats.org/drawingml/2006/main" noGrp="1"/>
+            <a:spLocks noGrp="1"/>
           </p:cNvSpPr>
           <p:nvPr>
-            <p:ph type="sldImg" idx="0"/>
+            <p:ph type="sldImg"/>
           </p:nvPr>
         </p:nvSpPr>
         <p:spPr/>
@@ -927,7 +756,7 @@
         <p:nvSpPr>
           <p:cNvPr id="3" name="Notes Placeholder 2"/>
           <p:cNvSpPr>
-            <a:spLocks xmlns:a="http://schemas.openxmlformats.org/drawingml/2006/main" noGrp="1"/>
+            <a:spLocks noGrp="1"/>
           </p:cNvSpPr>
           <p:nvPr>
             <p:ph type="body" idx="1"/>
@@ -935,9 +764,9 @@
         </p:nvSpPr>
         <p:spPr/>
         <p:txBody>
-          <a:bodyPr xmlns:a="http://schemas.openxmlformats.org/drawingml/2006/main"/>
-          <a:lstStyle xmlns:a="http://schemas.openxmlformats.org/drawingml/2006/main"/>
-          <a:p xmlns:a="http://schemas.openxmlformats.org/drawingml/2006/main">
+          <a:bodyPr/>
+          <a:lstStyle/>
+          <a:p>
             <a:r>
               <a:t>来源：evidence/migration_audit.json；evidence/test_summary.json；README.md；docs/整理与数据来源.md。新旧代码同 CPU 推理差异为 0，原 GPU 档案最大差约 5.63e-6。没有新电脑全新安装或生产并发压测。用户确认只交付本地 Git 仓库、bundle 和 ZIP，不上传 GitHub。后续公开前核实数据再分发条款。</a:t>
             </a:r>
@@ -948,7 +777,7 @@
         <p:nvSpPr>
           <p:cNvPr id="4" name="Slide Number Placeholder 3"/>
           <p:cNvSpPr>
-            <a:spLocks xmlns:a="http://schemas.openxmlformats.org/drawingml/2006/main" noGrp="1"/>
+            <a:spLocks noGrp="1"/>
           </p:cNvSpPr>
           <p:nvPr>
             <p:ph type="sldNum" idx="5"/>
@@ -956,21 +785,21 @@
         </p:nvSpPr>
         <p:spPr/>
         <p:txBody>
-          <a:bodyPr xmlns:a="http://schemas.openxmlformats.org/drawingml/2006/main"/>
-          <a:lstStyle xmlns:a="http://schemas.openxmlformats.org/drawingml/2006/main"/>
-          <a:p xmlns:a="http://schemas.openxmlformats.org/drawingml/2006/main"/>
+          <a:bodyPr/>
+          <a:lstStyle/>
+          <a:p/>
         </p:txBody>
       </p:sp>
     </p:spTree>
   </p:cSld>
   <p:clrMapOvr>
-    <a:masterClrMapping xmlns:a="http://schemas.openxmlformats.org/drawingml/2006/main"/>
+    <a:masterClrMapping/>
   </p:clrMapOvr>
 </p:notes>
 </file>
 
 <file path=ppt/slideLayouts/slideLayout1.xml><?xml version="1.0" encoding="utf-8"?>
-<p:sldLayout xmlns:p="http://schemas.openxmlformats.org/presentationml/2006/main" type="title">
+<p:sldLayout xmlns:a="http://schemas.openxmlformats.org/drawingml/2006/main" xmlns:r="http://schemas.openxmlformats.org/officeDocument/2006/relationships" xmlns:p="http://schemas.openxmlformats.org/presentationml/2006/main" type="title">
   <p:cSld name="Title Slide">
     <p:spTree>
       <p:nvGrpSpPr>
@@ -978,20 +807,21 @@
         <p:cNvGrpSpPr/>
         <p:nvPr/>
       </p:nvGrpSpPr>
-      <p:grpSpPr>
-        <a:xfrm xmlns:a="http://schemas.openxmlformats.org/drawingml/2006/main"/>
-      </p:grpSpPr>
+      <p:grpSpPr/>
     </p:spTree>
   </p:cSld>
+  <p:clrMapOvr>
+    <a:masterClrMapping/>
+  </p:clrMapOvr>
 </p:sldLayout>
 </file>
 
 <file path=ppt/slideMasters/slideMaster1.xml><?xml version="1.0" encoding="utf-8"?>
-<p:sldMaster xmlns:p="http://schemas.openxmlformats.org/presentationml/2006/main">
-  <p:cSld name="Master">
+<p:sldMaster xmlns:a="http://schemas.openxmlformats.org/drawingml/2006/main" xmlns:r="http://schemas.openxmlformats.org/officeDocument/2006/relationships" xmlns:p="http://schemas.openxmlformats.org/presentationml/2006/main">
+  <p:cSld>
     <p:bg>
       <p:bgRef idx="1001">
-        <a:schemeClr xmlns:a="http://schemas.openxmlformats.org/drawingml/2006/main" val="bg1"/>
+        <a:schemeClr val="bg1"/>
       </p:bgRef>
     </p:bg>
     <p:spTree>
@@ -1000,18 +830,16 @@
         <p:cNvGrpSpPr/>
         <p:nvPr/>
       </p:nvGrpSpPr>
-      <p:grpSpPr>
-        <a:xfrm xmlns:a="http://schemas.openxmlformats.org/drawingml/2006/main"/>
-      </p:grpSpPr>
+      <p:grpSpPr/>
     </p:spTree>
   </p:cSld>
   <p:clrMap bg1="lt1" tx1="dk1" bg2="lt2" tx2="dk2" accent1="accent1" accent2="accent2" accent3="accent3" accent4="accent4" accent5="accent5" accent6="accent6" hlink="hlink" folHlink="folHlink"/>
   <p:sldLayoutIdLst>
-    <p:sldLayoutId xmlns:r="http://schemas.openxmlformats.org/officeDocument/2006/relationships" id="2147483649" r:id="Rfee2a1f573a24f56"/>
+    <p:sldLayoutId id="2147483649" r:id="rId1"/>
   </p:sldLayoutIdLst>
   <p:txStyles>
     <p:titleStyle>
-      <a:lvl1pPr xmlns:a="http://schemas.openxmlformats.org/drawingml/2006/main" algn="l">
+      <a:lvl1pPr algn="l">
         <a:lnSpc>
           <a:spcPct val="90000"/>
         </a:lnSpc>
@@ -1030,7 +858,7 @@
       </a:lvl1pPr>
     </p:titleStyle>
     <p:bodyStyle>
-      <a:lvl1pPr xmlns:a="http://schemas.openxmlformats.org/drawingml/2006/main" marL="228600" indent="-228600" algn="l">
+      <a:lvl1pPr marL="228600" indent="-228600" algn="l">
         <a:lnSpc>
           <a:spcPct val="90000"/>
         </a:lnSpc>
@@ -1047,7 +875,7 @@
           <a:cs typeface="+mn-lt"/>
         </a:defRPr>
       </a:lvl1pPr>
-      <a:lvl2pPr xmlns:a="http://schemas.openxmlformats.org/drawingml/2006/main" marL="685800" indent="-228600" algn="l">
+      <a:lvl2pPr marL="685800" indent="-228600" algn="l">
         <a:lnSpc>
           <a:spcPct val="90000"/>
         </a:lnSpc>
@@ -1064,7 +892,7 @@
           <a:cs typeface="+mn-lt"/>
         </a:defRPr>
       </a:lvl2pPr>
-      <a:lvl3pPr xmlns:a="http://schemas.openxmlformats.org/drawingml/2006/main" marL="1143000" indent="-228600" algn="l">
+      <a:lvl3pPr marL="1143000" indent="-228600" algn="l">
         <a:lnSpc>
           <a:spcPct val="90000"/>
         </a:lnSpc>
@@ -1081,7 +909,7 @@
           <a:cs typeface="+mn-lt"/>
         </a:defRPr>
       </a:lvl3pPr>
-      <a:lvl4pPr xmlns:a="http://schemas.openxmlformats.org/drawingml/2006/main" marL="1600200" indent="-228600" algn="l">
+      <a:lvl4pPr marL="1600200" indent="-228600" algn="l">
         <a:lnSpc>
           <a:spcPct val="90000"/>
         </a:lnSpc>
@@ -1098,7 +926,7 @@
           <a:cs typeface="+mn-lt"/>
         </a:defRPr>
       </a:lvl4pPr>
-      <a:lvl5pPr xmlns:a="http://schemas.openxmlformats.org/drawingml/2006/main" marL="2057400" indent="-228600" algn="l">
+      <a:lvl5pPr marL="2057400" indent="-228600" algn="l">
         <a:lnSpc>
           <a:spcPct val="90000"/>
         </a:lnSpc>
@@ -1115,7 +943,7 @@
           <a:cs typeface="+mn-lt"/>
         </a:defRPr>
       </a:lvl5pPr>
-      <a:lvl6pPr xmlns:a="http://schemas.openxmlformats.org/drawingml/2006/main" marL="2514600" indent="-228600" algn="l">
+      <a:lvl6pPr marL="2514600" indent="-228600" algn="l">
         <a:lnSpc>
           <a:spcPct val="90000"/>
         </a:lnSpc>
@@ -1132,7 +960,7 @@
           <a:cs typeface="+mn-lt"/>
         </a:defRPr>
       </a:lvl6pPr>
-      <a:lvl7pPr xmlns:a="http://schemas.openxmlformats.org/drawingml/2006/main" marL="2971800" indent="-228600" algn="l">
+      <a:lvl7pPr marL="2971800" indent="-228600" algn="l">
         <a:lnSpc>
           <a:spcPct val="90000"/>
         </a:lnSpc>
@@ -1149,7 +977,7 @@
           <a:cs typeface="+mn-lt"/>
         </a:defRPr>
       </a:lvl7pPr>
-      <a:lvl8pPr xmlns:a="http://schemas.openxmlformats.org/drawingml/2006/main" marL="3429000" indent="-228600" algn="l">
+      <a:lvl8pPr marL="3429000" indent="-228600" algn="l">
         <a:lnSpc>
           <a:spcPct val="90000"/>
         </a:lnSpc>
@@ -1166,7 +994,7 @@
           <a:cs typeface="+mn-lt"/>
         </a:defRPr>
       </a:lvl8pPr>
-      <a:lvl9pPr xmlns:a="http://schemas.openxmlformats.org/drawingml/2006/main" marL="3886200" indent="-228600" algn="l">
+      <a:lvl9pPr marL="3886200" indent="-228600" algn="l">
         <a:lnSpc>
           <a:spcPct val="90000"/>
         </a:lnSpc>
@@ -1185,7 +1013,7 @@
       </a:lvl9pPr>
     </p:bodyStyle>
     <p:otherStyle>
-      <a:lvl1pPr xmlns:a="http://schemas.openxmlformats.org/drawingml/2006/main" marL="0" algn="l">
+      <a:lvl1pPr marL="0" algn="l">
         <a:buNone/>
         <a:defRPr sz="1800">
           <a:solidFill>
@@ -1196,7 +1024,7 @@
           <a:cs typeface="+mn-lt"/>
         </a:defRPr>
       </a:lvl1pPr>
-      <a:lvl2pPr xmlns:a="http://schemas.openxmlformats.org/drawingml/2006/main" marL="457200" algn="l">
+      <a:lvl2pPr marL="457200" algn="l">
         <a:buNone/>
         <a:defRPr sz="1800">
           <a:solidFill>
@@ -1207,7 +1035,7 @@
           <a:cs typeface="+mn-lt"/>
         </a:defRPr>
       </a:lvl2pPr>
-      <a:lvl3pPr xmlns:a="http://schemas.openxmlformats.org/drawingml/2006/main" marL="914400" algn="l">
+      <a:lvl3pPr marL="914400" algn="l">
         <a:buNone/>
         <a:defRPr sz="1800">
           <a:solidFill>
@@ -1218,7 +1046,7 @@
           <a:cs typeface="+mn-lt"/>
         </a:defRPr>
       </a:lvl3pPr>
-      <a:lvl4pPr xmlns:a="http://schemas.openxmlformats.org/drawingml/2006/main" marL="1371600" algn="l">
+      <a:lvl4pPr marL="1371600" algn="l">
         <a:buNone/>
         <a:defRPr sz="1800">
           <a:solidFill>
@@ -1229,7 +1057,7 @@
           <a:cs typeface="+mn-lt"/>
         </a:defRPr>
       </a:lvl4pPr>
-      <a:lvl5pPr xmlns:a="http://schemas.openxmlformats.org/drawingml/2006/main" marL="1828800" algn="l">
+      <a:lvl5pPr marL="1828800" algn="l">
         <a:buNone/>
         <a:defRPr sz="1800">
           <a:solidFill>
@@ -1240,7 +1068,7 @@
           <a:cs typeface="+mn-lt"/>
         </a:defRPr>
       </a:lvl5pPr>
-      <a:lvl6pPr xmlns:a="http://schemas.openxmlformats.org/drawingml/2006/main" marL="2286000" algn="l">
+      <a:lvl6pPr marL="2286000" algn="l">
         <a:buNone/>
         <a:defRPr sz="1800">
           <a:solidFill>
@@ -1251,7 +1079,7 @@
           <a:cs typeface="+mn-lt"/>
         </a:defRPr>
       </a:lvl6pPr>
-      <a:lvl7pPr xmlns:a="http://schemas.openxmlformats.org/drawingml/2006/main" marL="2743200" algn="l">
+      <a:lvl7pPr marL="2743200" algn="l">
         <a:buNone/>
         <a:defRPr sz="1800">
           <a:solidFill>
@@ -1262,7 +1090,7 @@
           <a:cs typeface="+mn-lt"/>
         </a:defRPr>
       </a:lvl7pPr>
-      <a:lvl8pPr xmlns:a="http://schemas.openxmlformats.org/drawingml/2006/main" marL="3200400" algn="l">
+      <a:lvl8pPr marL="3200400" algn="l">
         <a:buNone/>
         <a:defRPr sz="1800">
           <a:solidFill>
@@ -1273,7 +1101,7 @@
           <a:cs typeface="+mn-lt"/>
         </a:defRPr>
       </a:lvl8pPr>
-      <a:lvl9pPr xmlns:a="http://schemas.openxmlformats.org/drawingml/2006/main" marL="3657600" algn="l">
+      <a:lvl9pPr marL="3657600" algn="l">
         <a:buNone/>
         <a:defRPr sz="1800">
           <a:solidFill>
@@ -1289,259 +1117,15 @@
 </p:sldMaster>
 </file>
 
-<file path=ppt/slideMasters/theme/theme2.xml><?xml version="1.0" encoding="utf-8"?>
-<a:theme xmlns:a="http://schemas.openxmlformats.org/drawingml/2006/main" name="ChatGPT">
-  <a:themeElements>
-    <a:clrScheme name="ChatGPT">
-      <a:dk1>
-        <a:srgbClr val="000000"/>
-      </a:dk1>
-      <a:lt1>
-        <a:srgbClr val="FFFFFF"/>
-      </a:lt1>
-      <a:dk2>
-        <a:srgbClr val="0E2841"/>
-      </a:dk2>
-      <a:lt2>
-        <a:srgbClr val="E8E8E8"/>
-      </a:lt2>
-      <a:accent1>
-        <a:srgbClr val="156082"/>
-      </a:accent1>
-      <a:accent2>
-        <a:srgbClr val="E97132"/>
-      </a:accent2>
-      <a:accent3>
-        <a:srgbClr val="196B24"/>
-      </a:accent3>
-      <a:accent4>
-        <a:srgbClr val="0F9ED5"/>
-      </a:accent4>
-      <a:accent5>
-        <a:srgbClr val="A02B93"/>
-      </a:accent5>
-      <a:accent6>
-        <a:srgbClr val="4EA72E"/>
-      </a:accent6>
-      <a:hlink>
-        <a:srgbClr val="467886"/>
-      </a:hlink>
-      <a:folHlink>
-        <a:srgbClr val="96607D"/>
-      </a:folHlink>
-    </a:clrScheme>
-    <a:fontScheme name="Office">
-      <a:majorFont>
-        <a:latin typeface="Calibri Light"/>
-        <a:ea typeface="Calibri Light"/>
-        <a:cs typeface="Calibri Light"/>
-      </a:majorFont>
-      <a:minorFont>
-        <a:latin typeface="Calibri"/>
-        <a:ea typeface="Calibri"/>
-        <a:cs typeface="Calibri"/>
-      </a:minorFont>
-    </a:fontScheme>
-    <a:fmtScheme name="ChatGPT">
-      <a:fillStyleLst>
-        <a:solidFill>
-          <a:schemeClr val="phClr"/>
-        </a:solidFill>
-        <a:gradFill>
-          <a:gsLst>
-            <a:gs pos="0">
-              <a:schemeClr val="phClr">
-                <a:tint val="67000"/>
-                <a:lumMod val="110000"/>
-                <a:satMod val="105000"/>
-              </a:schemeClr>
-            </a:gs>
-            <a:gs pos="50000">
-              <a:schemeClr val="phClr">
-                <a:tint val="73000"/>
-                <a:lumMod val="105000"/>
-                <a:satMod val="103000"/>
-              </a:schemeClr>
-            </a:gs>
-            <a:gs pos="100000">
-              <a:schemeClr val="phClr">
-                <a:tint val="81000"/>
-                <a:lumMod val="105000"/>
-                <a:satMod val="109000"/>
-              </a:schemeClr>
-            </a:gs>
-          </a:gsLst>
-          <a:lin ang="5400000" scaled="0"/>
-        </a:gradFill>
-        <a:gradFill>
-          <a:gsLst>
-            <a:gs pos="0">
-              <a:schemeClr val="phClr">
-                <a:tint val="94000"/>
-                <a:lumMod val="102000"/>
-                <a:satMod val="103000"/>
-              </a:schemeClr>
-            </a:gs>
-            <a:gs pos="50000">
-              <a:schemeClr val="phClr">
-                <a:shade val="100000"/>
-                <a:lumMod val="100000"/>
-                <a:satMod val="110000"/>
-              </a:schemeClr>
-            </a:gs>
-            <a:gs pos="100000">
-              <a:schemeClr val="phClr">
-                <a:shade val="78000"/>
-                <a:lumMod val="99000"/>
-                <a:satMod val="120000"/>
-              </a:schemeClr>
-            </a:gs>
-          </a:gsLst>
-          <a:lin ang="5400000" scaled="0"/>
-        </a:gradFill>
-      </a:fillStyleLst>
-      <a:lnStyleLst>
-        <a:ln w="12700">
-          <a:solidFill>
-            <a:schemeClr val="phClr"/>
-          </a:solidFill>
-          <a:prstDash val="solid"/>
-        </a:ln>
-        <a:ln w="19050">
-          <a:solidFill>
-            <a:schemeClr val="phClr"/>
-          </a:solidFill>
-          <a:prstDash val="solid"/>
-        </a:ln>
-        <a:ln w="25400">
-          <a:solidFill>
-            <a:schemeClr val="phClr"/>
-          </a:solidFill>
-          <a:prstDash val="solid"/>
-        </a:ln>
-      </a:lnStyleLst>
-      <a:effectStyleLst>
-        <a:effectStyle>
-          <a:effectLst/>
-        </a:effectStyle>
-        <a:effectStyle>
-          <a:effectLst/>
-        </a:effectStyle>
-        <a:effectStyle>
-          <a:effectLst>
-            <a:outerShdw blurRad="57150" dist="19050" dir="5400000">
-              <a:srgbClr val="000000">
-                <a:alpha val="16000"/>
-              </a:srgbClr>
-            </a:outerShdw>
-          </a:effectLst>
-        </a:effectStyle>
-        <a:effectStyle>
-          <a:effectLst>
-            <a:outerShdw blurRad="19050" dist="9525" dir="5400000">
-              <a:srgbClr val="000000">
-                <a:alpha val="6000"/>
-              </a:srgbClr>
-            </a:outerShdw>
-          </a:effectLst>
-        </a:effectStyle>
-        <a:effectStyle>
-          <a:effectLst>
-            <a:outerShdw blurRad="28575" dist="9525" dir="5400000">
-              <a:srgbClr val="000000">
-                <a:alpha val="8000"/>
-              </a:srgbClr>
-            </a:outerShdw>
-          </a:effectLst>
-        </a:effectStyle>
-        <a:effectStyle>
-          <a:effectLst>
-            <a:outerShdw blurRad="57150" dist="19050" dir="5400000">
-              <a:srgbClr val="000000">
-                <a:alpha val="10000"/>
-              </a:srgbClr>
-            </a:outerShdw>
-          </a:effectLst>
-        </a:effectStyle>
-        <a:effectStyle>
-          <a:effectLst>
-            <a:outerShdw blurRad="114300" dist="38100" dir="5400000">
-              <a:srgbClr val="000000">
-                <a:alpha val="12000"/>
-              </a:srgbClr>
-            </a:outerShdw>
-          </a:effectLst>
-        </a:effectStyle>
-        <a:effectStyle>
-          <a:effectLst>
-            <a:outerShdw blurRad="171450" dist="57150" dir="5400000">
-              <a:srgbClr val="000000">
-                <a:alpha val="16000"/>
-              </a:srgbClr>
-            </a:outerShdw>
-          </a:effectLst>
-        </a:effectStyle>
-        <a:effectStyle>
-          <a:effectLst>
-            <a:outerShdw blurRad="266700" dist="95250" dir="5400000">
-              <a:srgbClr val="000000">
-                <a:alpha val="24000"/>
-              </a:srgbClr>
-            </a:outerShdw>
-          </a:effectLst>
-        </a:effectStyle>
-      </a:effectStyleLst>
-      <a:bgFillStyleLst>
-        <a:solidFill>
-          <a:schemeClr val="phClr"/>
-        </a:solidFill>
-        <a:solidFill>
-          <a:schemeClr val="phClr">
-            <a:tint val="95000"/>
-            <a:satMod val="170000"/>
-          </a:schemeClr>
-        </a:solidFill>
-        <a:gradFill>
-          <a:gsLst>
-            <a:gs pos="0">
-              <a:schemeClr val="phClr">
-                <a:tint val="93000"/>
-                <a:shade val="98000"/>
-                <a:lumMod val="102000"/>
-                <a:satMod val="150000"/>
-              </a:schemeClr>
-            </a:gs>
-            <a:gs pos="50000">
-              <a:schemeClr val="phClr">
-                <a:tint val="98000"/>
-                <a:shade val="90000"/>
-                <a:lumMod val="103000"/>
-                <a:satMod val="130000"/>
-              </a:schemeClr>
-            </a:gs>
-            <a:gs pos="100000">
-              <a:schemeClr val="phClr">
-                <a:shade val="63000"/>
-                <a:satMod val="120000"/>
-              </a:schemeClr>
-            </a:gs>
-          </a:gsLst>
-          <a:lin ang="5400000" scaled="0"/>
-        </a:gradFill>
-      </a:bgFillStyleLst>
-    </a:fmtScheme>
-  </a:themeElements>
-</a:theme>
-</file>
-
 <file path=ppt/slides/slide1.xml><?xml version="1.0" encoding="utf-8"?>
-<p:sld xmlns:p="http://schemas.openxmlformats.org/presentationml/2006/main">
+<p:sld xmlns:a="http://schemas.openxmlformats.org/drawingml/2006/main" xmlns:r="http://schemas.openxmlformats.org/officeDocument/2006/relationships" xmlns:p="http://schemas.openxmlformats.org/presentationml/2006/main">
   <p:cSld>
     <p:bg>
       <p:bgPr>
-        <a:solidFill xmlns:a="http://schemas.openxmlformats.org/drawingml/2006/main">
+        <a:solidFill>
           <a:srgbClr val="FFFFFF"/>
         </a:solidFill>
+        <a:effectLst/>
       </p:bgPr>
     </p:bg>
     <p:spTree>
@@ -1550,50 +1134,42 @@
         <p:cNvGrpSpPr/>
         <p:nvPr/>
       </p:nvGrpSpPr>
-      <p:grpSpPr>
-        <a:xfrm xmlns:a="http://schemas.openxmlformats.org/drawingml/2006/main"/>
-      </p:grpSpPr>
-      <p:sp>
-        <p:nvSpPr>
-          <p:cNvPr id="5" name="">
-            <a:extLst xmlns:a="http://schemas.openxmlformats.org/drawingml/2006/main">
-              <a:ext uri="{FF2B5EF4-FFF2-40B4-BE49-F238E27FC236}">
-                <a16:creationId xmlns:a16="http://schemas.microsoft.com/office/drawing/2014/main" id="{87892DF3-7AB6-4154-AA2B-2A16773353E7}"/>
-              </a:ext>
-            </a:extLst>
-          </p:cNvPr>
+      <p:grpSpPr/>
+      <p:sp>
+        <p:nvSpPr>
+          <p:cNvPr id="5" name="矩形 4"/>
           <p:cNvSpPr>
-            <a:spLocks xmlns:a="http://schemas.openxmlformats.org/drawingml/2006/main" noGrp="1"/>
+            <a:spLocks noGrp="1"/>
           </p:cNvSpPr>
           <p:nvPr/>
         </p:nvSpPr>
         <p:spPr>
-          <a:xfrm xmlns:a="http://schemas.openxmlformats.org/drawingml/2006/main">
+          <a:xfrm>
             <a:off x="685800" y="1524000"/>
             <a:ext cx="10858500" cy="952500"/>
           </a:xfrm>
-          <a:prstGeom xmlns:a="http://schemas.openxmlformats.org/drawingml/2006/main" prst="rect">
+          <a:prstGeom prst="rect">
             <a:avLst/>
           </a:prstGeom>
-          <a:noFill xmlns:a="http://schemas.openxmlformats.org/drawingml/2006/main"/>
-          <a:ln xmlns:a="http://schemas.openxmlformats.org/drawingml/2006/main" w="0">
+          <a:noFill/>
+          <a:ln w="0">
             <a:noFill/>
           </a:ln>
         </p:spPr>
         <p:txBody>
-          <a:bodyPr xmlns:a="http://schemas.openxmlformats.org/drawingml/2006/main">
+          <a:bodyPr>
             <a:noAutofit/>
           </a:bodyPr>
-          <a:lstStyle xmlns:a="http://schemas.openxmlformats.org/drawingml/2006/main"/>
-          <a:p xmlns:a="http://schemas.openxmlformats.org/drawingml/2006/main">
+          <a:lstStyle/>
+          <a:p>
             <a:pPr>
               <a:defRPr sz="3750" b="1">
                 <a:solidFill>
                   <a:srgbClr val="152C43"/>
                 </a:solidFill>
-                <a:latin typeface="Microsoft YaHei"/>
-                <a:ea typeface="Microsoft YaHei"/>
-                <a:cs typeface="Microsoft YaHei"/>
+                <a:latin typeface="微软雅黑" panose="020B0503020204020204" charset="-122"/>
+                <a:ea typeface="微软雅黑" panose="020B0503020204020204" charset="-122"/>
+                <a:cs typeface="微软雅黑" panose="020B0503020204020204" charset="-122"/>
               </a:defRPr>
             </a:pPr>
             <a:r>
@@ -1601,56 +1177,58 @@
                 <a:solidFill>
                   <a:srgbClr val="152C43"/>
                 </a:solidFill>
-                <a:latin typeface="Microsoft YaHei"/>
-                <a:ea typeface="Microsoft YaHei"/>
-                <a:cs typeface="Microsoft YaHei"/>
+                <a:latin typeface="微软雅黑" panose="020B0503020204020204" charset="-122"/>
+                <a:ea typeface="微软雅黑" panose="020B0503020204020204" charset="-122"/>
+                <a:cs typeface="微软雅黑" panose="020B0503020204020204" charset="-122"/>
               </a:rPr>
               <a:t>GOTSF KPI 预测与异常检测</a:t>
             </a:r>
+            <a:endParaRPr sz="3750" b="1">
+              <a:solidFill>
+                <a:srgbClr val="152C43"/>
+              </a:solidFill>
+              <a:latin typeface="微软雅黑" panose="020B0503020204020204" charset="-122"/>
+              <a:ea typeface="微软雅黑" panose="020B0503020204020204" charset="-122"/>
+              <a:cs typeface="微软雅黑" panose="020B0503020204020204" charset="-122"/>
+            </a:endParaRPr>
           </a:p>
         </p:txBody>
       </p:sp>
       <p:sp>
         <p:nvSpPr>
-          <p:cNvPr id="2" name="">
-            <a:extLst xmlns:a="http://schemas.openxmlformats.org/drawingml/2006/main">
-              <a:ext uri="{FF2B5EF4-FFF2-40B4-BE49-F238E27FC236}">
-                <a16:creationId xmlns:a16="http://schemas.microsoft.com/office/drawing/2014/main" id="{A221737E-DA02-43ED-BFFF-ACB87A64CC74}"/>
-              </a:ext>
-            </a:extLst>
-          </p:cNvPr>
+          <p:cNvPr id="2" name="矩形 1"/>
           <p:cNvSpPr>
-            <a:spLocks xmlns:a="http://schemas.openxmlformats.org/drawingml/2006/main" noGrp="1"/>
+            <a:spLocks noGrp="1"/>
           </p:cNvSpPr>
           <p:nvPr/>
         </p:nvSpPr>
         <p:spPr>
-          <a:xfrm xmlns:a="http://schemas.openxmlformats.org/drawingml/2006/main">
+          <a:xfrm>
             <a:off x="704850" y="2714625"/>
             <a:ext cx="9525000" cy="666750"/>
           </a:xfrm>
-          <a:prstGeom xmlns:a="http://schemas.openxmlformats.org/drawingml/2006/main" prst="rect">
+          <a:prstGeom prst="rect">
             <a:avLst/>
           </a:prstGeom>
-          <a:noFill xmlns:a="http://schemas.openxmlformats.org/drawingml/2006/main"/>
-          <a:ln xmlns:a="http://schemas.openxmlformats.org/drawingml/2006/main" w="0">
+          <a:noFill/>
+          <a:ln w="0">
             <a:noFill/>
           </a:ln>
         </p:spPr>
         <p:txBody>
-          <a:bodyPr xmlns:a="http://schemas.openxmlformats.org/drawingml/2006/main">
+          <a:bodyPr>
             <a:noAutofit/>
           </a:bodyPr>
-          <a:lstStyle xmlns:a="http://schemas.openxmlformats.org/drawingml/2006/main"/>
-          <a:p xmlns:a="http://schemas.openxmlformats.org/drawingml/2006/main">
+          <a:lstStyle/>
+          <a:p>
             <a:pPr>
               <a:defRPr sz="2550" b="0">
                 <a:solidFill>
                   <a:srgbClr val="245B87"/>
                 </a:solidFill>
-                <a:latin typeface="Microsoft YaHei"/>
-                <a:ea typeface="Microsoft YaHei"/>
-                <a:cs typeface="Microsoft YaHei"/>
+                <a:latin typeface="微软雅黑" panose="020B0503020204020204" charset="-122"/>
+                <a:ea typeface="微软雅黑" panose="020B0503020204020204" charset="-122"/>
+                <a:cs typeface="微软雅黑" panose="020B0503020204020204" charset="-122"/>
               </a:defRPr>
             </a:pPr>
             <a:r>
@@ -1658,56 +1236,58 @@
                 <a:solidFill>
                   <a:srgbClr val="245B87"/>
                 </a:solidFill>
-                <a:latin typeface="Microsoft YaHei"/>
-                <a:ea typeface="Microsoft YaHei"/>
-                <a:cs typeface="Microsoft YaHei"/>
+                <a:latin typeface="微软雅黑" panose="020B0503020204020204" charset="-122"/>
+                <a:ea typeface="微软雅黑" panose="020B0503020204020204" charset="-122"/>
+                <a:cs typeface="微软雅黑" panose="020B0503020204020204" charset="-122"/>
               </a:rPr>
               <a:t>项目总结与交互演示</a:t>
             </a:r>
+            <a:endParaRPr sz="2550" b="0">
+              <a:solidFill>
+                <a:srgbClr val="245B87"/>
+              </a:solidFill>
+              <a:latin typeface="微软雅黑" panose="020B0503020204020204" charset="-122"/>
+              <a:ea typeface="微软雅黑" panose="020B0503020204020204" charset="-122"/>
+              <a:cs typeface="微软雅黑" panose="020B0503020204020204" charset="-122"/>
+            </a:endParaRPr>
           </a:p>
         </p:txBody>
       </p:sp>
       <p:sp>
         <p:nvSpPr>
-          <p:cNvPr id="3" name="">
-            <a:extLst xmlns:a="http://schemas.openxmlformats.org/drawingml/2006/main">
-              <a:ext uri="{FF2B5EF4-FFF2-40B4-BE49-F238E27FC236}">
-                <a16:creationId xmlns:a16="http://schemas.microsoft.com/office/drawing/2014/main" id="{0A183259-FD4C-4F29-82BB-F551C6BBCCC9}"/>
-              </a:ext>
-            </a:extLst>
-          </p:cNvPr>
+          <p:cNvPr id="3" name="矩形 2"/>
           <p:cNvSpPr>
-            <a:spLocks xmlns:a="http://schemas.openxmlformats.org/drawingml/2006/main" noGrp="1"/>
+            <a:spLocks noGrp="1"/>
           </p:cNvSpPr>
           <p:nvPr/>
         </p:nvSpPr>
         <p:spPr>
-          <a:xfrm xmlns:a="http://schemas.openxmlformats.org/drawingml/2006/main">
+          <a:xfrm>
             <a:off x="704850" y="3810000"/>
             <a:ext cx="10477500" cy="571500"/>
           </a:xfrm>
-          <a:prstGeom xmlns:a="http://schemas.openxmlformats.org/drawingml/2006/main" prst="rect">
+          <a:prstGeom prst="rect">
             <a:avLst/>
           </a:prstGeom>
-          <a:noFill xmlns:a="http://schemas.openxmlformats.org/drawingml/2006/main"/>
-          <a:ln xmlns:a="http://schemas.openxmlformats.org/drawingml/2006/main" w="0">
+          <a:noFill/>
+          <a:ln w="0">
             <a:noFill/>
           </a:ln>
         </p:spPr>
         <p:txBody>
-          <a:bodyPr xmlns:a="http://schemas.openxmlformats.org/drawingml/2006/main">
+          <a:bodyPr>
             <a:noAutofit/>
           </a:bodyPr>
-          <a:lstStyle xmlns:a="http://schemas.openxmlformats.org/drawingml/2006/main"/>
-          <a:p xmlns:a="http://schemas.openxmlformats.org/drawingml/2006/main">
+          <a:lstStyle/>
+          <a:p>
             <a:pPr>
               <a:defRPr sz="2025" b="0">
                 <a:solidFill>
                   <a:srgbClr val="152C43"/>
                 </a:solidFill>
-                <a:latin typeface="Microsoft YaHei"/>
-                <a:ea typeface="Microsoft YaHei"/>
-                <a:cs typeface="Microsoft YaHei"/>
+                <a:latin typeface="微软雅黑" panose="020B0503020204020204" charset="-122"/>
+                <a:ea typeface="微软雅黑" panose="020B0503020204020204" charset="-122"/>
+                <a:cs typeface="微软雅黑" panose="020B0503020204020204" charset="-122"/>
               </a:defRPr>
             </a:pPr>
             <a:r>
@@ -1715,56 +1295,58 @@
                 <a:solidFill>
                   <a:srgbClr val="152C43"/>
                 </a:solidFill>
-                <a:latin typeface="Microsoft YaHei"/>
-                <a:ea typeface="Microsoft YaHei"/>
-                <a:cs typeface="Microsoft YaHei"/>
+                <a:latin typeface="微软雅黑" panose="020B0503020204020204" charset="-122"/>
+                <a:ea typeface="微软雅黑" panose="020B0503020204020204" charset="-122"/>
+                <a:cs typeface="微软雅黑" panose="020B0503020204020204" charset="-122"/>
               </a:rPr>
               <a:t>4 项 KPI  ·  LSTM 联合预测  ·  4 种异常检测方法</a:t>
             </a:r>
+            <a:endParaRPr sz="2025" b="0">
+              <a:solidFill>
+                <a:srgbClr val="152C43"/>
+              </a:solidFill>
+              <a:latin typeface="微软雅黑" panose="020B0503020204020204" charset="-122"/>
+              <a:ea typeface="微软雅黑" panose="020B0503020204020204" charset="-122"/>
+              <a:cs typeface="微软雅黑" panose="020B0503020204020204" charset="-122"/>
+            </a:endParaRPr>
           </a:p>
         </p:txBody>
       </p:sp>
       <p:sp>
         <p:nvSpPr>
-          <p:cNvPr id="4" name="">
-            <a:extLst xmlns:a="http://schemas.openxmlformats.org/drawingml/2006/main">
-              <a:ext uri="{FF2B5EF4-FFF2-40B4-BE49-F238E27FC236}">
-                <a16:creationId xmlns:a16="http://schemas.microsoft.com/office/drawing/2014/main" id="{65C160AB-55DD-482D-BE9D-70533CF08B7E}"/>
-              </a:ext>
-            </a:extLst>
-          </p:cNvPr>
+          <p:cNvPr id="4" name="矩形 3"/>
           <p:cNvSpPr>
-            <a:spLocks xmlns:a="http://schemas.openxmlformats.org/drawingml/2006/main" noGrp="1"/>
+            <a:spLocks noGrp="1"/>
           </p:cNvSpPr>
           <p:nvPr/>
         </p:nvSpPr>
         <p:spPr>
-          <a:xfrm xmlns:a="http://schemas.openxmlformats.org/drawingml/2006/main">
+          <a:xfrm>
             <a:off x="704850" y="5600700"/>
             <a:ext cx="10477500" cy="476250"/>
           </a:xfrm>
-          <a:prstGeom xmlns:a="http://schemas.openxmlformats.org/drawingml/2006/main" prst="rect">
+          <a:prstGeom prst="rect">
             <a:avLst/>
           </a:prstGeom>
-          <a:noFill xmlns:a="http://schemas.openxmlformats.org/drawingml/2006/main"/>
-          <a:ln xmlns:a="http://schemas.openxmlformats.org/drawingml/2006/main" w="0">
+          <a:noFill/>
+          <a:ln w="0">
             <a:noFill/>
           </a:ln>
         </p:spPr>
         <p:txBody>
-          <a:bodyPr xmlns:a="http://schemas.openxmlformats.org/drawingml/2006/main">
+          <a:bodyPr>
             <a:noAutofit/>
           </a:bodyPr>
-          <a:lstStyle xmlns:a="http://schemas.openxmlformats.org/drawingml/2006/main"/>
-          <a:p xmlns:a="http://schemas.openxmlformats.org/drawingml/2006/main">
+          <a:lstStyle/>
+          <a:p>
             <a:pPr>
               <a:defRPr sz="1725" b="0">
                 <a:solidFill>
                   <a:srgbClr val="536474"/>
                 </a:solidFill>
-                <a:latin typeface="Microsoft YaHei"/>
-                <a:ea typeface="Microsoft YaHei"/>
-                <a:cs typeface="Microsoft YaHei"/>
+                <a:latin typeface="微软雅黑" panose="020B0503020204020204" charset="-122"/>
+                <a:ea typeface="微软雅黑" panose="020B0503020204020204" charset="-122"/>
+                <a:cs typeface="微软雅黑" panose="020B0503020204020204" charset="-122"/>
               </a:defRPr>
             </a:pPr>
             <a:r>
@@ -1772,33 +1354,40 @@
                 <a:solidFill>
                   <a:srgbClr val="536474"/>
                 </a:solidFill>
-                <a:latin typeface="Microsoft YaHei"/>
-                <a:ea typeface="Microsoft YaHei"/>
-                <a:cs typeface="Microsoft YaHei"/>
+                <a:latin typeface="微软雅黑" panose="020B0503020204020204" charset="-122"/>
+                <a:ea typeface="微软雅黑" panose="020B0503020204020204" charset="-122"/>
+                <a:cs typeface="微软雅黑" panose="020B0503020204020204" charset="-122"/>
               </a:rPr>
               <a:t>第八周交付  |  2026 年 10 月</a:t>
             </a:r>
+            <a:endParaRPr sz="1725" b="0">
+              <a:solidFill>
+                <a:srgbClr val="536474"/>
+              </a:solidFill>
+              <a:latin typeface="微软雅黑" panose="020B0503020204020204" charset="-122"/>
+              <a:ea typeface="微软雅黑" panose="020B0503020204020204" charset="-122"/>
+              <a:cs typeface="微软雅黑" panose="020B0503020204020204" charset="-122"/>
+            </a:endParaRPr>
           </a:p>
         </p:txBody>
       </p:sp>
     </p:spTree>
-    <p:extLst>
-      <p:ext uri="{BB962C8B-B14F-4D97-AF65-F5344CB8AC3E}">
-        <p14:creationId xmlns:p14="http://schemas.microsoft.com/office/powerpoint/2010/main" val="2071379139"/>
-      </p:ext>
-    </p:extLst>
   </p:cSld>
+  <p:clrMapOvr>
+    <a:masterClrMapping/>
+  </p:clrMapOvr>
 </p:sld>
 </file>
 
 <file path=ppt/slides/slide2.xml><?xml version="1.0" encoding="utf-8"?>
-<p:sld xmlns:p="http://schemas.openxmlformats.org/presentationml/2006/main">
+<p:sld xmlns:a="http://schemas.openxmlformats.org/drawingml/2006/main" xmlns:r="http://schemas.openxmlformats.org/officeDocument/2006/relationships" xmlns:p="http://schemas.openxmlformats.org/presentationml/2006/main">
   <p:cSld>
     <p:bg>
       <p:bgPr>
-        <a:solidFill xmlns:a="http://schemas.openxmlformats.org/drawingml/2006/main">
+        <a:solidFill>
           <a:srgbClr val="FFFFFF"/>
         </a:solidFill>
+        <a:effectLst/>
       </p:bgPr>
     </p:bg>
     <p:spTree>
@@ -1807,50 +1396,42 @@
         <p:cNvGrpSpPr/>
         <p:nvPr/>
       </p:nvGrpSpPr>
-      <p:grpSpPr>
-        <a:xfrm xmlns:a="http://schemas.openxmlformats.org/drawingml/2006/main"/>
-      </p:grpSpPr>
-      <p:sp>
-        <p:nvSpPr>
-          <p:cNvPr id="4" name="">
-            <a:extLst xmlns:a="http://schemas.openxmlformats.org/drawingml/2006/main">
-              <a:ext uri="{FF2B5EF4-FFF2-40B4-BE49-F238E27FC236}">
-                <a16:creationId xmlns:a16="http://schemas.microsoft.com/office/drawing/2014/main" id="{1C860A69-1A53-43B2-A17F-82766B6BB0DE}"/>
-              </a:ext>
-            </a:extLst>
-          </p:cNvPr>
+      <p:grpSpPr/>
+      <p:sp>
+        <p:nvSpPr>
+          <p:cNvPr id="4" name="矩形 3"/>
           <p:cNvSpPr>
-            <a:spLocks xmlns:a="http://schemas.openxmlformats.org/drawingml/2006/main" noGrp="1"/>
+            <a:spLocks noGrp="1"/>
           </p:cNvSpPr>
           <p:nvPr/>
         </p:nvSpPr>
         <p:spPr>
-          <a:xfrm xmlns:a="http://schemas.openxmlformats.org/drawingml/2006/main">
+          <a:xfrm>
             <a:off x="609600" y="381000"/>
             <a:ext cx="10953750" cy="762000"/>
           </a:xfrm>
-          <a:prstGeom xmlns:a="http://schemas.openxmlformats.org/drawingml/2006/main" prst="rect">
+          <a:prstGeom prst="rect">
             <a:avLst/>
           </a:prstGeom>
-          <a:noFill xmlns:a="http://schemas.openxmlformats.org/drawingml/2006/main"/>
-          <a:ln xmlns:a="http://schemas.openxmlformats.org/drawingml/2006/main" w="0">
+          <a:noFill/>
+          <a:ln w="0">
             <a:noFill/>
           </a:ln>
         </p:spPr>
         <p:txBody>
-          <a:bodyPr xmlns:a="http://schemas.openxmlformats.org/drawingml/2006/main">
+          <a:bodyPr>
             <a:noAutofit/>
           </a:bodyPr>
-          <a:lstStyle xmlns:a="http://schemas.openxmlformats.org/drawingml/2006/main"/>
-          <a:p xmlns:a="http://schemas.openxmlformats.org/drawingml/2006/main">
+          <a:lstStyle/>
+          <a:p>
             <a:pPr>
               <a:defRPr sz="2850" b="1">
                 <a:solidFill>
                   <a:srgbClr val="152C43"/>
                 </a:solidFill>
-                <a:latin typeface="Microsoft YaHei"/>
-                <a:ea typeface="Microsoft YaHei"/>
-                <a:cs typeface="Microsoft YaHei"/>
+                <a:latin typeface="微软雅黑" panose="020B0503020204020204" charset="-122"/>
+                <a:ea typeface="微软雅黑" panose="020B0503020204020204" charset="-122"/>
+                <a:cs typeface="微软雅黑" panose="020B0503020204020204" charset="-122"/>
               </a:defRPr>
             </a:pPr>
             <a:r>
@@ -1858,26 +1439,34 @@
                 <a:solidFill>
                   <a:srgbClr val="152C43"/>
                 </a:solidFill>
-                <a:latin typeface="Microsoft YaHei"/>
-                <a:ea typeface="Microsoft YaHei"/>
-                <a:cs typeface="Microsoft YaHei"/>
+                <a:latin typeface="微软雅黑" panose="020B0503020204020204" charset="-122"/>
+                <a:ea typeface="微软雅黑" panose="020B0503020204020204" charset="-122"/>
+                <a:cs typeface="微软雅黑" panose="020B0503020204020204" charset="-122"/>
               </a:rPr>
               <a:t>两项任务使用不同粒度的数据</a:t>
             </a:r>
+            <a:endParaRPr sz="2850" b="1">
+              <a:solidFill>
+                <a:srgbClr val="152C43"/>
+              </a:solidFill>
+              <a:latin typeface="微软雅黑" panose="020B0503020204020204" charset="-122"/>
+              <a:ea typeface="微软雅黑" panose="020B0503020204020204" charset="-122"/>
+              <a:cs typeface="微软雅黑" panose="020B0503020204020204" charset="-122"/>
+            </a:endParaRPr>
           </a:p>
         </p:txBody>
       </p:sp>
       <p:graphicFrame>
         <p:nvGraphicFramePr>
-          <p:cNvPr id="5" name=""/>
+          <p:cNvPr id="5" name="表格 4"/>
           <p:cNvGraphicFramePr/>
           <p:nvPr/>
         </p:nvGraphicFramePr>
         <p:xfrm>
-          <a:off xmlns:a="http://schemas.openxmlformats.org/drawingml/2006/main" x="609600" y="1428750"/>
-          <a:ext xmlns:a="http://schemas.openxmlformats.org/drawingml/2006/main" cx="10972800" cy="2762250"/>
+          <a:off x="609600" y="1428750"/>
+          <a:ext cx="10972800" cy="2762250"/>
         </p:xfrm>
-        <a:graphic xmlns:a="http://schemas.openxmlformats.org/drawingml/2006/main">
+        <a:graphic>
           <a:graphicData uri="http://schemas.openxmlformats.org/drawingml/2006/table">
             <a:tbl>
               <a:tblPr/>
@@ -1892,17 +1481,14 @@
                     <a:bodyPr/>
                     <a:lstStyle/>
                     <a:p>
-                      <a:r>
-                        <a:rPr sz="1875" b="1">
-                          <a:solidFill>
-                            <a:srgbClr val="152C43"/>
-                          </a:solidFill>
-                          <a:latin typeface="Microsoft YaHei"/>
-                          <a:ea typeface="Microsoft YaHei"/>
-                          <a:cs typeface="Microsoft YaHei"/>
-                        </a:rPr>
-                        <a:t/>
-                      </a:r>
+                      <a:endParaRPr sz="1875" b="1">
+                        <a:solidFill>
+                          <a:srgbClr val="152C43"/>
+                        </a:solidFill>
+                        <a:latin typeface="微软雅黑" panose="020B0503020204020204" charset="-122"/>
+                        <a:ea typeface="微软雅黑" panose="020B0503020204020204" charset="-122"/>
+                        <a:cs typeface="微软雅黑" panose="020B0503020204020204" charset="-122"/>
+                      </a:endParaRPr>
                     </a:p>
                   </a:txBody>
                   <a:tcPr marL="133350" marR="133350" marT="95250" marB="95250" anchor="ctr">
@@ -1921,12 +1507,20 @@
                           <a:solidFill>
                             <a:srgbClr val="152C43"/>
                           </a:solidFill>
-                          <a:latin typeface="Microsoft YaHei"/>
-                          <a:ea typeface="Microsoft YaHei"/>
-                          <a:cs typeface="Microsoft YaHei"/>
+                          <a:latin typeface="微软雅黑" panose="020B0503020204020204" charset="-122"/>
+                          <a:ea typeface="微软雅黑" panose="020B0503020204020204" charset="-122"/>
+                          <a:cs typeface="微软雅黑" panose="020B0503020204020204" charset="-122"/>
                         </a:rPr>
                         <a:t>KPI 预测</a:t>
                       </a:r>
+                      <a:endParaRPr sz="1875" b="1">
+                        <a:solidFill>
+                          <a:srgbClr val="152C43"/>
+                        </a:solidFill>
+                        <a:latin typeface="微软雅黑" panose="020B0503020204020204" charset="-122"/>
+                        <a:ea typeface="微软雅黑" panose="020B0503020204020204" charset="-122"/>
+                        <a:cs typeface="微软雅黑" panose="020B0503020204020204" charset="-122"/>
+                      </a:endParaRPr>
                     </a:p>
                   </a:txBody>
                   <a:tcPr marL="133350" marR="133350" marT="95250" marB="95250" anchor="ctr">
@@ -1945,12 +1539,20 @@
                           <a:solidFill>
                             <a:srgbClr val="152C43"/>
                           </a:solidFill>
-                          <a:latin typeface="Microsoft YaHei"/>
-                          <a:ea typeface="Microsoft YaHei"/>
-                          <a:cs typeface="Microsoft YaHei"/>
+                          <a:latin typeface="微软雅黑" panose="020B0503020204020204" charset="-122"/>
+                          <a:ea typeface="微软雅黑" panose="020B0503020204020204" charset="-122"/>
+                          <a:cs typeface="微软雅黑" panose="020B0503020204020204" charset="-122"/>
                         </a:rPr>
                         <a:t>异常检测</a:t>
                       </a:r>
+                      <a:endParaRPr sz="1875" b="1">
+                        <a:solidFill>
+                          <a:srgbClr val="152C43"/>
+                        </a:solidFill>
+                        <a:latin typeface="微软雅黑" panose="020B0503020204020204" charset="-122"/>
+                        <a:ea typeface="微软雅黑" panose="020B0503020204020204" charset="-122"/>
+                        <a:cs typeface="微软雅黑" panose="020B0503020204020204" charset="-122"/>
+                      </a:endParaRPr>
                     </a:p>
                   </a:txBody>
                   <a:tcPr marL="133350" marR="133350" marT="95250" marB="95250" anchor="ctr">
@@ -1971,12 +1573,20 @@
                           <a:solidFill>
                             <a:srgbClr val="152C43"/>
                           </a:solidFill>
-                          <a:latin typeface="Microsoft YaHei"/>
-                          <a:ea typeface="Microsoft YaHei"/>
-                          <a:cs typeface="Microsoft YaHei"/>
+                          <a:latin typeface="微软雅黑" panose="020B0503020204020204" charset="-122"/>
+                          <a:ea typeface="微软雅黑" panose="020B0503020204020204" charset="-122"/>
+                          <a:cs typeface="微软雅黑" panose="020B0503020204020204" charset="-122"/>
                         </a:rPr>
                         <a:t>数据粒度</a:t>
                       </a:r>
+                      <a:endParaRPr sz="1875">
+                        <a:solidFill>
+                          <a:srgbClr val="152C43"/>
+                        </a:solidFill>
+                        <a:latin typeface="微软雅黑" panose="020B0503020204020204" charset="-122"/>
+                        <a:ea typeface="微软雅黑" panose="020B0503020204020204" charset="-122"/>
+                        <a:cs typeface="微软雅黑" panose="020B0503020204020204" charset="-122"/>
+                      </a:endParaRPr>
                     </a:p>
                   </a:txBody>
                   <a:tcPr marL="133350" marR="133350" marT="95250" marB="95250" anchor="ctr">
@@ -1995,12 +1605,20 @@
                           <a:solidFill>
                             <a:srgbClr val="152C43"/>
                           </a:solidFill>
-                          <a:latin typeface="Microsoft YaHei"/>
-                          <a:ea typeface="Microsoft YaHei"/>
-                          <a:cs typeface="Microsoft YaHei"/>
+                          <a:latin typeface="微软雅黑" panose="020B0503020204020204" charset="-122"/>
+                          <a:ea typeface="微软雅黑" panose="020B0503020204020204" charset="-122"/>
+                          <a:cs typeface="微软雅黑" panose="020B0503020204020204" charset="-122"/>
                         </a:rPr>
                         <a:t>网络级小时汇总</a:t>
                       </a:r>
+                      <a:endParaRPr sz="1875">
+                        <a:solidFill>
+                          <a:srgbClr val="152C43"/>
+                        </a:solidFill>
+                        <a:latin typeface="微软雅黑" panose="020B0503020204020204" charset="-122"/>
+                        <a:ea typeface="微软雅黑" panose="020B0503020204020204" charset="-122"/>
+                        <a:cs typeface="微软雅黑" panose="020B0503020204020204" charset="-122"/>
+                      </a:endParaRPr>
                     </a:p>
                   </a:txBody>
                   <a:tcPr marL="133350" marR="133350" marT="95250" marB="95250" anchor="ctr">
@@ -2019,12 +1637,20 @@
                           <a:solidFill>
                             <a:srgbClr val="152C43"/>
                           </a:solidFill>
-                          <a:latin typeface="Microsoft YaHei"/>
-                          <a:ea typeface="Microsoft YaHei"/>
-                          <a:cs typeface="Microsoft YaHei"/>
+                          <a:latin typeface="微软雅黑" panose="020B0503020204020204" charset="-122"/>
+                          <a:ea typeface="微软雅黑" panose="020B0503020204020204" charset="-122"/>
+                          <a:cs typeface="微软雅黑" panose="020B0503020204020204" charset="-122"/>
                         </a:rPr>
                         <a:t>90 个小区的小时波束均值</a:t>
                       </a:r>
+                      <a:endParaRPr sz="1875">
+                        <a:solidFill>
+                          <a:srgbClr val="152C43"/>
+                        </a:solidFill>
+                        <a:latin typeface="微软雅黑" panose="020B0503020204020204" charset="-122"/>
+                        <a:ea typeface="微软雅黑" panose="020B0503020204020204" charset="-122"/>
+                        <a:cs typeface="微软雅黑" panose="020B0503020204020204" charset="-122"/>
+                      </a:endParaRPr>
                     </a:p>
                   </a:txBody>
                   <a:tcPr marL="133350" marR="133350" marT="95250" marB="95250" anchor="ctr">
@@ -2045,12 +1671,20 @@
                           <a:solidFill>
                             <a:srgbClr val="152C43"/>
                           </a:solidFill>
-                          <a:latin typeface="Microsoft YaHei"/>
-                          <a:ea typeface="Microsoft YaHei"/>
-                          <a:cs typeface="Microsoft YaHei"/>
+                          <a:latin typeface="微软雅黑" panose="020B0503020204020204" charset="-122"/>
+                          <a:ea typeface="微软雅黑" panose="020B0503020204020204" charset="-122"/>
+                          <a:cs typeface="微软雅黑" panose="020B0503020204020204" charset="-122"/>
                         </a:rPr>
                         <a:t>输入尺度</a:t>
                       </a:r>
+                      <a:endParaRPr sz="1875">
+                        <a:solidFill>
+                          <a:srgbClr val="152C43"/>
+                        </a:solidFill>
+                        <a:latin typeface="微软雅黑" panose="020B0503020204020204" charset="-122"/>
+                        <a:ea typeface="微软雅黑" panose="020B0503020204020204" charset="-122"/>
+                        <a:cs typeface="微软雅黑" panose="020B0503020204020204" charset="-122"/>
+                      </a:endParaRPr>
                     </a:p>
                   </a:txBody>
                   <a:tcPr marL="133350" marR="133350" marT="95250" marB="95250" anchor="ctr">
@@ -2069,12 +1703,20 @@
                           <a:solidFill>
                             <a:srgbClr val="152C43"/>
                           </a:solidFill>
-                          <a:latin typeface="Microsoft YaHei"/>
-                          <a:ea typeface="Microsoft YaHei"/>
-                          <a:cs typeface="Microsoft YaHei"/>
+                          <a:latin typeface="微软雅黑" panose="020B0503020204020204" charset="-122"/>
+                          <a:ea typeface="微软雅黑" panose="020B0503020204020204" charset="-122"/>
+                          <a:cs typeface="微软雅黑" panose="020B0503020204020204" charset="-122"/>
                         </a:rPr>
                         <a:t>24 × 4 个 Z-score 数值</a:t>
                       </a:r>
+                      <a:endParaRPr sz="1875">
+                        <a:solidFill>
+                          <a:srgbClr val="152C43"/>
+                        </a:solidFill>
+                        <a:latin typeface="微软雅黑" panose="020B0503020204020204" charset="-122"/>
+                        <a:ea typeface="微软雅黑" panose="020B0503020204020204" charset="-122"/>
+                        <a:cs typeface="微软雅黑" panose="020B0503020204020204" charset="-122"/>
+                      </a:endParaRPr>
                     </a:p>
                   </a:txBody>
                   <a:tcPr marL="133350" marR="133350" marT="95250" marB="95250" anchor="ctr">
@@ -2093,12 +1735,20 @@
                           <a:solidFill>
                             <a:srgbClr val="152C43"/>
                           </a:solidFill>
-                          <a:latin typeface="Microsoft YaHei"/>
-                          <a:ea typeface="Microsoft YaHei"/>
-                          <a:cs typeface="Microsoft YaHei"/>
+                          <a:latin typeface="微软雅黑" panose="020B0503020204020204" charset="-122"/>
+                          <a:ea typeface="微软雅黑" panose="020B0503020204020204" charset="-122"/>
+                          <a:cs typeface="微软雅黑" panose="020B0503020204020204" charset="-122"/>
                         </a:rPr>
                         <a:t>单小时 4 个源尺度观测</a:t>
                       </a:r>
+                      <a:endParaRPr sz="1875">
+                        <a:solidFill>
+                          <a:srgbClr val="152C43"/>
+                        </a:solidFill>
+                        <a:latin typeface="微软雅黑" panose="020B0503020204020204" charset="-122"/>
+                        <a:ea typeface="微软雅黑" panose="020B0503020204020204" charset="-122"/>
+                        <a:cs typeface="微软雅黑" panose="020B0503020204020204" charset="-122"/>
+                      </a:endParaRPr>
                     </a:p>
                   </a:txBody>
                   <a:tcPr marL="133350" marR="133350" marT="95250" marB="95250" anchor="ctr">
@@ -2119,12 +1769,20 @@
                           <a:solidFill>
                             <a:srgbClr val="152C43"/>
                           </a:solidFill>
-                          <a:latin typeface="Microsoft YaHei"/>
-                          <a:ea typeface="Microsoft YaHei"/>
-                          <a:cs typeface="Microsoft YaHei"/>
+                          <a:latin typeface="微软雅黑" panose="020B0503020204020204" charset="-122"/>
+                          <a:ea typeface="微软雅黑" panose="020B0503020204020204" charset="-122"/>
+                          <a:cs typeface="微软雅黑" panose="020B0503020204020204" charset="-122"/>
                         </a:rPr>
                         <a:t>训练 / 验证</a:t>
                       </a:r>
+                      <a:endParaRPr sz="1875">
+                        <a:solidFill>
+                          <a:srgbClr val="152C43"/>
+                        </a:solidFill>
+                        <a:latin typeface="微软雅黑" panose="020B0503020204020204" charset="-122"/>
+                        <a:ea typeface="微软雅黑" panose="020B0503020204020204" charset="-122"/>
+                        <a:cs typeface="微软雅黑" panose="020B0503020204020204" charset="-122"/>
+                      </a:endParaRPr>
                     </a:p>
                   </a:txBody>
                   <a:tcPr marL="133350" marR="133350" marT="95250" marB="95250" anchor="ctr">
@@ -2143,12 +1801,20 @@
                           <a:solidFill>
                             <a:srgbClr val="152C43"/>
                           </a:solidFill>
-                          <a:latin typeface="Microsoft YaHei"/>
-                          <a:ea typeface="Microsoft YaHei"/>
-                          <a:cs typeface="Microsoft YaHei"/>
+                          <a:latin typeface="微软雅黑" panose="020B0503020204020204" charset="-122"/>
+                          <a:ea typeface="微软雅黑" panose="020B0503020204020204" charset="-122"/>
+                          <a:cs typeface="微软雅黑" panose="020B0503020204020204" charset="-122"/>
                         </a:rPr>
                         <a:t>816 / 144 个窗口</a:t>
                       </a:r>
+                      <a:endParaRPr sz="1875">
+                        <a:solidFill>
+                          <a:srgbClr val="152C43"/>
+                        </a:solidFill>
+                        <a:latin typeface="微软雅黑" panose="020B0503020204020204" charset="-122"/>
+                        <a:ea typeface="微软雅黑" panose="020B0503020204020204" charset="-122"/>
+                        <a:cs typeface="微软雅黑" panose="020B0503020204020204" charset="-122"/>
+                      </a:endParaRPr>
                     </a:p>
                   </a:txBody>
                   <a:tcPr marL="133350" marR="133350" marT="95250" marB="95250" anchor="ctr">
@@ -2167,12 +1833,20 @@
                           <a:solidFill>
                             <a:srgbClr val="152C43"/>
                           </a:solidFill>
-                          <a:latin typeface="Microsoft YaHei"/>
-                          <a:ea typeface="Microsoft YaHei"/>
-                          <a:cs typeface="Microsoft YaHei"/>
+                          <a:latin typeface="微软雅黑" panose="020B0503020204020204" charset="-122"/>
+                          <a:ea typeface="微软雅黑" panose="020B0503020204020204" charset="-122"/>
+                          <a:cs typeface="微软雅黑" panose="020B0503020204020204" charset="-122"/>
                         </a:rPr>
                         <a:t>60,480 / 15,120 点每 KPI</a:t>
                       </a:r>
+                      <a:endParaRPr sz="1875">
+                        <a:solidFill>
+                          <a:srgbClr val="152C43"/>
+                        </a:solidFill>
+                        <a:latin typeface="微软雅黑" panose="020B0503020204020204" charset="-122"/>
+                        <a:ea typeface="微软雅黑" panose="020B0503020204020204" charset="-122"/>
+                        <a:cs typeface="微软雅黑" panose="020B0503020204020204" charset="-122"/>
+                      </a:endParaRPr>
                     </a:p>
                   </a:txBody>
                   <a:tcPr marL="133350" marR="133350" marT="95250" marB="95250" anchor="ctr">
@@ -2193,12 +1867,20 @@
                           <a:solidFill>
                             <a:srgbClr val="152C43"/>
                           </a:solidFill>
-                          <a:latin typeface="Microsoft YaHei"/>
-                          <a:ea typeface="Microsoft YaHei"/>
-                          <a:cs typeface="Microsoft YaHei"/>
+                          <a:latin typeface="微软雅黑" panose="020B0503020204020204" charset="-122"/>
+                          <a:ea typeface="微软雅黑" panose="020B0503020204020204" charset="-122"/>
+                          <a:cs typeface="微软雅黑" panose="020B0503020204020204" charset="-122"/>
                         </a:rPr>
                         <a:t>测试</a:t>
                       </a:r>
+                      <a:endParaRPr sz="1875">
+                        <a:solidFill>
+                          <a:srgbClr val="152C43"/>
+                        </a:solidFill>
+                        <a:latin typeface="微软雅黑" panose="020B0503020204020204" charset="-122"/>
+                        <a:ea typeface="微软雅黑" panose="020B0503020204020204" charset="-122"/>
+                        <a:cs typeface="微软雅黑" panose="020B0503020204020204" charset="-122"/>
+                      </a:endParaRPr>
                     </a:p>
                   </a:txBody>
                   <a:tcPr marL="133350" marR="133350" marT="95250" marB="95250" anchor="ctr">
@@ -2217,12 +1899,20 @@
                           <a:solidFill>
                             <a:srgbClr val="152C43"/>
                           </a:solidFill>
-                          <a:latin typeface="Microsoft YaHei"/>
-                          <a:ea typeface="Microsoft YaHei"/>
-                          <a:cs typeface="Microsoft YaHei"/>
+                          <a:latin typeface="微软雅黑" panose="020B0503020204020204" charset="-122"/>
+                          <a:ea typeface="微软雅黑" panose="020B0503020204020204" charset="-122"/>
+                          <a:cs typeface="微软雅黑" panose="020B0503020204020204" charset="-122"/>
                         </a:rPr>
                         <a:t>144 个一步预测窗口</a:t>
                       </a:r>
+                      <a:endParaRPr sz="1875">
+                        <a:solidFill>
+                          <a:srgbClr val="152C43"/>
+                        </a:solidFill>
+                        <a:latin typeface="微软雅黑" panose="020B0503020204020204" charset="-122"/>
+                        <a:ea typeface="微软雅黑" panose="020B0503020204020204" charset="-122"/>
+                        <a:cs typeface="微软雅黑" panose="020B0503020204020204" charset="-122"/>
+                      </a:endParaRPr>
                     </a:p>
                   </a:txBody>
                   <a:tcPr marL="133350" marR="133350" marT="95250" marB="95250" anchor="ctr">
@@ -2241,12 +1931,20 @@
                           <a:solidFill>
                             <a:srgbClr val="152C43"/>
                           </a:solidFill>
-                          <a:latin typeface="Microsoft YaHei"/>
-                          <a:ea typeface="Microsoft YaHei"/>
-                          <a:cs typeface="Microsoft YaHei"/>
+                          <a:latin typeface="微软雅黑" panose="020B0503020204020204" charset="-122"/>
+                          <a:ea typeface="微软雅黑" panose="020B0503020204020204" charset="-122"/>
+                          <a:cs typeface="微软雅黑" panose="020B0503020204020204" charset="-122"/>
                         </a:rPr>
                         <a:t>30,240 点每 KPI</a:t>
                       </a:r>
+                      <a:endParaRPr sz="1875">
+                        <a:solidFill>
+                          <a:srgbClr val="152C43"/>
+                        </a:solidFill>
+                        <a:latin typeface="微软雅黑" panose="020B0503020204020204" charset="-122"/>
+                        <a:ea typeface="微软雅黑" panose="020B0503020204020204" charset="-122"/>
+                        <a:cs typeface="微软雅黑" panose="020B0503020204020204" charset="-122"/>
+                      </a:endParaRPr>
                     </a:p>
                   </a:txBody>
                   <a:tcPr marL="133350" marR="133350" marT="95250" marB="95250" anchor="ctr">
@@ -2260,81 +1958,23 @@
           </a:graphicData>
         </a:graphic>
       </p:graphicFrame>
-      <p:sp>
-        <p:nvSpPr>
-          <p:cNvPr id="3" name="">
-            <a:extLst xmlns:a="http://schemas.openxmlformats.org/drawingml/2006/main">
-              <a:ext uri="{FF2B5EF4-FFF2-40B4-BE49-F238E27FC236}">
-                <a16:creationId xmlns:a16="http://schemas.microsoft.com/office/drawing/2014/main" id="{AB011498-6FE6-4361-B51A-A0C97B4A878C}"/>
-              </a:ext>
-            </a:extLst>
-          </p:cNvPr>
-          <p:cNvSpPr>
-            <a:spLocks xmlns:a="http://schemas.openxmlformats.org/drawingml/2006/main" noGrp="1"/>
-          </p:cNvSpPr>
-          <p:nvPr/>
-        </p:nvSpPr>
-        <p:spPr>
-          <a:xfrm xmlns:a="http://schemas.openxmlformats.org/drawingml/2006/main">
-            <a:off x="628650" y="4810125"/>
-            <a:ext cx="10858500" cy="1047750"/>
-          </a:xfrm>
-          <a:prstGeom xmlns:a="http://schemas.openxmlformats.org/drawingml/2006/main" prst="rect">
-            <a:avLst/>
-          </a:prstGeom>
-          <a:noFill xmlns:a="http://schemas.openxmlformats.org/drawingml/2006/main"/>
-          <a:ln xmlns:a="http://schemas.openxmlformats.org/drawingml/2006/main" w="0">
-            <a:noFill/>
-          </a:ln>
-        </p:spPr>
-        <p:txBody>
-          <a:bodyPr xmlns:a="http://schemas.openxmlformats.org/drawingml/2006/main">
-            <a:noAutofit/>
-          </a:bodyPr>
-          <a:lstStyle xmlns:a="http://schemas.openxmlformats.org/drawingml/2006/main"/>
-          <a:p xmlns:a="http://schemas.openxmlformats.org/drawingml/2006/main">
-            <a:pPr>
-              <a:defRPr sz="2100" b="0">
-                <a:solidFill>
-                  <a:srgbClr val="245B87"/>
-                </a:solidFill>
-                <a:latin typeface="Microsoft YaHei"/>
-                <a:ea typeface="Microsoft YaHei"/>
-                <a:cs typeface="Microsoft YaHei"/>
-              </a:defRPr>
-            </a:pPr>
-            <a:r>
-              <a:rPr sz="2100" b="0">
-                <a:solidFill>
-                  <a:srgbClr val="245B87"/>
-                </a:solidFill>
-                <a:latin typeface="Microsoft YaHei"/>
-                <a:ea typeface="Microsoft YaHei"/>
-                <a:cs typeface="Microsoft YaHei"/>
-              </a:rPr>
-              <a:t>检测先去除日周期；它检测的是观测或假设输入，不是 LSTM 预测值。</a:t>
-            </a:r>
-          </a:p>
-        </p:txBody>
-      </p:sp>
     </p:spTree>
-    <p:extLst>
-      <p:ext uri="{BB962C8B-B14F-4D97-AF65-F5344CB8AC3E}">
-        <p14:creationId xmlns:p14="http://schemas.microsoft.com/office/powerpoint/2010/main" val="842514919"/>
-      </p:ext>
-    </p:extLst>
   </p:cSld>
+  <p:clrMapOvr>
+    <a:masterClrMapping/>
+  </p:clrMapOvr>
 </p:sld>
 </file>
 
 <file path=ppt/slides/slide3.xml><?xml version="1.0" encoding="utf-8"?>
-<p:sld xmlns:p="http://schemas.openxmlformats.org/presentationml/2006/main">
+<p:sld xmlns:a="http://schemas.openxmlformats.org/drawingml/2006/main" xmlns:r="http://schemas.openxmlformats.org/officeDocument/2006/relationships" xmlns:p="http://schemas.openxmlformats.org/presentationml/2006/main">
   <p:cSld>
     <p:bg>
       <p:bgPr>
-        <a:solidFill xmlns:a="http://schemas.openxmlformats.org/drawingml/2006/main">
+        <a:solidFill>
           <a:srgbClr val="FFFFFF"/>
         </a:solidFill>
+        <a:effectLst/>
       </p:bgPr>
     </p:bg>
     <p:spTree>
@@ -2343,50 +1983,42 @@
         <p:cNvGrpSpPr/>
         <p:nvPr/>
       </p:nvGrpSpPr>
-      <p:grpSpPr>
-        <a:xfrm xmlns:a="http://schemas.openxmlformats.org/drawingml/2006/main"/>
-      </p:grpSpPr>
-      <p:sp>
-        <p:nvSpPr>
-          <p:cNvPr id="7" name="">
-            <a:extLst xmlns:a="http://schemas.openxmlformats.org/drawingml/2006/main">
-              <a:ext uri="{FF2B5EF4-FFF2-40B4-BE49-F238E27FC236}">
-                <a16:creationId xmlns:a16="http://schemas.microsoft.com/office/drawing/2014/main" id="{C5F7DD08-61D5-40E8-B098-A16A9B5D732A}"/>
-              </a:ext>
-            </a:extLst>
-          </p:cNvPr>
+      <p:grpSpPr/>
+      <p:sp>
+        <p:nvSpPr>
+          <p:cNvPr id="7" name="矩形 6"/>
           <p:cNvSpPr>
-            <a:spLocks xmlns:a="http://schemas.openxmlformats.org/drawingml/2006/main" noGrp="1"/>
+            <a:spLocks noGrp="1"/>
           </p:cNvSpPr>
           <p:nvPr/>
         </p:nvSpPr>
         <p:spPr>
-          <a:xfrm xmlns:a="http://schemas.openxmlformats.org/drawingml/2006/main">
+          <a:xfrm>
             <a:off x="609600" y="381000"/>
             <a:ext cx="10953750" cy="762000"/>
           </a:xfrm>
-          <a:prstGeom xmlns:a="http://schemas.openxmlformats.org/drawingml/2006/main" prst="rect">
+          <a:prstGeom prst="rect">
             <a:avLst/>
           </a:prstGeom>
-          <a:noFill xmlns:a="http://schemas.openxmlformats.org/drawingml/2006/main"/>
-          <a:ln xmlns:a="http://schemas.openxmlformats.org/drawingml/2006/main" w="0">
+          <a:noFill/>
+          <a:ln w="0">
             <a:noFill/>
           </a:ln>
         </p:spPr>
         <p:txBody>
-          <a:bodyPr xmlns:a="http://schemas.openxmlformats.org/drawingml/2006/main">
+          <a:bodyPr>
             <a:noAutofit/>
           </a:bodyPr>
-          <a:lstStyle xmlns:a="http://schemas.openxmlformats.org/drawingml/2006/main"/>
-          <a:p xmlns:a="http://schemas.openxmlformats.org/drawingml/2006/main">
+          <a:lstStyle/>
+          <a:p>
             <a:pPr>
               <a:defRPr sz="2850" b="1">
                 <a:solidFill>
                   <a:srgbClr val="152C43"/>
                 </a:solidFill>
-                <a:latin typeface="Microsoft YaHei"/>
-                <a:ea typeface="Microsoft YaHei"/>
-                <a:cs typeface="Microsoft YaHei"/>
+                <a:latin typeface="微软雅黑" panose="020B0503020204020204" charset="-122"/>
+                <a:ea typeface="微软雅黑" panose="020B0503020204020204" charset="-122"/>
+                <a:cs typeface="微软雅黑" panose="020B0503020204020204" charset="-122"/>
               </a:defRPr>
             </a:pPr>
             <a:r>
@@ -2394,56 +2026,58 @@
                 <a:solidFill>
                   <a:srgbClr val="152C43"/>
                 </a:solidFill>
-                <a:latin typeface="Microsoft YaHei"/>
-                <a:ea typeface="Microsoft YaHei"/>
-                <a:cs typeface="Microsoft YaHei"/>
+                <a:latin typeface="微软雅黑" panose="020B0503020204020204" charset="-122"/>
+                <a:ea typeface="微软雅黑" panose="020B0503020204020204" charset="-122"/>
+                <a:cs typeface="微软雅黑" panose="020B0503020204020204" charset="-122"/>
               </a:rPr>
               <a:t>LSTM 如何完成下一小时预测</a:t>
             </a:r>
+            <a:endParaRPr sz="2850" b="1">
+              <a:solidFill>
+                <a:srgbClr val="152C43"/>
+              </a:solidFill>
+              <a:latin typeface="微软雅黑" panose="020B0503020204020204" charset="-122"/>
+              <a:ea typeface="微软雅黑" panose="020B0503020204020204" charset="-122"/>
+              <a:cs typeface="微软雅黑" panose="020B0503020204020204" charset="-122"/>
+            </a:endParaRPr>
           </a:p>
         </p:txBody>
       </p:sp>
       <p:sp>
         <p:nvSpPr>
-          <p:cNvPr id="2" name="">
-            <a:extLst xmlns:a="http://schemas.openxmlformats.org/drawingml/2006/main">
-              <a:ext uri="{FF2B5EF4-FFF2-40B4-BE49-F238E27FC236}">
-                <a16:creationId xmlns:a16="http://schemas.microsoft.com/office/drawing/2014/main" id="{18589F8A-95E6-4DE0-88D6-2E0F8FD5D37F}"/>
-              </a:ext>
-            </a:extLst>
-          </p:cNvPr>
+          <p:cNvPr id="2" name="矩形 1"/>
           <p:cNvSpPr>
-            <a:spLocks xmlns:a="http://schemas.openxmlformats.org/drawingml/2006/main" noGrp="1"/>
+            <a:spLocks noGrp="1"/>
           </p:cNvSpPr>
           <p:nvPr/>
         </p:nvSpPr>
         <p:spPr>
-          <a:xfrm xmlns:a="http://schemas.openxmlformats.org/drawingml/2006/main">
+          <a:xfrm>
             <a:off x="628650" y="1581150"/>
             <a:ext cx="10477500" cy="590550"/>
           </a:xfrm>
-          <a:prstGeom xmlns:a="http://schemas.openxmlformats.org/drawingml/2006/main" prst="rect">
+          <a:prstGeom prst="rect">
             <a:avLst/>
           </a:prstGeom>
-          <a:noFill xmlns:a="http://schemas.openxmlformats.org/drawingml/2006/main"/>
-          <a:ln xmlns:a="http://schemas.openxmlformats.org/drawingml/2006/main" w="0">
+          <a:noFill/>
+          <a:ln w="0">
             <a:noFill/>
           </a:ln>
         </p:spPr>
         <p:txBody>
-          <a:bodyPr xmlns:a="http://schemas.openxmlformats.org/drawingml/2006/main">
+          <a:bodyPr>
             <a:noAutofit/>
           </a:bodyPr>
-          <a:lstStyle xmlns:a="http://schemas.openxmlformats.org/drawingml/2006/main"/>
-          <a:p xmlns:a="http://schemas.openxmlformats.org/drawingml/2006/main">
+          <a:lstStyle/>
+          <a:p>
             <a:pPr>
               <a:defRPr sz="2475" b="1">
                 <a:solidFill>
                   <a:srgbClr val="152C43"/>
                 </a:solidFill>
-                <a:latin typeface="Microsoft YaHei"/>
-                <a:ea typeface="Microsoft YaHei"/>
-                <a:cs typeface="Microsoft YaHei"/>
+                <a:latin typeface="微软雅黑" panose="020B0503020204020204" charset="-122"/>
+                <a:ea typeface="微软雅黑" panose="020B0503020204020204" charset="-122"/>
+                <a:cs typeface="微软雅黑" panose="020B0503020204020204" charset="-122"/>
               </a:defRPr>
             </a:pPr>
             <a:r>
@@ -2451,56 +2085,58 @@
                 <a:solidFill>
                   <a:srgbClr val="152C43"/>
                 </a:solidFill>
-                <a:latin typeface="Microsoft YaHei"/>
-                <a:ea typeface="Microsoft YaHei"/>
-                <a:cs typeface="Microsoft YaHei"/>
+                <a:latin typeface="微软雅黑" panose="020B0503020204020204" charset="-122"/>
+                <a:ea typeface="微软雅黑" panose="020B0503020204020204" charset="-122"/>
+                <a:cs typeface="微软雅黑" panose="020B0503020204020204" charset="-122"/>
               </a:rPr>
               <a:t>过去 24 小时 × 4 项 KPI</a:t>
             </a:r>
+            <a:endParaRPr sz="2475" b="1">
+              <a:solidFill>
+                <a:srgbClr val="152C43"/>
+              </a:solidFill>
+              <a:latin typeface="微软雅黑" panose="020B0503020204020204" charset="-122"/>
+              <a:ea typeface="微软雅黑" panose="020B0503020204020204" charset="-122"/>
+              <a:cs typeface="微软雅黑" panose="020B0503020204020204" charset="-122"/>
+            </a:endParaRPr>
           </a:p>
         </p:txBody>
       </p:sp>
       <p:sp>
         <p:nvSpPr>
-          <p:cNvPr id="3" name="">
-            <a:extLst xmlns:a="http://schemas.openxmlformats.org/drawingml/2006/main">
-              <a:ext uri="{FF2B5EF4-FFF2-40B4-BE49-F238E27FC236}">
-                <a16:creationId xmlns:a16="http://schemas.microsoft.com/office/drawing/2014/main" id="{8FC64198-5BF1-4301-A306-76E88ED2819A}"/>
-              </a:ext>
-            </a:extLst>
-          </p:cNvPr>
+          <p:cNvPr id="3" name="矩形 2"/>
           <p:cNvSpPr>
-            <a:spLocks xmlns:a="http://schemas.openxmlformats.org/drawingml/2006/main" noGrp="1"/>
+            <a:spLocks noGrp="1"/>
           </p:cNvSpPr>
           <p:nvPr/>
         </p:nvSpPr>
         <p:spPr>
-          <a:xfrm xmlns:a="http://schemas.openxmlformats.org/drawingml/2006/main">
+          <a:xfrm>
             <a:off x="628650" y="2457450"/>
             <a:ext cx="10763250" cy="1047750"/>
           </a:xfrm>
-          <a:prstGeom xmlns:a="http://schemas.openxmlformats.org/drawingml/2006/main" prst="rect">
+          <a:prstGeom prst="rect">
             <a:avLst/>
           </a:prstGeom>
-          <a:noFill xmlns:a="http://schemas.openxmlformats.org/drawingml/2006/main"/>
-          <a:ln xmlns:a="http://schemas.openxmlformats.org/drawingml/2006/main" w="0">
+          <a:noFill/>
+          <a:ln w="0">
             <a:noFill/>
           </a:ln>
         </p:spPr>
         <p:txBody>
-          <a:bodyPr xmlns:a="http://schemas.openxmlformats.org/drawingml/2006/main">
+          <a:bodyPr>
             <a:noAutofit/>
           </a:bodyPr>
-          <a:lstStyle xmlns:a="http://schemas.openxmlformats.org/drawingml/2006/main"/>
-          <a:p xmlns:a="http://schemas.openxmlformats.org/drawingml/2006/main">
+          <a:lstStyle/>
+          <a:p>
             <a:pPr>
               <a:defRPr sz="2250" b="0">
                 <a:solidFill>
                   <a:srgbClr val="245B87"/>
                 </a:solidFill>
-                <a:latin typeface="Microsoft YaHei"/>
-                <a:ea typeface="Microsoft YaHei"/>
-                <a:cs typeface="Microsoft YaHei"/>
+                <a:latin typeface="微软雅黑" panose="020B0503020204020204" charset="-122"/>
+                <a:ea typeface="微软雅黑" panose="020B0503020204020204" charset="-122"/>
+                <a:cs typeface="微软雅黑" panose="020B0503020204020204" charset="-122"/>
               </a:defRPr>
             </a:pPr>
             <a:r>
@@ -2508,56 +2144,58 @@
                 <a:solidFill>
                   <a:srgbClr val="245B87"/>
                 </a:solidFill>
-                <a:latin typeface="Microsoft YaHei"/>
-                <a:ea typeface="Microsoft YaHei"/>
-                <a:cs typeface="Microsoft YaHei"/>
+                <a:latin typeface="微软雅黑" panose="020B0503020204020204" charset="-122"/>
+                <a:ea typeface="微软雅黑" panose="020B0503020204020204" charset="-122"/>
+                <a:cs typeface="微软雅黑" panose="020B0503020204020204" charset="-122"/>
               </a:rPr>
               <a:t>按小时读入 → 32 维 LSTM 状态 → 线性层 → 下一小时 4 项预测</a:t>
             </a:r>
+            <a:endParaRPr sz="2250" b="0">
+              <a:solidFill>
+                <a:srgbClr val="245B87"/>
+              </a:solidFill>
+              <a:latin typeface="微软雅黑" panose="020B0503020204020204" charset="-122"/>
+              <a:ea typeface="微软雅黑" panose="020B0503020204020204" charset="-122"/>
+              <a:cs typeface="微软雅黑" panose="020B0503020204020204" charset="-122"/>
+            </a:endParaRPr>
           </a:p>
         </p:txBody>
       </p:sp>
       <p:sp>
         <p:nvSpPr>
-          <p:cNvPr id="4" name="">
-            <a:extLst xmlns:a="http://schemas.openxmlformats.org/drawingml/2006/main">
-              <a:ext uri="{FF2B5EF4-FFF2-40B4-BE49-F238E27FC236}">
-                <a16:creationId xmlns:a16="http://schemas.microsoft.com/office/drawing/2014/main" id="{D47E3E84-41DE-415E-BA51-72E0EF00835A}"/>
-              </a:ext>
-            </a:extLst>
-          </p:cNvPr>
+          <p:cNvPr id="4" name="矩形 3"/>
           <p:cNvSpPr>
-            <a:spLocks xmlns:a="http://schemas.openxmlformats.org/drawingml/2006/main" noGrp="1"/>
+            <a:spLocks noGrp="1"/>
           </p:cNvSpPr>
           <p:nvPr/>
         </p:nvSpPr>
         <p:spPr>
-          <a:xfrm xmlns:a="http://schemas.openxmlformats.org/drawingml/2006/main">
+          <a:xfrm>
             <a:off x="628650" y="3714750"/>
             <a:ext cx="10572750" cy="533400"/>
           </a:xfrm>
-          <a:prstGeom xmlns:a="http://schemas.openxmlformats.org/drawingml/2006/main" prst="rect">
+          <a:prstGeom prst="rect">
             <a:avLst/>
           </a:prstGeom>
-          <a:noFill xmlns:a="http://schemas.openxmlformats.org/drawingml/2006/main"/>
-          <a:ln xmlns:a="http://schemas.openxmlformats.org/drawingml/2006/main" w="0">
+          <a:noFill/>
+          <a:ln w="0">
             <a:noFill/>
           </a:ln>
         </p:spPr>
         <p:txBody>
-          <a:bodyPr xmlns:a="http://schemas.openxmlformats.org/drawingml/2006/main">
+          <a:bodyPr>
             <a:noAutofit/>
           </a:bodyPr>
-          <a:lstStyle xmlns:a="http://schemas.openxmlformats.org/drawingml/2006/main"/>
-          <a:p xmlns:a="http://schemas.openxmlformats.org/drawingml/2006/main">
+          <a:lstStyle/>
+          <a:p>
             <a:pPr>
               <a:defRPr sz="2175" b="0">
                 <a:solidFill>
                   <a:srgbClr val="152C43"/>
                 </a:solidFill>
-                <a:latin typeface="Microsoft YaHei"/>
-                <a:ea typeface="Microsoft YaHei"/>
-                <a:cs typeface="Microsoft YaHei"/>
+                <a:latin typeface="微软雅黑" panose="020B0503020204020204" charset="-122"/>
+                <a:ea typeface="微软雅黑" panose="020B0503020204020204" charset="-122"/>
+                <a:cs typeface="微软雅黑" panose="020B0503020204020204" charset="-122"/>
               </a:defRPr>
             </a:pPr>
             <a:r>
@@ -2565,56 +2203,58 @@
                 <a:solidFill>
                   <a:srgbClr val="152C43"/>
                 </a:solidFill>
-                <a:latin typeface="Microsoft YaHei"/>
-                <a:ea typeface="Microsoft YaHei"/>
-                <a:cs typeface="Microsoft YaHei"/>
+                <a:latin typeface="微软雅黑" panose="020B0503020204020204" charset="-122"/>
+                <a:ea typeface="微软雅黑" panose="020B0503020204020204" charset="-122"/>
+                <a:cs typeface="微软雅黑" panose="020B0503020204020204" charset="-122"/>
               </a:rPr>
               <a:t>单层、单向，共 4,996 个可训练参数。</a:t>
             </a:r>
+            <a:endParaRPr sz="2175" b="0">
+              <a:solidFill>
+                <a:srgbClr val="152C43"/>
+              </a:solidFill>
+              <a:latin typeface="微软雅黑" panose="020B0503020204020204" charset="-122"/>
+              <a:ea typeface="微软雅黑" panose="020B0503020204020204" charset="-122"/>
+              <a:cs typeface="微软雅黑" panose="020B0503020204020204" charset="-122"/>
+            </a:endParaRPr>
           </a:p>
         </p:txBody>
       </p:sp>
       <p:sp>
         <p:nvSpPr>
-          <p:cNvPr id="5" name="">
-            <a:extLst xmlns:a="http://schemas.openxmlformats.org/drawingml/2006/main">
-              <a:ext uri="{FF2B5EF4-FFF2-40B4-BE49-F238E27FC236}">
-                <a16:creationId xmlns:a16="http://schemas.microsoft.com/office/drawing/2014/main" id="{9B5B2866-87CC-4DDF-9C59-1D0939CB3319}"/>
-              </a:ext>
-            </a:extLst>
-          </p:cNvPr>
+          <p:cNvPr id="5" name="矩形 4"/>
           <p:cNvSpPr>
-            <a:spLocks xmlns:a="http://schemas.openxmlformats.org/drawingml/2006/main" noGrp="1"/>
+            <a:spLocks noGrp="1"/>
           </p:cNvSpPr>
           <p:nvPr/>
         </p:nvSpPr>
         <p:spPr>
-          <a:xfrm xmlns:a="http://schemas.openxmlformats.org/drawingml/2006/main">
+          <a:xfrm>
             <a:off x="628650" y="4457700"/>
             <a:ext cx="10668000" cy="647700"/>
           </a:xfrm>
-          <a:prstGeom xmlns:a="http://schemas.openxmlformats.org/drawingml/2006/main" prst="rect">
+          <a:prstGeom prst="rect">
             <a:avLst/>
           </a:prstGeom>
-          <a:noFill xmlns:a="http://schemas.openxmlformats.org/drawingml/2006/main"/>
-          <a:ln xmlns:a="http://schemas.openxmlformats.org/drawingml/2006/main" w="0">
+          <a:noFill/>
+          <a:ln w="0">
             <a:noFill/>
           </a:ln>
         </p:spPr>
         <p:txBody>
-          <a:bodyPr xmlns:a="http://schemas.openxmlformats.org/drawingml/2006/main">
+          <a:bodyPr>
             <a:noAutofit/>
           </a:bodyPr>
-          <a:lstStyle xmlns:a="http://schemas.openxmlformats.org/drawingml/2006/main"/>
-          <a:p xmlns:a="http://schemas.openxmlformats.org/drawingml/2006/main">
+          <a:lstStyle/>
+          <a:p>
             <a:pPr>
               <a:defRPr sz="2175" b="0">
                 <a:solidFill>
                   <a:srgbClr val="152C43"/>
                 </a:solidFill>
-                <a:latin typeface="Microsoft YaHei"/>
-                <a:ea typeface="Microsoft YaHei"/>
-                <a:cs typeface="Microsoft YaHei"/>
+                <a:latin typeface="微软雅黑" panose="020B0503020204020204" charset="-122"/>
+                <a:ea typeface="微软雅黑" panose="020B0503020204020204" charset="-122"/>
+                <a:cs typeface="微软雅黑" panose="020B0503020204020204" charset="-122"/>
               </a:defRPr>
             </a:pPr>
             <a:r>
@@ -2622,56 +2262,58 @@
                 <a:solidFill>
                   <a:srgbClr val="152C43"/>
                 </a:solidFill>
-                <a:latin typeface="Microsoft YaHei"/>
-                <a:ea typeface="Microsoft YaHei"/>
-                <a:cs typeface="Microsoft YaHei"/>
+                <a:latin typeface="微软雅黑" panose="020B0503020204020204" charset="-122"/>
+                <a:ea typeface="微软雅黑" panose="020B0503020204020204" charset="-122"/>
+                <a:cs typeface="微软雅黑" panose="020B0503020204020204" charset="-122"/>
               </a:rPr>
               <a:t>Adam + 均方误差；学习率 0.003，最终拟合 80 轮。</a:t>
             </a:r>
+            <a:endParaRPr sz="2175" b="0">
+              <a:solidFill>
+                <a:srgbClr val="152C43"/>
+              </a:solidFill>
+              <a:latin typeface="微软雅黑" panose="020B0503020204020204" charset="-122"/>
+              <a:ea typeface="微软雅黑" panose="020B0503020204020204" charset="-122"/>
+              <a:cs typeface="微软雅黑" panose="020B0503020204020204" charset="-122"/>
+            </a:endParaRPr>
           </a:p>
         </p:txBody>
       </p:sp>
       <p:sp>
         <p:nvSpPr>
-          <p:cNvPr id="6" name="">
-            <a:extLst xmlns:a="http://schemas.openxmlformats.org/drawingml/2006/main">
-              <a:ext uri="{FF2B5EF4-FFF2-40B4-BE49-F238E27FC236}">
-                <a16:creationId xmlns:a16="http://schemas.microsoft.com/office/drawing/2014/main" id="{31AEFF34-F62A-44AE-99AB-F1347090E8E0}"/>
-              </a:ext>
-            </a:extLst>
-          </p:cNvPr>
+          <p:cNvPr id="6" name="矩形 5"/>
           <p:cNvSpPr>
-            <a:spLocks xmlns:a="http://schemas.openxmlformats.org/drawingml/2006/main" noGrp="1"/>
+            <a:spLocks noGrp="1"/>
           </p:cNvSpPr>
           <p:nvPr/>
         </p:nvSpPr>
         <p:spPr>
-          <a:xfrm xmlns:a="http://schemas.openxmlformats.org/drawingml/2006/main">
+          <a:xfrm>
             <a:off x="628650" y="5429250"/>
             <a:ext cx="10668000" cy="714375"/>
           </a:xfrm>
-          <a:prstGeom xmlns:a="http://schemas.openxmlformats.org/drawingml/2006/main" prst="rect">
+          <a:prstGeom prst="rect">
             <a:avLst/>
           </a:prstGeom>
-          <a:noFill xmlns:a="http://schemas.openxmlformats.org/drawingml/2006/main"/>
-          <a:ln xmlns:a="http://schemas.openxmlformats.org/drawingml/2006/main" w="0">
+          <a:noFill/>
+          <a:ln w="0">
             <a:noFill/>
           </a:ln>
         </p:spPr>
         <p:txBody>
-          <a:bodyPr xmlns:a="http://schemas.openxmlformats.org/drawingml/2006/main">
+          <a:bodyPr>
             <a:noAutofit/>
           </a:bodyPr>
-          <a:lstStyle xmlns:a="http://schemas.openxmlformats.org/drawingml/2006/main"/>
-          <a:p xmlns:a="http://schemas.openxmlformats.org/drawingml/2006/main">
+          <a:lstStyle/>
+          <a:p>
             <a:pPr>
               <a:defRPr sz="2025" b="0">
                 <a:solidFill>
                   <a:srgbClr val="536474"/>
                 </a:solidFill>
-                <a:latin typeface="Microsoft YaHei"/>
-                <a:ea typeface="Microsoft YaHei"/>
-                <a:cs typeface="Microsoft YaHei"/>
+                <a:latin typeface="微软雅黑" panose="020B0503020204020204" charset="-122"/>
+                <a:ea typeface="微软雅黑" panose="020B0503020204020204" charset="-122"/>
+                <a:cs typeface="微软雅黑" panose="020B0503020204020204" charset="-122"/>
               </a:defRPr>
             </a:pPr>
             <a:r>
@@ -2679,33 +2321,40 @@
                 <a:solidFill>
                   <a:srgbClr val="536474"/>
                 </a:solidFill>
-                <a:latin typeface="Microsoft YaHei"/>
-                <a:ea typeface="Microsoft YaHei"/>
-                <a:cs typeface="Microsoft YaHei"/>
+                <a:latin typeface="微软雅黑" panose="020B0503020204020204" charset="-122"/>
+                <a:ea typeface="微软雅黑" panose="020B0503020204020204" charset="-122"/>
+                <a:cs typeface="微软雅黑" panose="020B0503020204020204" charset="-122"/>
               </a:rPr>
               <a:t>网页加载 seed 42 的冻结权重，用户编辑输入不会重新训练。</a:t>
             </a:r>
+            <a:endParaRPr sz="2025" b="0">
+              <a:solidFill>
+                <a:srgbClr val="536474"/>
+              </a:solidFill>
+              <a:latin typeface="微软雅黑" panose="020B0503020204020204" charset="-122"/>
+              <a:ea typeface="微软雅黑" panose="020B0503020204020204" charset="-122"/>
+              <a:cs typeface="微软雅黑" panose="020B0503020204020204" charset="-122"/>
+            </a:endParaRPr>
           </a:p>
         </p:txBody>
       </p:sp>
     </p:spTree>
-    <p:extLst>
-      <p:ext uri="{BB962C8B-B14F-4D97-AF65-F5344CB8AC3E}">
-        <p14:creationId xmlns:p14="http://schemas.microsoft.com/office/powerpoint/2010/main" val="2034434143"/>
-      </p:ext>
-    </p:extLst>
   </p:cSld>
+  <p:clrMapOvr>
+    <a:masterClrMapping/>
+  </p:clrMapOvr>
 </p:sld>
 </file>
 
 <file path=ppt/slides/slide4.xml><?xml version="1.0" encoding="utf-8"?>
-<p:sld xmlns:p="http://schemas.openxmlformats.org/presentationml/2006/main">
+<p:sld xmlns:a="http://schemas.openxmlformats.org/drawingml/2006/main" xmlns:r="http://schemas.openxmlformats.org/officeDocument/2006/relationships" xmlns:p="http://schemas.openxmlformats.org/presentationml/2006/main">
   <p:cSld>
     <p:bg>
       <p:bgPr>
-        <a:solidFill xmlns:a="http://schemas.openxmlformats.org/drawingml/2006/main">
+        <a:solidFill>
           <a:srgbClr val="FFFFFF"/>
         </a:solidFill>
+        <a:effectLst/>
       </p:bgPr>
     </p:bg>
     <p:spTree>
@@ -2714,50 +2363,42 @@
         <p:cNvGrpSpPr/>
         <p:nvPr/>
       </p:nvGrpSpPr>
-      <p:grpSpPr>
-        <a:xfrm xmlns:a="http://schemas.openxmlformats.org/drawingml/2006/main"/>
-      </p:grpSpPr>
-      <p:sp>
-        <p:nvSpPr>
-          <p:cNvPr id="5" name="">
-            <a:extLst xmlns:a="http://schemas.openxmlformats.org/drawingml/2006/main">
-              <a:ext uri="{FF2B5EF4-FFF2-40B4-BE49-F238E27FC236}">
-                <a16:creationId xmlns:a16="http://schemas.microsoft.com/office/drawing/2014/main" id="{EAE2E406-3C63-458F-9482-2505E388944E}"/>
-              </a:ext>
-            </a:extLst>
-          </p:cNvPr>
+      <p:grpSpPr/>
+      <p:sp>
+        <p:nvSpPr>
+          <p:cNvPr id="5" name="矩形 4"/>
           <p:cNvSpPr>
-            <a:spLocks xmlns:a="http://schemas.openxmlformats.org/drawingml/2006/main" noGrp="1"/>
+            <a:spLocks noGrp="1"/>
           </p:cNvSpPr>
           <p:nvPr/>
         </p:nvSpPr>
         <p:spPr>
-          <a:xfrm xmlns:a="http://schemas.openxmlformats.org/drawingml/2006/main">
+          <a:xfrm>
             <a:off x="609600" y="381000"/>
             <a:ext cx="10953750" cy="762000"/>
           </a:xfrm>
-          <a:prstGeom xmlns:a="http://schemas.openxmlformats.org/drawingml/2006/main" prst="rect">
+          <a:prstGeom prst="rect">
             <a:avLst/>
           </a:prstGeom>
-          <a:noFill xmlns:a="http://schemas.openxmlformats.org/drawingml/2006/main"/>
-          <a:ln xmlns:a="http://schemas.openxmlformats.org/drawingml/2006/main" w="0">
+          <a:noFill/>
+          <a:ln w="0">
             <a:noFill/>
           </a:ln>
         </p:spPr>
         <p:txBody>
-          <a:bodyPr xmlns:a="http://schemas.openxmlformats.org/drawingml/2006/main">
+          <a:bodyPr>
             <a:noAutofit/>
           </a:bodyPr>
-          <a:lstStyle xmlns:a="http://schemas.openxmlformats.org/drawingml/2006/main"/>
-          <a:p xmlns:a="http://schemas.openxmlformats.org/drawingml/2006/main">
+          <a:lstStyle/>
+          <a:p>
             <a:pPr>
               <a:defRPr sz="2850" b="1">
                 <a:solidFill>
                   <a:srgbClr val="152C43"/>
                 </a:solidFill>
-                <a:latin typeface="Microsoft YaHei"/>
-                <a:ea typeface="Microsoft YaHei"/>
-                <a:cs typeface="Microsoft YaHei"/>
+                <a:latin typeface="微软雅黑" panose="020B0503020204020204" charset="-122"/>
+                <a:ea typeface="微软雅黑" panose="020B0503020204020204" charset="-122"/>
+                <a:cs typeface="微软雅黑" panose="020B0503020204020204" charset="-122"/>
               </a:defRPr>
             </a:pPr>
             <a:r>
@@ -2765,26 +2406,34 @@
                 <a:solidFill>
                   <a:srgbClr val="152C43"/>
                 </a:solidFill>
-                <a:latin typeface="Microsoft YaHei"/>
-                <a:ea typeface="Microsoft YaHei"/>
-                <a:cs typeface="Microsoft YaHei"/>
+                <a:latin typeface="微软雅黑" panose="020B0503020204020204" charset="-122"/>
+                <a:ea typeface="微软雅黑" panose="020B0503020204020204" charset="-122"/>
+                <a:cs typeface="微软雅黑" panose="020B0503020204020204" charset="-122"/>
               </a:rPr>
               <a:t>144 个历史窗口的预测结果</a:t>
             </a:r>
+            <a:endParaRPr sz="2850" b="1">
+              <a:solidFill>
+                <a:srgbClr val="152C43"/>
+              </a:solidFill>
+              <a:latin typeface="微软雅黑" panose="020B0503020204020204" charset="-122"/>
+              <a:ea typeface="微软雅黑" panose="020B0503020204020204" charset="-122"/>
+              <a:cs typeface="微软雅黑" panose="020B0503020204020204" charset="-122"/>
+            </a:endParaRPr>
           </a:p>
         </p:txBody>
       </p:sp>
       <p:graphicFrame>
         <p:nvGraphicFramePr>
-          <p:cNvPr id="6" name=""/>
+          <p:cNvPr id="6" name="表格 5"/>
           <p:cNvGraphicFramePr/>
           <p:nvPr/>
         </p:nvGraphicFramePr>
         <p:xfrm>
-          <a:off xmlns:a="http://schemas.openxmlformats.org/drawingml/2006/main" x="609600" y="1428750"/>
-          <a:ext xmlns:a="http://schemas.openxmlformats.org/drawingml/2006/main" cx="10972800" cy="2762250"/>
+          <a:off x="609600" y="1428750"/>
+          <a:ext cx="10972800" cy="2762250"/>
         </p:xfrm>
-        <a:graphic xmlns:a="http://schemas.openxmlformats.org/drawingml/2006/main">
+        <a:graphic>
           <a:graphicData uri="http://schemas.openxmlformats.org/drawingml/2006/table">
             <a:tbl>
               <a:tblPr/>
@@ -2805,12 +2454,20 @@
                           <a:solidFill>
                             <a:srgbClr val="152C43"/>
                           </a:solidFill>
-                          <a:latin typeface="Microsoft YaHei"/>
-                          <a:ea typeface="Microsoft YaHei"/>
-                          <a:cs typeface="Microsoft YaHei"/>
+                          <a:latin typeface="微软雅黑" panose="020B0503020204020204" charset="-122"/>
+                          <a:ea typeface="微软雅黑" panose="020B0503020204020204" charset="-122"/>
+                          <a:cs typeface="微软雅黑" panose="020B0503020204020204" charset="-122"/>
                         </a:rPr>
                         <a:t>KPI</a:t>
                       </a:r>
+                      <a:endParaRPr sz="1875" b="1">
+                        <a:solidFill>
+                          <a:srgbClr val="152C43"/>
+                        </a:solidFill>
+                        <a:latin typeface="微软雅黑" panose="020B0503020204020204" charset="-122"/>
+                        <a:ea typeface="微软雅黑" panose="020B0503020204020204" charset="-122"/>
+                        <a:cs typeface="微软雅黑" panose="020B0503020204020204" charset="-122"/>
+                      </a:endParaRPr>
                     </a:p>
                   </a:txBody>
                   <a:tcPr marL="133350" marR="133350" marT="95250" marB="95250" anchor="ctr">
@@ -2829,12 +2486,20 @@
                           <a:solidFill>
                             <a:srgbClr val="152C43"/>
                           </a:solidFill>
-                          <a:latin typeface="Microsoft YaHei"/>
-                          <a:ea typeface="Microsoft YaHei"/>
-                          <a:cs typeface="Microsoft YaHei"/>
+                          <a:latin typeface="微软雅黑" panose="020B0503020204020204" charset="-122"/>
+                          <a:ea typeface="微软雅黑" panose="020B0503020204020204" charset="-122"/>
+                          <a:cs typeface="微软雅黑" panose="020B0503020204020204" charset="-122"/>
                         </a:rPr>
                         <a:t>MAE</a:t>
                       </a:r>
+                      <a:endParaRPr sz="1875" b="1">
+                        <a:solidFill>
+                          <a:srgbClr val="152C43"/>
+                        </a:solidFill>
+                        <a:latin typeface="微软雅黑" panose="020B0503020204020204" charset="-122"/>
+                        <a:ea typeface="微软雅黑" panose="020B0503020204020204" charset="-122"/>
+                        <a:cs typeface="微软雅黑" panose="020B0503020204020204" charset="-122"/>
+                      </a:endParaRPr>
                     </a:p>
                   </a:txBody>
                   <a:tcPr marL="133350" marR="133350" marT="95250" marB="95250" anchor="ctr">
@@ -2853,12 +2518,20 @@
                           <a:solidFill>
                             <a:srgbClr val="152C43"/>
                           </a:solidFill>
-                          <a:latin typeface="Microsoft YaHei"/>
-                          <a:ea typeface="Microsoft YaHei"/>
-                          <a:cs typeface="Microsoft YaHei"/>
+                          <a:latin typeface="微软雅黑" panose="020B0503020204020204" charset="-122"/>
+                          <a:ea typeface="微软雅黑" panose="020B0503020204020204" charset="-122"/>
+                          <a:cs typeface="微软雅黑" panose="020B0503020204020204" charset="-122"/>
                         </a:rPr>
                         <a:t>RMSE</a:t>
                       </a:r>
+                      <a:endParaRPr sz="1875" b="1">
+                        <a:solidFill>
+                          <a:srgbClr val="152C43"/>
+                        </a:solidFill>
+                        <a:latin typeface="微软雅黑" panose="020B0503020204020204" charset="-122"/>
+                        <a:ea typeface="微软雅黑" panose="020B0503020204020204" charset="-122"/>
+                        <a:cs typeface="微软雅黑" panose="020B0503020204020204" charset="-122"/>
+                      </a:endParaRPr>
                     </a:p>
                   </a:txBody>
                   <a:tcPr marL="133350" marR="133350" marT="95250" marB="95250" anchor="ctr">
@@ -2877,12 +2550,20 @@
                           <a:solidFill>
                             <a:srgbClr val="152C43"/>
                           </a:solidFill>
-                          <a:latin typeface="Microsoft YaHei"/>
-                          <a:ea typeface="Microsoft YaHei"/>
-                          <a:cs typeface="Microsoft YaHei"/>
+                          <a:latin typeface="微软雅黑" panose="020B0503020204020204" charset="-122"/>
+                          <a:ea typeface="微软雅黑" panose="020B0503020204020204" charset="-122"/>
+                          <a:cs typeface="微软雅黑" panose="020B0503020204020204" charset="-122"/>
                         </a:rPr>
                         <a:t>R²</a:t>
                       </a:r>
+                      <a:endParaRPr sz="1875" b="1">
+                        <a:solidFill>
+                          <a:srgbClr val="152C43"/>
+                        </a:solidFill>
+                        <a:latin typeface="微软雅黑" panose="020B0503020204020204" charset="-122"/>
+                        <a:ea typeface="微软雅黑" panose="020B0503020204020204" charset="-122"/>
+                        <a:cs typeface="微软雅黑" panose="020B0503020204020204" charset="-122"/>
+                      </a:endParaRPr>
                     </a:p>
                   </a:txBody>
                   <a:tcPr marL="133350" marR="133350" marT="95250" marB="95250" anchor="ctr">
@@ -2903,12 +2584,20 @@
                           <a:solidFill>
                             <a:srgbClr val="152C43"/>
                           </a:solidFill>
-                          <a:latin typeface="Microsoft YaHei"/>
-                          <a:ea typeface="Microsoft YaHei"/>
-                          <a:cs typeface="Microsoft YaHei"/>
+                          <a:latin typeface="微软雅黑" panose="020B0503020204020204" charset="-122"/>
+                          <a:ea typeface="微软雅黑" panose="020B0503020204020204" charset="-122"/>
+                          <a:cs typeface="微软雅黑" panose="020B0503020204020204" charset="-122"/>
                         </a:rPr>
                         <a:t>DLPRB</a:t>
                       </a:r>
+                      <a:endParaRPr sz="1875">
+                        <a:solidFill>
+                          <a:srgbClr val="152C43"/>
+                        </a:solidFill>
+                        <a:latin typeface="微软雅黑" panose="020B0503020204020204" charset="-122"/>
+                        <a:ea typeface="微软雅黑" panose="020B0503020204020204" charset="-122"/>
+                        <a:cs typeface="微软雅黑" panose="020B0503020204020204" charset="-122"/>
+                      </a:endParaRPr>
                     </a:p>
                   </a:txBody>
                   <a:tcPr marL="133350" marR="133350" marT="95250" marB="95250" anchor="ctr">
@@ -2927,12 +2616,20 @@
                           <a:solidFill>
                             <a:srgbClr val="152C43"/>
                           </a:solidFill>
-                          <a:latin typeface="Microsoft YaHei"/>
-                          <a:ea typeface="Microsoft YaHei"/>
-                          <a:cs typeface="Microsoft YaHei"/>
+                          <a:latin typeface="微软雅黑" panose="020B0503020204020204" charset="-122"/>
+                          <a:ea typeface="微软雅黑" panose="020B0503020204020204" charset="-122"/>
+                          <a:cs typeface="微软雅黑" panose="020B0503020204020204" charset="-122"/>
                         </a:rPr>
                         <a:t>0.0444</a:t>
                       </a:r>
+                      <a:endParaRPr sz="1875">
+                        <a:solidFill>
+                          <a:srgbClr val="152C43"/>
+                        </a:solidFill>
+                        <a:latin typeface="微软雅黑" panose="020B0503020204020204" charset="-122"/>
+                        <a:ea typeface="微软雅黑" panose="020B0503020204020204" charset="-122"/>
+                        <a:cs typeface="微软雅黑" panose="020B0503020204020204" charset="-122"/>
+                      </a:endParaRPr>
                     </a:p>
                   </a:txBody>
                   <a:tcPr marL="133350" marR="133350" marT="95250" marB="95250" anchor="ctr">
@@ -2951,12 +2648,20 @@
                           <a:solidFill>
                             <a:srgbClr val="152C43"/>
                           </a:solidFill>
-                          <a:latin typeface="Microsoft YaHei"/>
-                          <a:ea typeface="Microsoft YaHei"/>
-                          <a:cs typeface="Microsoft YaHei"/>
+                          <a:latin typeface="微软雅黑" panose="020B0503020204020204" charset="-122"/>
+                          <a:ea typeface="微软雅黑" panose="020B0503020204020204" charset="-122"/>
+                          <a:cs typeface="微软雅黑" panose="020B0503020204020204" charset="-122"/>
                         </a:rPr>
                         <a:t>0.0590</a:t>
                       </a:r>
+                      <a:endParaRPr sz="1875">
+                        <a:solidFill>
+                          <a:srgbClr val="152C43"/>
+                        </a:solidFill>
+                        <a:latin typeface="微软雅黑" panose="020B0503020204020204" charset="-122"/>
+                        <a:ea typeface="微软雅黑" panose="020B0503020204020204" charset="-122"/>
+                        <a:cs typeface="微软雅黑" panose="020B0503020204020204" charset="-122"/>
+                      </a:endParaRPr>
                     </a:p>
                   </a:txBody>
                   <a:tcPr marL="133350" marR="133350" marT="95250" marB="95250" anchor="ctr">
@@ -2975,12 +2680,20 @@
                           <a:solidFill>
                             <a:srgbClr val="152C43"/>
                           </a:solidFill>
-                          <a:latin typeface="Microsoft YaHei"/>
-                          <a:ea typeface="Microsoft YaHei"/>
-                          <a:cs typeface="Microsoft YaHei"/>
+                          <a:latin typeface="微软雅黑" panose="020B0503020204020204" charset="-122"/>
+                          <a:ea typeface="微软雅黑" panose="020B0503020204020204" charset="-122"/>
+                          <a:cs typeface="微软雅黑" panose="020B0503020204020204" charset="-122"/>
                         </a:rPr>
                         <a:t>0.9581</a:t>
                       </a:r>
+                      <a:endParaRPr sz="1875">
+                        <a:solidFill>
+                          <a:srgbClr val="152C43"/>
+                        </a:solidFill>
+                        <a:latin typeface="微软雅黑" panose="020B0503020204020204" charset="-122"/>
+                        <a:ea typeface="微软雅黑" panose="020B0503020204020204" charset="-122"/>
+                        <a:cs typeface="微软雅黑" panose="020B0503020204020204" charset="-122"/>
+                      </a:endParaRPr>
                     </a:p>
                   </a:txBody>
                   <a:tcPr marL="133350" marR="133350" marT="95250" marB="95250" anchor="ctr">
@@ -3001,12 +2714,20 @@
                           <a:solidFill>
                             <a:srgbClr val="152C43"/>
                           </a:solidFill>
-                          <a:latin typeface="Microsoft YaHei"/>
-                          <a:ea typeface="Microsoft YaHei"/>
-                          <a:cs typeface="Microsoft YaHei"/>
+                          <a:latin typeface="微软雅黑" panose="020B0503020204020204" charset="-122"/>
+                          <a:ea typeface="微软雅黑" panose="020B0503020204020204" charset="-122"/>
+                          <a:cs typeface="微软雅黑" panose="020B0503020204020204" charset="-122"/>
                         </a:rPr>
                         <a:t>DLThpVol</a:t>
                       </a:r>
+                      <a:endParaRPr sz="1875">
+                        <a:solidFill>
+                          <a:srgbClr val="152C43"/>
+                        </a:solidFill>
+                        <a:latin typeface="微软雅黑" panose="020B0503020204020204" charset="-122"/>
+                        <a:ea typeface="微软雅黑" panose="020B0503020204020204" charset="-122"/>
+                        <a:cs typeface="微软雅黑" panose="020B0503020204020204" charset="-122"/>
+                      </a:endParaRPr>
                     </a:p>
                   </a:txBody>
                   <a:tcPr marL="133350" marR="133350" marT="95250" marB="95250" anchor="ctr">
@@ -3025,12 +2746,20 @@
                           <a:solidFill>
                             <a:srgbClr val="152C43"/>
                           </a:solidFill>
-                          <a:latin typeface="Microsoft YaHei"/>
-                          <a:ea typeface="Microsoft YaHei"/>
-                          <a:cs typeface="Microsoft YaHei"/>
+                          <a:latin typeface="微软雅黑" panose="020B0503020204020204" charset="-122"/>
+                          <a:ea typeface="微软雅黑" panose="020B0503020204020204" charset="-122"/>
+                          <a:cs typeface="微软雅黑" panose="020B0503020204020204" charset="-122"/>
                         </a:rPr>
                         <a:t>0.0322</a:t>
                       </a:r>
+                      <a:endParaRPr sz="1875">
+                        <a:solidFill>
+                          <a:srgbClr val="152C43"/>
+                        </a:solidFill>
+                        <a:latin typeface="微软雅黑" panose="020B0503020204020204" charset="-122"/>
+                        <a:ea typeface="微软雅黑" panose="020B0503020204020204" charset="-122"/>
+                        <a:cs typeface="微软雅黑" panose="020B0503020204020204" charset="-122"/>
+                      </a:endParaRPr>
                     </a:p>
                   </a:txBody>
                   <a:tcPr marL="133350" marR="133350" marT="95250" marB="95250" anchor="ctr">
@@ -3049,12 +2778,20 @@
                           <a:solidFill>
                             <a:srgbClr val="152C43"/>
                           </a:solidFill>
-                          <a:latin typeface="Microsoft YaHei"/>
-                          <a:ea typeface="Microsoft YaHei"/>
-                          <a:cs typeface="Microsoft YaHei"/>
+                          <a:latin typeface="微软雅黑" panose="020B0503020204020204" charset="-122"/>
+                          <a:ea typeface="微软雅黑" panose="020B0503020204020204" charset="-122"/>
+                          <a:cs typeface="微软雅黑" panose="020B0503020204020204" charset="-122"/>
                         </a:rPr>
                         <a:t>0.0412</a:t>
                       </a:r>
+                      <a:endParaRPr sz="1875">
+                        <a:solidFill>
+                          <a:srgbClr val="152C43"/>
+                        </a:solidFill>
+                        <a:latin typeface="微软雅黑" panose="020B0503020204020204" charset="-122"/>
+                        <a:ea typeface="微软雅黑" panose="020B0503020204020204" charset="-122"/>
+                        <a:cs typeface="微软雅黑" panose="020B0503020204020204" charset="-122"/>
+                      </a:endParaRPr>
                     </a:p>
                   </a:txBody>
                   <a:tcPr marL="133350" marR="133350" marT="95250" marB="95250" anchor="ctr">
@@ -3073,12 +2810,20 @@
                           <a:solidFill>
                             <a:srgbClr val="152C43"/>
                           </a:solidFill>
-                          <a:latin typeface="Microsoft YaHei"/>
-                          <a:ea typeface="Microsoft YaHei"/>
-                          <a:cs typeface="Microsoft YaHei"/>
+                          <a:latin typeface="微软雅黑" panose="020B0503020204020204" charset="-122"/>
+                          <a:ea typeface="微软雅黑" panose="020B0503020204020204" charset="-122"/>
+                          <a:cs typeface="微软雅黑" panose="020B0503020204020204" charset="-122"/>
                         </a:rPr>
                         <a:t>0.9524</a:t>
                       </a:r>
+                      <a:endParaRPr sz="1875">
+                        <a:solidFill>
+                          <a:srgbClr val="152C43"/>
+                        </a:solidFill>
+                        <a:latin typeface="微软雅黑" panose="020B0503020204020204" charset="-122"/>
+                        <a:ea typeface="微软雅黑" panose="020B0503020204020204" charset="-122"/>
+                        <a:cs typeface="微软雅黑" panose="020B0503020204020204" charset="-122"/>
+                      </a:endParaRPr>
                     </a:p>
                   </a:txBody>
                   <a:tcPr marL="133350" marR="133350" marT="95250" marB="95250" anchor="ctr">
@@ -3099,12 +2844,20 @@
                           <a:solidFill>
                             <a:srgbClr val="152C43"/>
                           </a:solidFill>
-                          <a:latin typeface="Microsoft YaHei"/>
-                          <a:ea typeface="Microsoft YaHei"/>
-                          <a:cs typeface="Microsoft YaHei"/>
+                          <a:latin typeface="微软雅黑" panose="020B0503020204020204" charset="-122"/>
+                          <a:ea typeface="微软雅黑" panose="020B0503020204020204" charset="-122"/>
+                          <a:cs typeface="微软雅黑" panose="020B0503020204020204" charset="-122"/>
                         </a:rPr>
                         <a:t>DLThpTime</a:t>
                       </a:r>
+                      <a:endParaRPr sz="1875">
+                        <a:solidFill>
+                          <a:srgbClr val="152C43"/>
+                        </a:solidFill>
+                        <a:latin typeface="微软雅黑" panose="020B0503020204020204" charset="-122"/>
+                        <a:ea typeface="微软雅黑" panose="020B0503020204020204" charset="-122"/>
+                        <a:cs typeface="微软雅黑" panose="020B0503020204020204" charset="-122"/>
+                      </a:endParaRPr>
                     </a:p>
                   </a:txBody>
                   <a:tcPr marL="133350" marR="133350" marT="95250" marB="95250" anchor="ctr">
@@ -3123,12 +2876,20 @@
                           <a:solidFill>
                             <a:srgbClr val="152C43"/>
                           </a:solidFill>
-                          <a:latin typeface="Microsoft YaHei"/>
-                          <a:ea typeface="Microsoft YaHei"/>
-                          <a:cs typeface="Microsoft YaHei"/>
+                          <a:latin typeface="微软雅黑" panose="020B0503020204020204" charset="-122"/>
+                          <a:ea typeface="微软雅黑" panose="020B0503020204020204" charset="-122"/>
+                          <a:cs typeface="微软雅黑" panose="020B0503020204020204" charset="-122"/>
                         </a:rPr>
                         <a:t>0.0368</a:t>
                       </a:r>
+                      <a:endParaRPr sz="1875">
+                        <a:solidFill>
+                          <a:srgbClr val="152C43"/>
+                        </a:solidFill>
+                        <a:latin typeface="微软雅黑" panose="020B0503020204020204" charset="-122"/>
+                        <a:ea typeface="微软雅黑" panose="020B0503020204020204" charset="-122"/>
+                        <a:cs typeface="微软雅黑" panose="020B0503020204020204" charset="-122"/>
+                      </a:endParaRPr>
                     </a:p>
                   </a:txBody>
                   <a:tcPr marL="133350" marR="133350" marT="95250" marB="95250" anchor="ctr">
@@ -3147,12 +2908,20 @@
                           <a:solidFill>
                             <a:srgbClr val="152C43"/>
                           </a:solidFill>
-                          <a:latin typeface="Microsoft YaHei"/>
-                          <a:ea typeface="Microsoft YaHei"/>
-                          <a:cs typeface="Microsoft YaHei"/>
+                          <a:latin typeface="微软雅黑" panose="020B0503020204020204" charset="-122"/>
+                          <a:ea typeface="微软雅黑" panose="020B0503020204020204" charset="-122"/>
+                          <a:cs typeface="微软雅黑" panose="020B0503020204020204" charset="-122"/>
                         </a:rPr>
                         <a:t>0.0470</a:t>
                       </a:r>
+                      <a:endParaRPr sz="1875">
+                        <a:solidFill>
+                          <a:srgbClr val="152C43"/>
+                        </a:solidFill>
+                        <a:latin typeface="微软雅黑" panose="020B0503020204020204" charset="-122"/>
+                        <a:ea typeface="微软雅黑" panose="020B0503020204020204" charset="-122"/>
+                        <a:cs typeface="微软雅黑" panose="020B0503020204020204" charset="-122"/>
+                      </a:endParaRPr>
                     </a:p>
                   </a:txBody>
                   <a:tcPr marL="133350" marR="133350" marT="95250" marB="95250" anchor="ctr">
@@ -3171,12 +2940,20 @@
                           <a:solidFill>
                             <a:srgbClr val="152C43"/>
                           </a:solidFill>
-                          <a:latin typeface="Microsoft YaHei"/>
-                          <a:ea typeface="Microsoft YaHei"/>
-                          <a:cs typeface="Microsoft YaHei"/>
+                          <a:latin typeface="微软雅黑" panose="020B0503020204020204" charset="-122"/>
+                          <a:ea typeface="微软雅黑" panose="020B0503020204020204" charset="-122"/>
+                          <a:cs typeface="微软雅黑" panose="020B0503020204020204" charset="-122"/>
                         </a:rPr>
                         <a:t>0.9673</a:t>
                       </a:r>
+                      <a:endParaRPr sz="1875">
+                        <a:solidFill>
+                          <a:srgbClr val="152C43"/>
+                        </a:solidFill>
+                        <a:latin typeface="微软雅黑" panose="020B0503020204020204" charset="-122"/>
+                        <a:ea typeface="微软雅黑" panose="020B0503020204020204" charset="-122"/>
+                        <a:cs typeface="微软雅黑" panose="020B0503020204020204" charset="-122"/>
+                      </a:endParaRPr>
                     </a:p>
                   </a:txBody>
                   <a:tcPr marL="133350" marR="133350" marT="95250" marB="95250" anchor="ctr">
@@ -3197,12 +2974,20 @@
                           <a:solidFill>
                             <a:srgbClr val="152C43"/>
                           </a:solidFill>
-                          <a:latin typeface="Microsoft YaHei"/>
-                          <a:ea typeface="Microsoft YaHei"/>
-                          <a:cs typeface="Microsoft YaHei"/>
+                          <a:latin typeface="微软雅黑" panose="020B0503020204020204" charset="-122"/>
+                          <a:ea typeface="微软雅黑" panose="020B0503020204020204" charset="-122"/>
+                          <a:cs typeface="微软雅黑" panose="020B0503020204020204" charset="-122"/>
                         </a:rPr>
                         <a:t>MR_number</a:t>
                       </a:r>
+                      <a:endParaRPr sz="1875">
+                        <a:solidFill>
+                          <a:srgbClr val="152C43"/>
+                        </a:solidFill>
+                        <a:latin typeface="微软雅黑" panose="020B0503020204020204" charset="-122"/>
+                        <a:ea typeface="微软雅黑" panose="020B0503020204020204" charset="-122"/>
+                        <a:cs typeface="微软雅黑" panose="020B0503020204020204" charset="-122"/>
+                      </a:endParaRPr>
                     </a:p>
                   </a:txBody>
                   <a:tcPr marL="133350" marR="133350" marT="95250" marB="95250" anchor="ctr">
@@ -3221,12 +3006,20 @@
                           <a:solidFill>
                             <a:srgbClr val="152C43"/>
                           </a:solidFill>
-                          <a:latin typeface="Microsoft YaHei"/>
-                          <a:ea typeface="Microsoft YaHei"/>
-                          <a:cs typeface="Microsoft YaHei"/>
+                          <a:latin typeface="微软雅黑" panose="020B0503020204020204" charset="-122"/>
+                          <a:ea typeface="微软雅黑" panose="020B0503020204020204" charset="-122"/>
+                          <a:cs typeface="微软雅黑" panose="020B0503020204020204" charset="-122"/>
                         </a:rPr>
                         <a:t>0.0436</a:t>
                       </a:r>
+                      <a:endParaRPr sz="1875">
+                        <a:solidFill>
+                          <a:srgbClr val="152C43"/>
+                        </a:solidFill>
+                        <a:latin typeface="微软雅黑" panose="020B0503020204020204" charset="-122"/>
+                        <a:ea typeface="微软雅黑" panose="020B0503020204020204" charset="-122"/>
+                        <a:cs typeface="微软雅黑" panose="020B0503020204020204" charset="-122"/>
+                      </a:endParaRPr>
                     </a:p>
                   </a:txBody>
                   <a:tcPr marL="133350" marR="133350" marT="95250" marB="95250" anchor="ctr">
@@ -3245,12 +3038,20 @@
                           <a:solidFill>
                             <a:srgbClr val="152C43"/>
                           </a:solidFill>
-                          <a:latin typeface="Microsoft YaHei"/>
-                          <a:ea typeface="Microsoft YaHei"/>
-                          <a:cs typeface="Microsoft YaHei"/>
+                          <a:latin typeface="微软雅黑" panose="020B0503020204020204" charset="-122"/>
+                          <a:ea typeface="微软雅黑" panose="020B0503020204020204" charset="-122"/>
+                          <a:cs typeface="微软雅黑" panose="020B0503020204020204" charset="-122"/>
                         </a:rPr>
                         <a:t>0.0564</a:t>
                       </a:r>
+                      <a:endParaRPr sz="1875">
+                        <a:solidFill>
+                          <a:srgbClr val="152C43"/>
+                        </a:solidFill>
+                        <a:latin typeface="微软雅黑" panose="020B0503020204020204" charset="-122"/>
+                        <a:ea typeface="微软雅黑" panose="020B0503020204020204" charset="-122"/>
+                        <a:cs typeface="微软雅黑" panose="020B0503020204020204" charset="-122"/>
+                      </a:endParaRPr>
                     </a:p>
                   </a:txBody>
                   <a:tcPr marL="133350" marR="133350" marT="95250" marB="95250" anchor="ctr">
@@ -3269,12 +3070,20 @@
                           <a:solidFill>
                             <a:srgbClr val="152C43"/>
                           </a:solidFill>
-                          <a:latin typeface="Microsoft YaHei"/>
-                          <a:ea typeface="Microsoft YaHei"/>
-                          <a:cs typeface="Microsoft YaHei"/>
+                          <a:latin typeface="微软雅黑" panose="020B0503020204020204" charset="-122"/>
+                          <a:ea typeface="微软雅黑" panose="020B0503020204020204" charset="-122"/>
+                          <a:cs typeface="微软雅黑" panose="020B0503020204020204" charset="-122"/>
                         </a:rPr>
                         <a:t>0.9750</a:t>
                       </a:r>
+                      <a:endParaRPr sz="1875">
+                        <a:solidFill>
+                          <a:srgbClr val="152C43"/>
+                        </a:solidFill>
+                        <a:latin typeface="微软雅黑" panose="020B0503020204020204" charset="-122"/>
+                        <a:ea typeface="微软雅黑" panose="020B0503020204020204" charset="-122"/>
+                        <a:cs typeface="微软雅黑" panose="020B0503020204020204" charset="-122"/>
+                      </a:endParaRPr>
                     </a:p>
                   </a:txBody>
                   <a:tcPr marL="133350" marR="133350" marT="95250" marB="95250" anchor="ctr">
@@ -3290,45 +3099,39 @@
       </p:graphicFrame>
       <p:sp>
         <p:nvSpPr>
-          <p:cNvPr id="3" name="">
-            <a:extLst xmlns:a="http://schemas.openxmlformats.org/drawingml/2006/main">
-              <a:ext uri="{FF2B5EF4-FFF2-40B4-BE49-F238E27FC236}">
-                <a16:creationId xmlns:a16="http://schemas.microsoft.com/office/drawing/2014/main" id="{A1D714A7-7296-4624-B918-424EAE235726}"/>
-              </a:ext>
-            </a:extLst>
-          </p:cNvPr>
+          <p:cNvPr id="3" name="矩形 2"/>
           <p:cNvSpPr>
-            <a:spLocks xmlns:a="http://schemas.openxmlformats.org/drawingml/2006/main" noGrp="1"/>
+            <a:spLocks noGrp="1"/>
           </p:cNvSpPr>
           <p:nvPr/>
         </p:nvSpPr>
         <p:spPr>
-          <a:xfrm xmlns:a="http://schemas.openxmlformats.org/drawingml/2006/main">
+          <a:xfrm>
             <a:off x="628650" y="4600575"/>
             <a:ext cx="10858500" cy="685800"/>
           </a:xfrm>
-          <a:prstGeom xmlns:a="http://schemas.openxmlformats.org/drawingml/2006/main" prst="rect">
+          <a:prstGeom prst="rect">
             <a:avLst/>
           </a:prstGeom>
-          <a:noFill xmlns:a="http://schemas.openxmlformats.org/drawingml/2006/main"/>
-          <a:ln xmlns:a="http://schemas.openxmlformats.org/drawingml/2006/main" w="0">
+          <a:noFill/>
+          <a:ln w="0">
             <a:noFill/>
           </a:ln>
         </p:spPr>
         <p:txBody>
-          <a:bodyPr xmlns:a="http://schemas.openxmlformats.org/drawingml/2006/main">
+          <a:bodyPr>
             <a:noAutofit/>
           </a:bodyPr>
-          <a:lstStyle xmlns:a="http://schemas.openxmlformats.org/drawingml/2006/main"/>
-          <a:p xmlns:a="http://schemas.openxmlformats.org/drawingml/2006/main">
+          <a:lstStyle/>
+          <a:p>
             <a:pPr>
               <a:defRPr sz="1950" b="0">
                 <a:solidFill>
                   <a:srgbClr val="152C43"/>
                 </a:solidFill>
-                <a:latin typeface="Microsoft YaHei"/>
-                <a:ea typeface="Microsoft YaHei"/>
-                <a:cs typeface="Microsoft YaHei"/>
+                <a:latin typeface="微软雅黑" panose="020B0503020204020204" charset="-122"/>
+                <a:ea typeface="微软雅黑" panose="020B0503020204020204" charset="-122"/>
+                <a:cs typeface="微软雅黑" panose="020B0503020204020204" charset="-122"/>
               </a:defRPr>
             </a:pPr>
             <a:r>
@@ -3336,90 +3139,40 @@
                 <a:solidFill>
                   <a:srgbClr val="152C43"/>
                 </a:solidFill>
-                <a:latin typeface="Microsoft YaHei"/>
-                <a:ea typeface="Microsoft YaHei"/>
-                <a:cs typeface="Microsoft YaHei"/>
+                <a:latin typeface="微软雅黑" panose="020B0503020204020204" charset="-122"/>
+                <a:ea typeface="微软雅黑" panose="020B0503020204020204" charset="-122"/>
+                <a:cs typeface="微软雅黑" panose="020B0503020204020204" charset="-122"/>
               </a:rPr>
-              <a:t>误差单位为 Z-score；本表使用完整测试集，不是筛选后的子集。</a:t>
+              <a:t>误差单位为 Z-score；本表使用完整测试集。</a:t>
             </a:r>
+            <a:endParaRPr sz="1950" b="0">
+              <a:solidFill>
+                <a:srgbClr val="152C43"/>
+              </a:solidFill>
+              <a:latin typeface="微软雅黑" panose="020B0503020204020204" charset="-122"/>
+              <a:ea typeface="微软雅黑" panose="020B0503020204020204" charset="-122"/>
+              <a:cs typeface="微软雅黑" panose="020B0503020204020204" charset="-122"/>
+            </a:endParaRPr>
           </a:p>
         </p:txBody>
       </p:sp>
-      <p:sp>
-        <p:nvSpPr>
-          <p:cNvPr id="4" name="">
-            <a:extLst xmlns:a="http://schemas.openxmlformats.org/drawingml/2006/main">
-              <a:ext uri="{FF2B5EF4-FFF2-40B4-BE49-F238E27FC236}">
-                <a16:creationId xmlns:a16="http://schemas.microsoft.com/office/drawing/2014/main" id="{C63E48D0-9B37-4615-901D-3692DD4E203B}"/>
-              </a:ext>
-            </a:extLst>
-          </p:cNvPr>
-          <p:cNvSpPr>
-            <a:spLocks xmlns:a="http://schemas.openxmlformats.org/drawingml/2006/main" noGrp="1"/>
-          </p:cNvSpPr>
-          <p:nvPr/>
-        </p:nvSpPr>
-        <p:spPr>
-          <a:xfrm xmlns:a="http://schemas.openxmlformats.org/drawingml/2006/main">
-            <a:off x="628650" y="5543550"/>
-            <a:ext cx="10858500" cy="876300"/>
-          </a:xfrm>
-          <a:prstGeom xmlns:a="http://schemas.openxmlformats.org/drawingml/2006/main" prst="rect">
-            <a:avLst/>
-          </a:prstGeom>
-          <a:noFill xmlns:a="http://schemas.openxmlformats.org/drawingml/2006/main"/>
-          <a:ln xmlns:a="http://schemas.openxmlformats.org/drawingml/2006/main" w="0">
-            <a:noFill/>
-          </a:ln>
-        </p:spPr>
-        <p:txBody>
-          <a:bodyPr xmlns:a="http://schemas.openxmlformats.org/drawingml/2006/main">
-            <a:noAutofit/>
-          </a:bodyPr>
-          <a:lstStyle xmlns:a="http://schemas.openxmlformats.org/drawingml/2006/main"/>
-          <a:p xmlns:a="http://schemas.openxmlformats.org/drawingml/2006/main">
-            <a:pPr>
-              <a:defRPr sz="1875" b="0">
-                <a:solidFill>
-                  <a:srgbClr val="536474"/>
-                </a:solidFill>
-                <a:latin typeface="Microsoft YaHei"/>
-                <a:ea typeface="Microsoft YaHei"/>
-                <a:cs typeface="Microsoft YaHei"/>
-              </a:defRPr>
-            </a:pPr>
-            <a:r>
-              <a:rPr sz="1875" b="0">
-                <a:solidFill>
-                  <a:srgbClr val="536474"/>
-                </a:solidFill>
-                <a:latin typeface="Microsoft YaHei"/>
-                <a:ea typeface="Microsoft YaHei"/>
-                <a:cs typeface="Microsoft YaHei"/>
-              </a:rPr>
-              <a:t>限制：沿用前期全源统计预处理，结果用于复核，不是无泄漏部署基准。</a:t>
-            </a:r>
-          </a:p>
-        </p:txBody>
-      </p:sp>
     </p:spTree>
-    <p:extLst>
-      <p:ext uri="{BB962C8B-B14F-4D97-AF65-F5344CB8AC3E}">
-        <p14:creationId xmlns:p14="http://schemas.microsoft.com/office/powerpoint/2010/main" val="716800451"/>
-      </p:ext>
-    </p:extLst>
   </p:cSld>
+  <p:clrMapOvr>
+    <a:masterClrMapping/>
+  </p:clrMapOvr>
 </p:sld>
 </file>
 
 <file path=ppt/slides/slide5.xml><?xml version="1.0" encoding="utf-8"?>
-<p:sld xmlns:p="http://schemas.openxmlformats.org/presentationml/2006/main">
+<p:sld xmlns:a="http://schemas.openxmlformats.org/drawingml/2006/main" xmlns:r="http://schemas.openxmlformats.org/officeDocument/2006/relationships" xmlns:p="http://schemas.openxmlformats.org/presentationml/2006/main">
   <p:cSld>
     <p:bg>
       <p:bgPr>
-        <a:solidFill xmlns:a="http://schemas.openxmlformats.org/drawingml/2006/main">
+        <a:solidFill>
           <a:srgbClr val="FFFFFF"/>
         </a:solidFill>
+        <a:effectLst/>
       </p:bgPr>
     </p:bg>
     <p:spTree>
@@ -3428,50 +3181,42 @@
         <p:cNvGrpSpPr/>
         <p:nvPr/>
       </p:nvGrpSpPr>
-      <p:grpSpPr>
-        <a:xfrm xmlns:a="http://schemas.openxmlformats.org/drawingml/2006/main"/>
-      </p:grpSpPr>
-      <p:sp>
-        <p:nvSpPr>
-          <p:cNvPr id="3" name="">
-            <a:extLst xmlns:a="http://schemas.openxmlformats.org/drawingml/2006/main">
-              <a:ext uri="{FF2B5EF4-FFF2-40B4-BE49-F238E27FC236}">
-                <a16:creationId xmlns:a16="http://schemas.microsoft.com/office/drawing/2014/main" id="{04358B16-E2E3-4E8E-B5E6-5DFDE6C7609F}"/>
-              </a:ext>
-            </a:extLst>
-          </p:cNvPr>
+      <p:grpSpPr/>
+      <p:sp>
+        <p:nvSpPr>
+          <p:cNvPr id="3" name="矩形 2"/>
           <p:cNvSpPr>
-            <a:spLocks xmlns:a="http://schemas.openxmlformats.org/drawingml/2006/main" noGrp="1"/>
+            <a:spLocks noGrp="1"/>
           </p:cNvSpPr>
           <p:nvPr/>
         </p:nvSpPr>
         <p:spPr>
-          <a:xfrm xmlns:a="http://schemas.openxmlformats.org/drawingml/2006/main">
+          <a:xfrm>
             <a:off x="609600" y="381000"/>
             <a:ext cx="10953750" cy="762000"/>
           </a:xfrm>
-          <a:prstGeom xmlns:a="http://schemas.openxmlformats.org/drawingml/2006/main" prst="rect">
+          <a:prstGeom prst="rect">
             <a:avLst/>
           </a:prstGeom>
-          <a:noFill xmlns:a="http://schemas.openxmlformats.org/drawingml/2006/main"/>
-          <a:ln xmlns:a="http://schemas.openxmlformats.org/drawingml/2006/main" w="0">
+          <a:noFill/>
+          <a:ln w="0">
             <a:noFill/>
           </a:ln>
         </p:spPr>
         <p:txBody>
-          <a:bodyPr xmlns:a="http://schemas.openxmlformats.org/drawingml/2006/main">
+          <a:bodyPr>
             <a:noAutofit/>
           </a:bodyPr>
-          <a:lstStyle xmlns:a="http://schemas.openxmlformats.org/drawingml/2006/main"/>
-          <a:p xmlns:a="http://schemas.openxmlformats.org/drawingml/2006/main">
+          <a:lstStyle/>
+          <a:p>
             <a:pPr>
               <a:defRPr sz="2850" b="1">
                 <a:solidFill>
                   <a:srgbClr val="152C43"/>
                 </a:solidFill>
-                <a:latin typeface="Microsoft YaHei"/>
-                <a:ea typeface="Microsoft YaHei"/>
-                <a:cs typeface="Microsoft YaHei"/>
+                <a:latin typeface="微软雅黑" panose="020B0503020204020204" charset="-122"/>
+                <a:ea typeface="微软雅黑" panose="020B0503020204020204" charset="-122"/>
+                <a:cs typeface="微软雅黑" panose="020B0503020204020204" charset="-122"/>
               </a:defRPr>
             </a:pPr>
             <a:r>
@@ -3479,55 +3224,64 @@
                 <a:solidFill>
                   <a:srgbClr val="152C43"/>
                 </a:solidFill>
-                <a:latin typeface="Microsoft YaHei"/>
-                <a:ea typeface="Microsoft YaHei"/>
-                <a:cs typeface="Microsoft YaHei"/>
+                <a:latin typeface="微软雅黑" panose="020B0503020204020204" charset="-122"/>
+                <a:ea typeface="微软雅黑" panose="020B0503020204020204" charset="-122"/>
+                <a:cs typeface="微软雅黑" panose="020B0503020204020204" charset="-122"/>
               </a:rPr>
               <a:t>演示一  修改历史输入并比较预测</a:t>
             </a:r>
+            <a:endParaRPr sz="2850" b="1">
+              <a:solidFill>
+                <a:srgbClr val="152C43"/>
+              </a:solidFill>
+              <a:latin typeface="微软雅黑" panose="020B0503020204020204" charset="-122"/>
+              <a:ea typeface="微软雅黑" panose="020B0503020204020204" charset="-122"/>
+              <a:cs typeface="微软雅黑" panose="020B0503020204020204" charset="-122"/>
+            </a:endParaRPr>
           </a:p>
         </p:txBody>
       </p:sp>
       <p:pic>
         <p:nvPicPr>
-          <p:cNvPr id="4" name=""/>
+          <p:cNvPr id="4" name="图片 3"/>
           <p:cNvPicPr>
-            <a:picLocks xmlns:a="http://schemas.openxmlformats.org/drawingml/2006/main" noChangeAspect="1"/>
+            <a:picLocks noChangeAspect="1"/>
           </p:cNvPicPr>
           <p:nvPr/>
         </p:nvPicPr>
         <p:blipFill>
-          <a:blip xmlns:r="http://schemas.openxmlformats.org/officeDocument/2006/relationships" xmlns:a="http://schemas.openxmlformats.org/drawingml/2006/main" r:embed="R9ea868baf3034b84"/>
-          <a:stretch xmlns:a="http://schemas.openxmlformats.org/drawingml/2006/main"/>
+          <a:blip r:embed="rId1"/>
+          <a:stretch>
+            <a:fillRect/>
+          </a:stretch>
         </p:blipFill>
         <p:spPr>
-          <a:xfrm xmlns:a="http://schemas.openxmlformats.org/drawingml/2006/main">
+          <a:xfrm>
             <a:off x="1314450" y="1096566"/>
             <a:ext cx="9563100" cy="5379244"/>
           </a:xfrm>
-          <a:prstGeom xmlns:a="http://schemas.openxmlformats.org/drawingml/2006/main" prst="rect">
+          <a:prstGeom prst="rect">
             <a:avLst/>
           </a:prstGeom>
         </p:spPr>
       </p:pic>
     </p:spTree>
-    <p:extLst>
-      <p:ext uri="{BB962C8B-B14F-4D97-AF65-F5344CB8AC3E}">
-        <p14:creationId xmlns:p14="http://schemas.microsoft.com/office/powerpoint/2010/main" val="1854837114"/>
-      </p:ext>
-    </p:extLst>
   </p:cSld>
+  <p:clrMapOvr>
+    <a:masterClrMapping/>
+  </p:clrMapOvr>
 </p:sld>
 </file>
 
 <file path=ppt/slides/slide6.xml><?xml version="1.0" encoding="utf-8"?>
-<p:sld xmlns:p="http://schemas.openxmlformats.org/presentationml/2006/main">
+<p:sld xmlns:a="http://schemas.openxmlformats.org/drawingml/2006/main" xmlns:r="http://schemas.openxmlformats.org/officeDocument/2006/relationships" xmlns:p="http://schemas.openxmlformats.org/presentationml/2006/main">
   <p:cSld>
     <p:bg>
       <p:bgPr>
-        <a:solidFill xmlns:a="http://schemas.openxmlformats.org/drawingml/2006/main">
+        <a:solidFill>
           <a:srgbClr val="FFFFFF"/>
         </a:solidFill>
+        <a:effectLst/>
       </p:bgPr>
     </p:bg>
     <p:spTree>
@@ -3536,50 +3290,42 @@
         <p:cNvGrpSpPr/>
         <p:nvPr/>
       </p:nvGrpSpPr>
-      <p:grpSpPr>
-        <a:xfrm xmlns:a="http://schemas.openxmlformats.org/drawingml/2006/main"/>
-      </p:grpSpPr>
-      <p:sp>
-        <p:nvSpPr>
-          <p:cNvPr id="3" name="">
-            <a:extLst xmlns:a="http://schemas.openxmlformats.org/drawingml/2006/main">
-              <a:ext uri="{FF2B5EF4-FFF2-40B4-BE49-F238E27FC236}">
-                <a16:creationId xmlns:a16="http://schemas.microsoft.com/office/drawing/2014/main" id="{7CA62735-930B-4E2D-9DCB-0964344267F8}"/>
-              </a:ext>
-            </a:extLst>
-          </p:cNvPr>
+      <p:grpSpPr/>
+      <p:sp>
+        <p:nvSpPr>
+          <p:cNvPr id="3" name="矩形 2"/>
           <p:cNvSpPr>
-            <a:spLocks xmlns:a="http://schemas.openxmlformats.org/drawingml/2006/main" noGrp="1"/>
+            <a:spLocks noGrp="1"/>
           </p:cNvSpPr>
           <p:nvPr/>
         </p:nvSpPr>
         <p:spPr>
-          <a:xfrm xmlns:a="http://schemas.openxmlformats.org/drawingml/2006/main">
+          <a:xfrm>
             <a:off x="609600" y="381000"/>
             <a:ext cx="10953750" cy="762000"/>
           </a:xfrm>
-          <a:prstGeom xmlns:a="http://schemas.openxmlformats.org/drawingml/2006/main" prst="rect">
+          <a:prstGeom prst="rect">
             <a:avLst/>
           </a:prstGeom>
-          <a:noFill xmlns:a="http://schemas.openxmlformats.org/drawingml/2006/main"/>
-          <a:ln xmlns:a="http://schemas.openxmlformats.org/drawingml/2006/main" w="0">
+          <a:noFill/>
+          <a:ln w="0">
             <a:noFill/>
           </a:ln>
         </p:spPr>
         <p:txBody>
-          <a:bodyPr xmlns:a="http://schemas.openxmlformats.org/drawingml/2006/main">
+          <a:bodyPr>
             <a:noAutofit/>
           </a:bodyPr>
-          <a:lstStyle xmlns:a="http://schemas.openxmlformats.org/drawingml/2006/main"/>
-          <a:p xmlns:a="http://schemas.openxmlformats.org/drawingml/2006/main">
+          <a:lstStyle/>
+          <a:p>
             <a:pPr>
               <a:defRPr sz="2850" b="1">
                 <a:solidFill>
                   <a:srgbClr val="152C43"/>
                 </a:solidFill>
-                <a:latin typeface="Microsoft YaHei"/>
-                <a:ea typeface="Microsoft YaHei"/>
-                <a:cs typeface="Microsoft YaHei"/>
+                <a:latin typeface="微软雅黑" panose="020B0503020204020204" charset="-122"/>
+                <a:ea typeface="微软雅黑" panose="020B0503020204020204" charset="-122"/>
+                <a:cs typeface="微软雅黑" panose="020B0503020204020204" charset="-122"/>
               </a:defRPr>
             </a:pPr>
             <a:r>
@@ -3587,55 +3333,64 @@
                 <a:solidFill>
                   <a:srgbClr val="152C43"/>
                 </a:solidFill>
-                <a:latin typeface="Microsoft YaHei"/>
-                <a:ea typeface="Microsoft YaHei"/>
-                <a:cs typeface="Microsoft YaHei"/>
+                <a:latin typeface="微软雅黑" panose="020B0503020204020204" charset="-122"/>
+                <a:ea typeface="微软雅黑" panose="020B0503020204020204" charset="-122"/>
+                <a:cs typeface="微软雅黑" panose="020B0503020204020204" charset="-122"/>
               </a:rPr>
               <a:t>演示二  修改观测并查看异常判定</a:t>
             </a:r>
+            <a:endParaRPr sz="2850" b="1">
+              <a:solidFill>
+                <a:srgbClr val="152C43"/>
+              </a:solidFill>
+              <a:latin typeface="微软雅黑" panose="020B0503020204020204" charset="-122"/>
+              <a:ea typeface="微软雅黑" panose="020B0503020204020204" charset="-122"/>
+              <a:cs typeface="微软雅黑" panose="020B0503020204020204" charset="-122"/>
+            </a:endParaRPr>
           </a:p>
         </p:txBody>
       </p:sp>
       <p:pic>
         <p:nvPicPr>
-          <p:cNvPr id="4" name=""/>
+          <p:cNvPr id="4" name="图片 3"/>
           <p:cNvPicPr>
-            <a:picLocks xmlns:a="http://schemas.openxmlformats.org/drawingml/2006/main" noChangeAspect="1"/>
+            <a:picLocks noChangeAspect="1"/>
           </p:cNvPicPr>
           <p:nvPr/>
         </p:nvPicPr>
         <p:blipFill>
-          <a:blip xmlns:r="http://schemas.openxmlformats.org/officeDocument/2006/relationships" xmlns:a="http://schemas.openxmlformats.org/drawingml/2006/main" r:embed="R904ddac074e845ba"/>
-          <a:stretch xmlns:a="http://schemas.openxmlformats.org/drawingml/2006/main"/>
+          <a:blip r:embed="rId1"/>
+          <a:stretch>
+            <a:fillRect/>
+          </a:stretch>
         </p:blipFill>
         <p:spPr>
-          <a:xfrm xmlns:a="http://schemas.openxmlformats.org/drawingml/2006/main">
+          <a:xfrm>
             <a:off x="1314450" y="1096566"/>
             <a:ext cx="9563100" cy="5379244"/>
           </a:xfrm>
-          <a:prstGeom xmlns:a="http://schemas.openxmlformats.org/drawingml/2006/main" prst="rect">
+          <a:prstGeom prst="rect">
             <a:avLst/>
           </a:prstGeom>
         </p:spPr>
       </p:pic>
     </p:spTree>
-    <p:extLst>
-      <p:ext uri="{BB962C8B-B14F-4D97-AF65-F5344CB8AC3E}">
-        <p14:creationId xmlns:p14="http://schemas.microsoft.com/office/powerpoint/2010/main" val="1096323594"/>
-      </p:ext>
-    </p:extLst>
   </p:cSld>
+  <p:clrMapOvr>
+    <a:masterClrMapping/>
+  </p:clrMapOvr>
 </p:sld>
 </file>
 
 <file path=ppt/slides/slide7.xml><?xml version="1.0" encoding="utf-8"?>
-<p:sld xmlns:p="http://schemas.openxmlformats.org/presentationml/2006/main">
+<p:sld xmlns:a="http://schemas.openxmlformats.org/drawingml/2006/main" xmlns:r="http://schemas.openxmlformats.org/officeDocument/2006/relationships" xmlns:p="http://schemas.openxmlformats.org/presentationml/2006/main">
   <p:cSld>
     <p:bg>
       <p:bgPr>
-        <a:solidFill xmlns:a="http://schemas.openxmlformats.org/drawingml/2006/main">
+        <a:solidFill>
           <a:srgbClr val="FFFFFF"/>
         </a:solidFill>
+        <a:effectLst/>
       </p:bgPr>
     </p:bg>
     <p:spTree>
@@ -3644,50 +3399,42 @@
         <p:cNvGrpSpPr/>
         <p:nvPr/>
       </p:nvGrpSpPr>
-      <p:grpSpPr>
-        <a:xfrm xmlns:a="http://schemas.openxmlformats.org/drawingml/2006/main"/>
-      </p:grpSpPr>
-      <p:sp>
-        <p:nvSpPr>
-          <p:cNvPr id="6" name="">
-            <a:extLst xmlns:a="http://schemas.openxmlformats.org/drawingml/2006/main">
-              <a:ext uri="{FF2B5EF4-FFF2-40B4-BE49-F238E27FC236}">
-                <a16:creationId xmlns:a16="http://schemas.microsoft.com/office/drawing/2014/main" id="{B60F7643-EAB7-4FD7-A974-1CA702A5ECD6}"/>
-              </a:ext>
-            </a:extLst>
-          </p:cNvPr>
+      <p:grpSpPr/>
+      <p:sp>
+        <p:nvSpPr>
+          <p:cNvPr id="6" name="矩形 5"/>
           <p:cNvSpPr>
-            <a:spLocks xmlns:a="http://schemas.openxmlformats.org/drawingml/2006/main" noGrp="1"/>
+            <a:spLocks noGrp="1"/>
           </p:cNvSpPr>
           <p:nvPr/>
         </p:nvSpPr>
         <p:spPr>
-          <a:xfrm xmlns:a="http://schemas.openxmlformats.org/drawingml/2006/main">
+          <a:xfrm>
             <a:off x="609600" y="381000"/>
             <a:ext cx="10953750" cy="762000"/>
           </a:xfrm>
-          <a:prstGeom xmlns:a="http://schemas.openxmlformats.org/drawingml/2006/main" prst="rect">
+          <a:prstGeom prst="rect">
             <a:avLst/>
           </a:prstGeom>
-          <a:noFill xmlns:a="http://schemas.openxmlformats.org/drawingml/2006/main"/>
-          <a:ln xmlns:a="http://schemas.openxmlformats.org/drawingml/2006/main" w="0">
+          <a:noFill/>
+          <a:ln w="0">
             <a:noFill/>
           </a:ln>
         </p:spPr>
         <p:txBody>
-          <a:bodyPr xmlns:a="http://schemas.openxmlformats.org/drawingml/2006/main">
+          <a:bodyPr>
             <a:noAutofit/>
           </a:bodyPr>
-          <a:lstStyle xmlns:a="http://schemas.openxmlformats.org/drawingml/2006/main"/>
-          <a:p xmlns:a="http://schemas.openxmlformats.org/drawingml/2006/main">
+          <a:lstStyle/>
+          <a:p>
             <a:pPr>
               <a:defRPr sz="2850" b="1">
                 <a:solidFill>
                   <a:srgbClr val="152C43"/>
                 </a:solidFill>
-                <a:latin typeface="Microsoft YaHei"/>
-                <a:ea typeface="Microsoft YaHei"/>
-                <a:cs typeface="Microsoft YaHei"/>
+                <a:latin typeface="微软雅黑" panose="020B0503020204020204" charset="-122"/>
+                <a:ea typeface="微软雅黑" panose="020B0503020204020204" charset="-122"/>
+                <a:cs typeface="微软雅黑" panose="020B0503020204020204" charset="-122"/>
               </a:defRPr>
             </a:pPr>
             <a:r>
@@ -3695,56 +3442,58 @@
                 <a:solidFill>
                   <a:srgbClr val="152C43"/>
                 </a:solidFill>
-                <a:latin typeface="Microsoft YaHei"/>
-                <a:ea typeface="Microsoft YaHei"/>
-                <a:cs typeface="Microsoft YaHei"/>
+                <a:latin typeface="微软雅黑" panose="020B0503020204020204" charset="-122"/>
+                <a:ea typeface="微软雅黑" panose="020B0503020204020204" charset="-122"/>
+                <a:cs typeface="微软雅黑" panose="020B0503020204020204" charset="-122"/>
               </a:rPr>
               <a:t>典型事件  传输量与传输时间持续偏高</a:t>
             </a:r>
+            <a:endParaRPr sz="2850" b="1">
+              <a:solidFill>
+                <a:srgbClr val="152C43"/>
+              </a:solidFill>
+              <a:latin typeface="微软雅黑" panose="020B0503020204020204" charset="-122"/>
+              <a:ea typeface="微软雅黑" panose="020B0503020204020204" charset="-122"/>
+              <a:cs typeface="微软雅黑" panose="020B0503020204020204" charset="-122"/>
+            </a:endParaRPr>
           </a:p>
         </p:txBody>
       </p:sp>
       <p:sp>
         <p:nvSpPr>
-          <p:cNvPr id="2" name="">
-            <a:extLst xmlns:a="http://schemas.openxmlformats.org/drawingml/2006/main">
-              <a:ext uri="{FF2B5EF4-FFF2-40B4-BE49-F238E27FC236}">
-                <a16:creationId xmlns:a16="http://schemas.microsoft.com/office/drawing/2014/main" id="{73063366-50D2-4C1D-94FC-669823792FC8}"/>
-              </a:ext>
-            </a:extLst>
-          </p:cNvPr>
+          <p:cNvPr id="2" name="矩形 1"/>
           <p:cNvSpPr>
-            <a:spLocks xmlns:a="http://schemas.openxmlformats.org/drawingml/2006/main" noGrp="1"/>
+            <a:spLocks noGrp="1"/>
           </p:cNvSpPr>
           <p:nvPr/>
         </p:nvSpPr>
         <p:spPr>
-          <a:xfrm xmlns:a="http://schemas.openxmlformats.org/drawingml/2006/main">
+          <a:xfrm>
             <a:off x="628650" y="1257300"/>
             <a:ext cx="10858500" cy="571500"/>
           </a:xfrm>
-          <a:prstGeom xmlns:a="http://schemas.openxmlformats.org/drawingml/2006/main" prst="rect">
+          <a:prstGeom prst="rect">
             <a:avLst/>
           </a:prstGeom>
-          <a:noFill xmlns:a="http://schemas.openxmlformats.org/drawingml/2006/main"/>
-          <a:ln xmlns:a="http://schemas.openxmlformats.org/drawingml/2006/main" w="0">
+          <a:noFill/>
+          <a:ln w="0">
             <a:noFill/>
           </a:ln>
         </p:spPr>
         <p:txBody>
-          <a:bodyPr xmlns:a="http://schemas.openxmlformats.org/drawingml/2006/main">
+          <a:bodyPr>
             <a:noAutofit/>
           </a:bodyPr>
-          <a:lstStyle xmlns:a="http://schemas.openxmlformats.org/drawingml/2006/main"/>
-          <a:p xmlns:a="http://schemas.openxmlformats.org/drawingml/2006/main">
+          <a:lstStyle/>
+          <a:p>
             <a:pPr>
               <a:defRPr sz="2025" b="0">
                 <a:solidFill>
                   <a:srgbClr val="536474"/>
                 </a:solidFill>
-                <a:latin typeface="Microsoft YaHei"/>
-                <a:ea typeface="Microsoft YaHei"/>
-                <a:cs typeface="Microsoft YaHei"/>
+                <a:latin typeface="微软雅黑" panose="020B0503020204020204" charset="-122"/>
+                <a:ea typeface="微软雅黑" panose="020B0503020204020204" charset="-122"/>
+                <a:cs typeface="微软雅黑" panose="020B0503020204020204" charset="-122"/>
               </a:defRPr>
             </a:pPr>
             <a:r>
@@ -3752,26 +3501,34 @@
                 <a:solidFill>
                   <a:srgbClr val="536474"/>
                 </a:solidFill>
-                <a:latin typeface="Microsoft YaHei"/>
-                <a:ea typeface="Microsoft YaHei"/>
-                <a:cs typeface="Microsoft YaHei"/>
+                <a:latin typeface="微软雅黑" panose="020B0503020204020204" charset="-122"/>
+                <a:ea typeface="微软雅黑" panose="020B0503020204020204" charset="-122"/>
+                <a:cs typeface="微软雅黑" panose="020B0503020204020204" charset="-122"/>
               </a:rPr>
               <a:t>小区 1_1  ·  1724 至 1750 小时  ·  One-Class SVM</a:t>
             </a:r>
+            <a:endParaRPr sz="2025" b="0">
+              <a:solidFill>
+                <a:srgbClr val="536474"/>
+              </a:solidFill>
+              <a:latin typeface="微软雅黑" panose="020B0503020204020204" charset="-122"/>
+              <a:ea typeface="微软雅黑" panose="020B0503020204020204" charset="-122"/>
+              <a:cs typeface="微软雅黑" panose="020B0503020204020204" charset="-122"/>
+            </a:endParaRPr>
           </a:p>
         </p:txBody>
       </p:sp>
       <p:graphicFrame>
         <p:nvGraphicFramePr>
-          <p:cNvPr id="8" name=""/>
+          <p:cNvPr id="8" name="表格 7"/>
           <p:cNvGraphicFramePr/>
           <p:nvPr/>
         </p:nvGraphicFramePr>
         <p:xfrm>
-          <a:off xmlns:a="http://schemas.openxmlformats.org/drawingml/2006/main" x="609600" y="2047875"/>
-          <a:ext xmlns:a="http://schemas.openxmlformats.org/drawingml/2006/main" cx="10972800" cy="2762250"/>
+          <a:off x="609600" y="2047875"/>
+          <a:ext cx="10972800" cy="2762250"/>
         </p:xfrm>
-        <a:graphic xmlns:a="http://schemas.openxmlformats.org/drawingml/2006/main">
+        <a:graphic>
           <a:graphicData uri="http://schemas.openxmlformats.org/drawingml/2006/table">
             <a:tbl>
               <a:tblPr/>
@@ -3791,12 +3548,20 @@
                           <a:solidFill>
                             <a:srgbClr val="152C43"/>
                           </a:solidFill>
-                          <a:latin typeface="Microsoft YaHei"/>
-                          <a:ea typeface="Microsoft YaHei"/>
-                          <a:cs typeface="Microsoft YaHei"/>
+                          <a:latin typeface="微软雅黑" panose="020B0503020204020204" charset="-122"/>
+                          <a:ea typeface="微软雅黑" panose="020B0503020204020204" charset="-122"/>
+                          <a:cs typeface="微软雅黑" panose="020B0503020204020204" charset="-122"/>
                         </a:rPr>
                         <a:t>KPI</a:t>
                       </a:r>
+                      <a:endParaRPr sz="1875" b="1">
+                        <a:solidFill>
+                          <a:srgbClr val="152C43"/>
+                        </a:solidFill>
+                        <a:latin typeface="微软雅黑" panose="020B0503020204020204" charset="-122"/>
+                        <a:ea typeface="微软雅黑" panose="020B0503020204020204" charset="-122"/>
+                        <a:cs typeface="微软雅黑" panose="020B0503020204020204" charset="-122"/>
+                      </a:endParaRPr>
                     </a:p>
                   </a:txBody>
                   <a:tcPr marL="133350" marR="133350" marT="95250" marB="95250" anchor="ctr">
@@ -3815,12 +3580,20 @@
                           <a:solidFill>
                             <a:srgbClr val="152C43"/>
                           </a:solidFill>
-                          <a:latin typeface="Microsoft YaHei"/>
-                          <a:ea typeface="Microsoft YaHei"/>
-                          <a:cs typeface="Microsoft YaHei"/>
+                          <a:latin typeface="微软雅黑" panose="020B0503020204020204" charset="-122"/>
+                          <a:ea typeface="微软雅黑" panose="020B0503020204020204" charset="-122"/>
+                          <a:cs typeface="微软雅黑" panose="020B0503020204020204" charset="-122"/>
                         </a:rPr>
                         <a:t>事件内异常点</a:t>
                       </a:r>
+                      <a:endParaRPr sz="1875" b="1">
+                        <a:solidFill>
+                          <a:srgbClr val="152C43"/>
+                        </a:solidFill>
+                        <a:latin typeface="微软雅黑" panose="020B0503020204020204" charset="-122"/>
+                        <a:ea typeface="微软雅黑" panose="020B0503020204020204" charset="-122"/>
+                        <a:cs typeface="微软雅黑" panose="020B0503020204020204" charset="-122"/>
+                      </a:endParaRPr>
                     </a:p>
                   </a:txBody>
                   <a:tcPr marL="133350" marR="133350" marT="95250" marB="95250" anchor="ctr">
@@ -3839,12 +3612,20 @@
                           <a:solidFill>
                             <a:srgbClr val="152C43"/>
                           </a:solidFill>
-                          <a:latin typeface="Microsoft YaHei"/>
-                          <a:ea typeface="Microsoft YaHei"/>
-                          <a:cs typeface="Microsoft YaHei"/>
+                          <a:latin typeface="微软雅黑" panose="020B0503020204020204" charset="-122"/>
+                          <a:ea typeface="微软雅黑" panose="020B0503020204020204" charset="-122"/>
+                          <a:cs typeface="微软雅黑" panose="020B0503020204020204" charset="-122"/>
                         </a:rPr>
                         <a:t>事件峰值小时</a:t>
                       </a:r>
+                      <a:endParaRPr sz="1875" b="1">
+                        <a:solidFill>
+                          <a:srgbClr val="152C43"/>
+                        </a:solidFill>
+                        <a:latin typeface="微软雅黑" panose="020B0503020204020204" charset="-122"/>
+                        <a:ea typeface="微软雅黑" panose="020B0503020204020204" charset="-122"/>
+                        <a:cs typeface="微软雅黑" panose="020B0503020204020204" charset="-122"/>
+                      </a:endParaRPr>
                     </a:p>
                   </a:txBody>
                   <a:tcPr marL="133350" marR="133350" marT="95250" marB="95250" anchor="ctr">
@@ -3865,12 +3646,20 @@
                           <a:solidFill>
                             <a:srgbClr val="152C43"/>
                           </a:solidFill>
-                          <a:latin typeface="Microsoft YaHei"/>
-                          <a:ea typeface="Microsoft YaHei"/>
-                          <a:cs typeface="Microsoft YaHei"/>
+                          <a:latin typeface="微软雅黑" panose="020B0503020204020204" charset="-122"/>
+                          <a:ea typeface="微软雅黑" panose="020B0503020204020204" charset="-122"/>
+                          <a:cs typeface="微软雅黑" panose="020B0503020204020204" charset="-122"/>
                         </a:rPr>
                         <a:t>DLThpVol</a:t>
                       </a:r>
+                      <a:endParaRPr sz="1875">
+                        <a:solidFill>
+                          <a:srgbClr val="152C43"/>
+                        </a:solidFill>
+                        <a:latin typeface="微软雅黑" panose="020B0503020204020204" charset="-122"/>
+                        <a:ea typeface="微软雅黑" panose="020B0503020204020204" charset="-122"/>
+                        <a:cs typeface="微软雅黑" panose="020B0503020204020204" charset="-122"/>
+                      </a:endParaRPr>
                     </a:p>
                   </a:txBody>
                   <a:tcPr marL="133350" marR="133350" marT="95250" marB="95250" anchor="ctr">
@@ -3889,12 +3678,20 @@
                           <a:solidFill>
                             <a:srgbClr val="152C43"/>
                           </a:solidFill>
-                          <a:latin typeface="Microsoft YaHei"/>
-                          <a:ea typeface="Microsoft YaHei"/>
-                          <a:cs typeface="Microsoft YaHei"/>
+                          <a:latin typeface="微软雅黑" panose="020B0503020204020204" charset="-122"/>
+                          <a:ea typeface="微软雅黑" panose="020B0503020204020204" charset="-122"/>
+                          <a:cs typeface="微软雅黑" panose="020B0503020204020204" charset="-122"/>
                         </a:rPr>
                         <a:t>26 / 27</a:t>
                       </a:r>
+                      <a:endParaRPr sz="1875">
+                        <a:solidFill>
+                          <a:srgbClr val="152C43"/>
+                        </a:solidFill>
+                        <a:latin typeface="微软雅黑" panose="020B0503020204020204" charset="-122"/>
+                        <a:ea typeface="微软雅黑" panose="020B0503020204020204" charset="-122"/>
+                        <a:cs typeface="微软雅黑" panose="020B0503020204020204" charset="-122"/>
+                      </a:endParaRPr>
                     </a:p>
                   </a:txBody>
                   <a:tcPr marL="133350" marR="133350" marT="95250" marB="95250" anchor="ctr">
@@ -3913,12 +3710,20 @@
                           <a:solidFill>
                             <a:srgbClr val="152C43"/>
                           </a:solidFill>
-                          <a:latin typeface="Microsoft YaHei"/>
-                          <a:ea typeface="Microsoft YaHei"/>
-                          <a:cs typeface="Microsoft YaHei"/>
+                          <a:latin typeface="微软雅黑" panose="020B0503020204020204" charset="-122"/>
+                          <a:ea typeface="微软雅黑" panose="020B0503020204020204" charset="-122"/>
+                          <a:cs typeface="微软雅黑" panose="020B0503020204020204" charset="-122"/>
                         </a:rPr>
                         <a:t>1741</a:t>
                       </a:r>
+                      <a:endParaRPr sz="1875">
+                        <a:solidFill>
+                          <a:srgbClr val="152C43"/>
+                        </a:solidFill>
+                        <a:latin typeface="微软雅黑" panose="020B0503020204020204" charset="-122"/>
+                        <a:ea typeface="微软雅黑" panose="020B0503020204020204" charset="-122"/>
+                        <a:cs typeface="微软雅黑" panose="020B0503020204020204" charset="-122"/>
+                      </a:endParaRPr>
                     </a:p>
                   </a:txBody>
                   <a:tcPr marL="133350" marR="133350" marT="95250" marB="95250" anchor="ctr">
@@ -3939,12 +3744,20 @@
                           <a:solidFill>
                             <a:srgbClr val="152C43"/>
                           </a:solidFill>
-                          <a:latin typeface="Microsoft YaHei"/>
-                          <a:ea typeface="Microsoft YaHei"/>
-                          <a:cs typeface="Microsoft YaHei"/>
+                          <a:latin typeface="微软雅黑" panose="020B0503020204020204" charset="-122"/>
+                          <a:ea typeface="微软雅黑" panose="020B0503020204020204" charset="-122"/>
+                          <a:cs typeface="微软雅黑" panose="020B0503020204020204" charset="-122"/>
                         </a:rPr>
                         <a:t>DLThpTime</a:t>
                       </a:r>
+                      <a:endParaRPr sz="1875">
+                        <a:solidFill>
+                          <a:srgbClr val="152C43"/>
+                        </a:solidFill>
+                        <a:latin typeface="微软雅黑" panose="020B0503020204020204" charset="-122"/>
+                        <a:ea typeface="微软雅黑" panose="020B0503020204020204" charset="-122"/>
+                        <a:cs typeface="微软雅黑" panose="020B0503020204020204" charset="-122"/>
+                      </a:endParaRPr>
                     </a:p>
                   </a:txBody>
                   <a:tcPr marL="133350" marR="133350" marT="95250" marB="95250" anchor="ctr">
@@ -3963,12 +3776,20 @@
                           <a:solidFill>
                             <a:srgbClr val="152C43"/>
                           </a:solidFill>
-                          <a:latin typeface="Microsoft YaHei"/>
-                          <a:ea typeface="Microsoft YaHei"/>
-                          <a:cs typeface="Microsoft YaHei"/>
+                          <a:latin typeface="微软雅黑" panose="020B0503020204020204" charset="-122"/>
+                          <a:ea typeface="微软雅黑" panose="020B0503020204020204" charset="-122"/>
+                          <a:cs typeface="微软雅黑" panose="020B0503020204020204" charset="-122"/>
                         </a:rPr>
                         <a:t>23 / 27</a:t>
                       </a:r>
+                      <a:endParaRPr sz="1875">
+                        <a:solidFill>
+                          <a:srgbClr val="152C43"/>
+                        </a:solidFill>
+                        <a:latin typeface="微软雅黑" panose="020B0503020204020204" charset="-122"/>
+                        <a:ea typeface="微软雅黑" panose="020B0503020204020204" charset="-122"/>
+                        <a:cs typeface="微软雅黑" panose="020B0503020204020204" charset="-122"/>
+                      </a:endParaRPr>
                     </a:p>
                   </a:txBody>
                   <a:tcPr marL="133350" marR="133350" marT="95250" marB="95250" anchor="ctr">
@@ -3987,12 +3808,20 @@
                           <a:solidFill>
                             <a:srgbClr val="152C43"/>
                           </a:solidFill>
-                          <a:latin typeface="Microsoft YaHei"/>
-                          <a:ea typeface="Microsoft YaHei"/>
-                          <a:cs typeface="Microsoft YaHei"/>
+                          <a:latin typeface="微软雅黑" panose="020B0503020204020204" charset="-122"/>
+                          <a:ea typeface="微软雅黑" panose="020B0503020204020204" charset="-122"/>
+                          <a:cs typeface="微软雅黑" panose="020B0503020204020204" charset="-122"/>
                         </a:rPr>
                         <a:t>1732</a:t>
                       </a:r>
+                      <a:endParaRPr sz="1875">
+                        <a:solidFill>
+                          <a:srgbClr val="152C43"/>
+                        </a:solidFill>
+                        <a:latin typeface="微软雅黑" panose="020B0503020204020204" charset="-122"/>
+                        <a:ea typeface="微软雅黑" panose="020B0503020204020204" charset="-122"/>
+                        <a:cs typeface="微软雅黑" panose="020B0503020204020204" charset="-122"/>
+                      </a:endParaRPr>
                     </a:p>
                   </a:txBody>
                   <a:tcPr marL="133350" marR="133350" marT="95250" marB="95250" anchor="ctr">
@@ -4013,12 +3842,20 @@
                           <a:solidFill>
                             <a:srgbClr val="152C43"/>
                           </a:solidFill>
-                          <a:latin typeface="Microsoft YaHei"/>
-                          <a:ea typeface="Microsoft YaHei"/>
-                          <a:cs typeface="Microsoft YaHei"/>
+                          <a:latin typeface="微软雅黑" panose="020B0503020204020204" charset="-122"/>
+                          <a:ea typeface="微软雅黑" panose="020B0503020204020204" charset="-122"/>
+                          <a:cs typeface="微软雅黑" panose="020B0503020204020204" charset="-122"/>
                         </a:rPr>
                         <a:t>DLPRB</a:t>
                       </a:r>
+                      <a:endParaRPr sz="1875">
+                        <a:solidFill>
+                          <a:srgbClr val="152C43"/>
+                        </a:solidFill>
+                        <a:latin typeface="微软雅黑" panose="020B0503020204020204" charset="-122"/>
+                        <a:ea typeface="微软雅黑" panose="020B0503020204020204" charset="-122"/>
+                        <a:cs typeface="微软雅黑" panose="020B0503020204020204" charset="-122"/>
+                      </a:endParaRPr>
                     </a:p>
                   </a:txBody>
                   <a:tcPr marL="133350" marR="133350" marT="95250" marB="95250" anchor="ctr">
@@ -4037,12 +3874,20 @@
                           <a:solidFill>
                             <a:srgbClr val="152C43"/>
                           </a:solidFill>
-                          <a:latin typeface="Microsoft YaHei"/>
-                          <a:ea typeface="Microsoft YaHei"/>
-                          <a:cs typeface="Microsoft YaHei"/>
+                          <a:latin typeface="微软雅黑" panose="020B0503020204020204" charset="-122"/>
+                          <a:ea typeface="微软雅黑" panose="020B0503020204020204" charset="-122"/>
+                          <a:cs typeface="微软雅黑" panose="020B0503020204020204" charset="-122"/>
                         </a:rPr>
                         <a:t>2 / 27</a:t>
                       </a:r>
+                      <a:endParaRPr sz="1875">
+                        <a:solidFill>
+                          <a:srgbClr val="152C43"/>
+                        </a:solidFill>
+                        <a:latin typeface="微软雅黑" panose="020B0503020204020204" charset="-122"/>
+                        <a:ea typeface="微软雅黑" panose="020B0503020204020204" charset="-122"/>
+                        <a:cs typeface="微软雅黑" panose="020B0503020204020204" charset="-122"/>
+                      </a:endParaRPr>
                     </a:p>
                   </a:txBody>
                   <a:tcPr marL="133350" marR="133350" marT="95250" marB="95250" anchor="ctr">
@@ -4061,12 +3906,20 @@
                           <a:solidFill>
                             <a:srgbClr val="152C43"/>
                           </a:solidFill>
-                          <a:latin typeface="Microsoft YaHei"/>
-                          <a:ea typeface="Microsoft YaHei"/>
-                          <a:cs typeface="Microsoft YaHei"/>
+                          <a:latin typeface="微软雅黑" panose="020B0503020204020204" charset="-122"/>
+                          <a:ea typeface="微软雅黑" panose="020B0503020204020204" charset="-122"/>
+                          <a:cs typeface="微软雅黑" panose="020B0503020204020204" charset="-122"/>
                         </a:rPr>
                         <a:t>1727</a:t>
                       </a:r>
+                      <a:endParaRPr sz="1875">
+                        <a:solidFill>
+                          <a:srgbClr val="152C43"/>
+                        </a:solidFill>
+                        <a:latin typeface="微软雅黑" panose="020B0503020204020204" charset="-122"/>
+                        <a:ea typeface="微软雅黑" panose="020B0503020204020204" charset="-122"/>
+                        <a:cs typeface="微软雅黑" panose="020B0503020204020204" charset="-122"/>
+                      </a:endParaRPr>
                     </a:p>
                   </a:txBody>
                   <a:tcPr marL="133350" marR="133350" marT="95250" marB="95250" anchor="ctr">
@@ -4087,12 +3940,20 @@
                           <a:solidFill>
                             <a:srgbClr val="152C43"/>
                           </a:solidFill>
-                          <a:latin typeface="Microsoft YaHei"/>
-                          <a:ea typeface="Microsoft YaHei"/>
-                          <a:cs typeface="Microsoft YaHei"/>
+                          <a:latin typeface="微软雅黑" panose="020B0503020204020204" charset="-122"/>
+                          <a:ea typeface="微软雅黑" panose="020B0503020204020204" charset="-122"/>
+                          <a:cs typeface="微软雅黑" panose="020B0503020204020204" charset="-122"/>
                         </a:rPr>
                         <a:t>MR_number</a:t>
                       </a:r>
+                      <a:endParaRPr sz="1875">
+                        <a:solidFill>
+                          <a:srgbClr val="152C43"/>
+                        </a:solidFill>
+                        <a:latin typeface="微软雅黑" panose="020B0503020204020204" charset="-122"/>
+                        <a:ea typeface="微软雅黑" panose="020B0503020204020204" charset="-122"/>
+                        <a:cs typeface="微软雅黑" panose="020B0503020204020204" charset="-122"/>
+                      </a:endParaRPr>
                     </a:p>
                   </a:txBody>
                   <a:tcPr marL="133350" marR="133350" marT="95250" marB="95250" anchor="ctr">
@@ -4111,12 +3972,20 @@
                           <a:solidFill>
                             <a:srgbClr val="152C43"/>
                           </a:solidFill>
-                          <a:latin typeface="Microsoft YaHei"/>
-                          <a:ea typeface="Microsoft YaHei"/>
-                          <a:cs typeface="Microsoft YaHei"/>
+                          <a:latin typeface="微软雅黑" panose="020B0503020204020204" charset="-122"/>
+                          <a:ea typeface="微软雅黑" panose="020B0503020204020204" charset="-122"/>
+                          <a:cs typeface="微软雅黑" panose="020B0503020204020204" charset="-122"/>
                         </a:rPr>
                         <a:t>1 / 27</a:t>
                       </a:r>
+                      <a:endParaRPr sz="1875">
+                        <a:solidFill>
+                          <a:srgbClr val="152C43"/>
+                        </a:solidFill>
+                        <a:latin typeface="微软雅黑" panose="020B0503020204020204" charset="-122"/>
+                        <a:ea typeface="微软雅黑" panose="020B0503020204020204" charset="-122"/>
+                        <a:cs typeface="微软雅黑" panose="020B0503020204020204" charset="-122"/>
+                      </a:endParaRPr>
                     </a:p>
                   </a:txBody>
                   <a:tcPr marL="133350" marR="133350" marT="95250" marB="95250" anchor="ctr">
@@ -4135,12 +4004,20 @@
                           <a:solidFill>
                             <a:srgbClr val="152C43"/>
                           </a:solidFill>
-                          <a:latin typeface="Microsoft YaHei"/>
-                          <a:ea typeface="Microsoft YaHei"/>
-                          <a:cs typeface="Microsoft YaHei"/>
+                          <a:latin typeface="微软雅黑" panose="020B0503020204020204" charset="-122"/>
+                          <a:ea typeface="微软雅黑" panose="020B0503020204020204" charset="-122"/>
+                          <a:cs typeface="微软雅黑" panose="020B0503020204020204" charset="-122"/>
                         </a:rPr>
                         <a:t>1745</a:t>
                       </a:r>
+                      <a:endParaRPr sz="1875">
+                        <a:solidFill>
+                          <a:srgbClr val="152C43"/>
+                        </a:solidFill>
+                        <a:latin typeface="微软雅黑" panose="020B0503020204020204" charset="-122"/>
+                        <a:ea typeface="微软雅黑" panose="020B0503020204020204" charset="-122"/>
+                        <a:cs typeface="微软雅黑" panose="020B0503020204020204" charset="-122"/>
+                      </a:endParaRPr>
                     </a:p>
                   </a:txBody>
                   <a:tcPr marL="133350" marR="133350" marT="95250" marB="95250" anchor="ctr">
@@ -4156,45 +4033,39 @@
       </p:graphicFrame>
       <p:sp>
         <p:nvSpPr>
-          <p:cNvPr id="4" name="">
-            <a:extLst xmlns:a="http://schemas.openxmlformats.org/drawingml/2006/main">
-              <a:ext uri="{FF2B5EF4-FFF2-40B4-BE49-F238E27FC236}">
-                <a16:creationId xmlns:a16="http://schemas.microsoft.com/office/drawing/2014/main" id="{38676D16-1B6F-4F7A-9F7E-B218A398AF9A}"/>
-              </a:ext>
-            </a:extLst>
-          </p:cNvPr>
+          <p:cNvPr id="4" name="矩形 3"/>
           <p:cNvSpPr>
-            <a:spLocks xmlns:a="http://schemas.openxmlformats.org/drawingml/2006/main" noGrp="1"/>
+            <a:spLocks noGrp="1"/>
           </p:cNvSpPr>
           <p:nvPr/>
         </p:nvSpPr>
         <p:spPr>
-          <a:xfrm xmlns:a="http://schemas.openxmlformats.org/drawingml/2006/main">
+          <a:xfrm>
             <a:off x="628650" y="5076825"/>
             <a:ext cx="10858500" cy="666750"/>
           </a:xfrm>
-          <a:prstGeom xmlns:a="http://schemas.openxmlformats.org/drawingml/2006/main" prst="rect">
+          <a:prstGeom prst="rect">
             <a:avLst/>
           </a:prstGeom>
-          <a:noFill xmlns:a="http://schemas.openxmlformats.org/drawingml/2006/main"/>
-          <a:ln xmlns:a="http://schemas.openxmlformats.org/drawingml/2006/main" w="0">
+          <a:noFill/>
+          <a:ln w="0">
             <a:noFill/>
           </a:ln>
         </p:spPr>
         <p:txBody>
-          <a:bodyPr xmlns:a="http://schemas.openxmlformats.org/drawingml/2006/main">
+          <a:bodyPr>
             <a:noAutofit/>
           </a:bodyPr>
-          <a:lstStyle xmlns:a="http://schemas.openxmlformats.org/drawingml/2006/main"/>
-          <a:p xmlns:a="http://schemas.openxmlformats.org/drawingml/2006/main">
+          <a:lstStyle/>
+          <a:p>
             <a:pPr>
               <a:defRPr sz="2025" b="0">
                 <a:solidFill>
                   <a:srgbClr val="245B87"/>
                 </a:solidFill>
-                <a:latin typeface="Microsoft YaHei"/>
-                <a:ea typeface="Microsoft YaHei"/>
-                <a:cs typeface="Microsoft YaHei"/>
+                <a:latin typeface="微软雅黑" panose="020B0503020204020204" charset="-122"/>
+                <a:ea typeface="微软雅黑" panose="020B0503020204020204" charset="-122"/>
+                <a:cs typeface="微软雅黑" panose="020B0503020204020204" charset="-122"/>
               </a:defRPr>
             </a:pPr>
             <a:r>
@@ -4202,56 +4073,58 @@
                 <a:solidFill>
                   <a:srgbClr val="245B87"/>
                 </a:solidFill>
-                <a:latin typeface="Microsoft YaHei"/>
-                <a:ea typeface="Microsoft YaHei"/>
-                <a:cs typeface="Microsoft YaHei"/>
+                <a:latin typeface="微软雅黑" panose="020B0503020204020204" charset="-122"/>
+                <a:ea typeface="微软雅黑" panose="020B0503020204020204" charset="-122"/>
+                <a:cs typeface="微软雅黑" panose="020B0503020204020204" charset="-122"/>
               </a:rPr>
               <a:t>优先核查业务量与调度变化，再看排队、时延、丢包和采集日志。</a:t>
             </a:r>
+            <a:endParaRPr sz="2025" b="0">
+              <a:solidFill>
+                <a:srgbClr val="245B87"/>
+              </a:solidFill>
+              <a:latin typeface="微软雅黑" panose="020B0503020204020204" charset="-122"/>
+              <a:ea typeface="微软雅黑" panose="020B0503020204020204" charset="-122"/>
+              <a:cs typeface="微软雅黑" panose="020B0503020204020204" charset="-122"/>
+            </a:endParaRPr>
           </a:p>
         </p:txBody>
       </p:sp>
       <p:sp>
         <p:nvSpPr>
-          <p:cNvPr id="5" name="">
-            <a:extLst xmlns:a="http://schemas.openxmlformats.org/drawingml/2006/main">
-              <a:ext uri="{FF2B5EF4-FFF2-40B4-BE49-F238E27FC236}">
-                <a16:creationId xmlns:a16="http://schemas.microsoft.com/office/drawing/2014/main" id="{BE158C46-0C91-48E4-8891-D0839E33E2E0}"/>
-              </a:ext>
-            </a:extLst>
-          </p:cNvPr>
+          <p:cNvPr id="5" name="矩形 4"/>
           <p:cNvSpPr>
-            <a:spLocks xmlns:a="http://schemas.openxmlformats.org/drawingml/2006/main" noGrp="1"/>
+            <a:spLocks noGrp="1"/>
           </p:cNvSpPr>
           <p:nvPr/>
         </p:nvSpPr>
         <p:spPr>
-          <a:xfrm xmlns:a="http://schemas.openxmlformats.org/drawingml/2006/main">
+          <a:xfrm>
             <a:off x="628650" y="5857875"/>
             <a:ext cx="10763250" cy="619125"/>
           </a:xfrm>
-          <a:prstGeom xmlns:a="http://schemas.openxmlformats.org/drawingml/2006/main" prst="rect">
+          <a:prstGeom prst="rect">
             <a:avLst/>
           </a:prstGeom>
-          <a:noFill xmlns:a="http://schemas.openxmlformats.org/drawingml/2006/main"/>
-          <a:ln xmlns:a="http://schemas.openxmlformats.org/drawingml/2006/main" w="0">
+          <a:noFill/>
+          <a:ln w="0">
             <a:noFill/>
           </a:ln>
         </p:spPr>
         <p:txBody>
-          <a:bodyPr xmlns:a="http://schemas.openxmlformats.org/drawingml/2006/main">
+          <a:bodyPr>
             <a:noAutofit/>
           </a:bodyPr>
-          <a:lstStyle xmlns:a="http://schemas.openxmlformats.org/drawingml/2006/main"/>
-          <a:p xmlns:a="http://schemas.openxmlformats.org/drawingml/2006/main">
+          <a:lstStyle/>
+          <a:p>
             <a:pPr>
               <a:defRPr sz="1875" b="0">
                 <a:solidFill>
                   <a:srgbClr val="536474"/>
                 </a:solidFill>
-                <a:latin typeface="Microsoft YaHei"/>
-                <a:ea typeface="Microsoft YaHei"/>
-                <a:cs typeface="Microsoft YaHei"/>
+                <a:latin typeface="微软雅黑" panose="020B0503020204020204" charset="-122"/>
+                <a:ea typeface="微软雅黑" panose="020B0503020204020204" charset="-122"/>
+                <a:cs typeface="微软雅黑" panose="020B0503020204020204" charset="-122"/>
               </a:defRPr>
             </a:pPr>
             <a:r>
@@ -4259,33 +4132,40 @@
                 <a:solidFill>
                   <a:srgbClr val="536474"/>
                 </a:solidFill>
-                <a:latin typeface="Microsoft YaHei"/>
-                <a:ea typeface="Microsoft YaHei"/>
-                <a:cs typeface="Microsoft YaHei"/>
+                <a:latin typeface="微软雅黑" panose="020B0503020204020204" charset="-122"/>
+                <a:ea typeface="微软雅黑" panose="020B0503020204020204" charset="-122"/>
+                <a:cs typeface="微软雅黑" panose="020B0503020204020204" charset="-122"/>
               </a:rPr>
               <a:t>共同变化是排查线索，不能直接认定拥塞、攻击或用户激增。</a:t>
             </a:r>
+            <a:endParaRPr sz="1875" b="0">
+              <a:solidFill>
+                <a:srgbClr val="536474"/>
+              </a:solidFill>
+              <a:latin typeface="微软雅黑" panose="020B0503020204020204" charset="-122"/>
+              <a:ea typeface="微软雅黑" panose="020B0503020204020204" charset="-122"/>
+              <a:cs typeface="微软雅黑" panose="020B0503020204020204" charset="-122"/>
+            </a:endParaRPr>
           </a:p>
         </p:txBody>
       </p:sp>
     </p:spTree>
-    <p:extLst>
-      <p:ext uri="{BB962C8B-B14F-4D97-AF65-F5344CB8AC3E}">
-        <p14:creationId xmlns:p14="http://schemas.microsoft.com/office/powerpoint/2010/main" val="1764343181"/>
-      </p:ext>
-    </p:extLst>
   </p:cSld>
+  <p:clrMapOvr>
+    <a:masterClrMapping/>
+  </p:clrMapOvr>
 </p:sld>
 </file>
 
 <file path=ppt/slides/slide8.xml><?xml version="1.0" encoding="utf-8"?>
-<p:sld xmlns:p="http://schemas.openxmlformats.org/presentationml/2006/main">
+<p:sld xmlns:a="http://schemas.openxmlformats.org/drawingml/2006/main" xmlns:r="http://schemas.openxmlformats.org/officeDocument/2006/relationships" xmlns:p="http://schemas.openxmlformats.org/presentationml/2006/main">
   <p:cSld>
     <p:bg>
       <p:bgPr>
-        <a:solidFill xmlns:a="http://schemas.openxmlformats.org/drawingml/2006/main">
+        <a:solidFill>
           <a:srgbClr val="FFFFFF"/>
         </a:solidFill>
+        <a:effectLst/>
       </p:bgPr>
     </p:bg>
     <p:spTree>
@@ -4294,50 +4174,42 @@
         <p:cNvGrpSpPr/>
         <p:nvPr/>
       </p:nvGrpSpPr>
-      <p:grpSpPr>
-        <a:xfrm xmlns:a="http://schemas.openxmlformats.org/drawingml/2006/main"/>
-      </p:grpSpPr>
-      <p:sp>
-        <p:nvSpPr>
-          <p:cNvPr id="6" name="">
-            <a:extLst xmlns:a="http://schemas.openxmlformats.org/drawingml/2006/main">
-              <a:ext uri="{FF2B5EF4-FFF2-40B4-BE49-F238E27FC236}">
-                <a16:creationId xmlns:a16="http://schemas.microsoft.com/office/drawing/2014/main" id="{B1C2854B-846A-46BE-B317-391AEFACA230}"/>
-              </a:ext>
-            </a:extLst>
-          </p:cNvPr>
+      <p:grpSpPr/>
+      <p:sp>
+        <p:nvSpPr>
+          <p:cNvPr id="6" name="矩形 5"/>
           <p:cNvSpPr>
-            <a:spLocks xmlns:a="http://schemas.openxmlformats.org/drawingml/2006/main" noGrp="1"/>
+            <a:spLocks noGrp="1"/>
           </p:cNvSpPr>
           <p:nvPr/>
         </p:nvSpPr>
         <p:spPr>
-          <a:xfrm xmlns:a="http://schemas.openxmlformats.org/drawingml/2006/main">
+          <a:xfrm>
             <a:off x="609600" y="381000"/>
             <a:ext cx="10953750" cy="762000"/>
           </a:xfrm>
-          <a:prstGeom xmlns:a="http://schemas.openxmlformats.org/drawingml/2006/main" prst="rect">
+          <a:prstGeom prst="rect">
             <a:avLst/>
           </a:prstGeom>
-          <a:noFill xmlns:a="http://schemas.openxmlformats.org/drawingml/2006/main"/>
-          <a:ln xmlns:a="http://schemas.openxmlformats.org/drawingml/2006/main" w="0">
+          <a:noFill/>
+          <a:ln w="0">
             <a:noFill/>
           </a:ln>
         </p:spPr>
         <p:txBody>
-          <a:bodyPr xmlns:a="http://schemas.openxmlformats.org/drawingml/2006/main">
+          <a:bodyPr>
             <a:noAutofit/>
           </a:bodyPr>
-          <a:lstStyle xmlns:a="http://schemas.openxmlformats.org/drawingml/2006/main"/>
-          <a:p xmlns:a="http://schemas.openxmlformats.org/drawingml/2006/main">
+          <a:lstStyle/>
+          <a:p>
             <a:pPr>
               <a:defRPr sz="2850" b="1">
                 <a:solidFill>
                   <a:srgbClr val="152C43"/>
                 </a:solidFill>
-                <a:latin typeface="Microsoft YaHei"/>
-                <a:ea typeface="Microsoft YaHei"/>
-                <a:cs typeface="Microsoft YaHei"/>
+                <a:latin typeface="微软雅黑" panose="020B0503020204020204" charset="-122"/>
+                <a:ea typeface="微软雅黑" panose="020B0503020204020204" charset="-122"/>
+                <a:cs typeface="微软雅黑" panose="020B0503020204020204" charset="-122"/>
               </a:defRPr>
             </a:pPr>
             <a:r>
@@ -4345,56 +4217,58 @@
                 <a:solidFill>
                   <a:srgbClr val="152C43"/>
                 </a:solidFill>
-                <a:latin typeface="Microsoft YaHei"/>
-                <a:ea typeface="Microsoft YaHei"/>
-                <a:cs typeface="Microsoft YaHei"/>
+                <a:latin typeface="微软雅黑" panose="020B0503020204020204" charset="-122"/>
+                <a:ea typeface="微软雅黑" panose="020B0503020204020204" charset="-122"/>
+                <a:cs typeface="微软雅黑" panose="020B0503020204020204" charset="-122"/>
               </a:rPr>
               <a:t>交付结果与验证边界</a:t>
             </a:r>
+            <a:endParaRPr sz="2850" b="1">
+              <a:solidFill>
+                <a:srgbClr val="152C43"/>
+              </a:solidFill>
+              <a:latin typeface="微软雅黑" panose="020B0503020204020204" charset="-122"/>
+              <a:ea typeface="微软雅黑" panose="020B0503020204020204" charset="-122"/>
+              <a:cs typeface="微软雅黑" panose="020B0503020204020204" charset="-122"/>
+            </a:endParaRPr>
           </a:p>
         </p:txBody>
       </p:sp>
       <p:sp>
         <p:nvSpPr>
-          <p:cNvPr id="2" name="">
-            <a:extLst xmlns:a="http://schemas.openxmlformats.org/drawingml/2006/main">
-              <a:ext uri="{FF2B5EF4-FFF2-40B4-BE49-F238E27FC236}">
-                <a16:creationId xmlns:a16="http://schemas.microsoft.com/office/drawing/2014/main" id="{15FF672F-B606-4D52-ADE6-903B5C85E81C}"/>
-              </a:ext>
-            </a:extLst>
-          </p:cNvPr>
+          <p:cNvPr id="2" name="矩形 1"/>
           <p:cNvSpPr>
-            <a:spLocks xmlns:a="http://schemas.openxmlformats.org/drawingml/2006/main" noGrp="1"/>
+            <a:spLocks noGrp="1"/>
           </p:cNvSpPr>
           <p:nvPr/>
         </p:nvSpPr>
         <p:spPr>
-          <a:xfrm xmlns:a="http://schemas.openxmlformats.org/drawingml/2006/main">
+          <a:xfrm>
             <a:off x="628650" y="1524000"/>
             <a:ext cx="10763250" cy="666750"/>
           </a:xfrm>
-          <a:prstGeom xmlns:a="http://schemas.openxmlformats.org/drawingml/2006/main" prst="rect">
+          <a:prstGeom prst="rect">
             <a:avLst/>
           </a:prstGeom>
-          <a:noFill xmlns:a="http://schemas.openxmlformats.org/drawingml/2006/main"/>
-          <a:ln xmlns:a="http://schemas.openxmlformats.org/drawingml/2006/main" w="0">
+          <a:noFill/>
+          <a:ln w="0">
             <a:noFill/>
           </a:ln>
         </p:spPr>
         <p:txBody>
-          <a:bodyPr xmlns:a="http://schemas.openxmlformats.org/drawingml/2006/main">
+          <a:bodyPr>
             <a:noAutofit/>
           </a:bodyPr>
-          <a:lstStyle xmlns:a="http://schemas.openxmlformats.org/drawingml/2006/main"/>
-          <a:p xmlns:a="http://schemas.openxmlformats.org/drawingml/2006/main">
+          <a:lstStyle/>
+          <a:p>
             <a:pPr>
               <a:defRPr sz="2250" b="1">
                 <a:solidFill>
                   <a:srgbClr val="152C43"/>
                 </a:solidFill>
-                <a:latin typeface="Microsoft YaHei"/>
-                <a:ea typeface="Microsoft YaHei"/>
-                <a:cs typeface="Microsoft YaHei"/>
+                <a:latin typeface="微软雅黑" panose="020B0503020204020204" charset="-122"/>
+                <a:ea typeface="微软雅黑" panose="020B0503020204020204" charset="-122"/>
+                <a:cs typeface="微软雅黑" panose="020B0503020204020204" charset="-122"/>
               </a:defRPr>
             </a:pPr>
             <a:r>
@@ -4402,56 +4276,58 @@
                 <a:solidFill>
                   <a:srgbClr val="152C43"/>
                 </a:solidFill>
-                <a:latin typeface="Microsoft YaHei"/>
-                <a:ea typeface="Microsoft YaHei"/>
-                <a:cs typeface="Microsoft YaHei"/>
+                <a:latin typeface="微软雅黑" panose="020B0503020204020204" charset="-122"/>
+                <a:ea typeface="微软雅黑" panose="020B0503020204020204" charset="-122"/>
+                <a:cs typeface="微软雅黑" panose="020B0503020204020204" charset="-122"/>
               </a:rPr>
               <a:t>独立 GOTSF 工程、技术报告、操作说明和演示 PPT。</a:t>
             </a:r>
+            <a:endParaRPr sz="2250" b="1">
+              <a:solidFill>
+                <a:srgbClr val="152C43"/>
+              </a:solidFill>
+              <a:latin typeface="微软雅黑" panose="020B0503020204020204" charset="-122"/>
+              <a:ea typeface="微软雅黑" panose="020B0503020204020204" charset="-122"/>
+              <a:cs typeface="微软雅黑" panose="020B0503020204020204" charset="-122"/>
+            </a:endParaRPr>
           </a:p>
         </p:txBody>
       </p:sp>
       <p:sp>
         <p:nvSpPr>
-          <p:cNvPr id="3" name="">
-            <a:extLst xmlns:a="http://schemas.openxmlformats.org/drawingml/2006/main">
-              <a:ext uri="{FF2B5EF4-FFF2-40B4-BE49-F238E27FC236}">
-                <a16:creationId xmlns:a16="http://schemas.microsoft.com/office/drawing/2014/main" id="{DAED526D-E69A-4F2C-B51E-D19E4A3BE4C9}"/>
-              </a:ext>
-            </a:extLst>
-          </p:cNvPr>
+          <p:cNvPr id="3" name="矩形 2"/>
           <p:cNvSpPr>
-            <a:spLocks xmlns:a="http://schemas.openxmlformats.org/drawingml/2006/main" noGrp="1"/>
+            <a:spLocks noGrp="1"/>
           </p:cNvSpPr>
           <p:nvPr/>
         </p:nvSpPr>
         <p:spPr>
-          <a:xfrm xmlns:a="http://schemas.openxmlformats.org/drawingml/2006/main">
+          <a:xfrm>
             <a:off x="628650" y="2533650"/>
             <a:ext cx="10763250" cy="952500"/>
           </a:xfrm>
-          <a:prstGeom xmlns:a="http://schemas.openxmlformats.org/drawingml/2006/main" prst="rect">
+          <a:prstGeom prst="rect">
             <a:avLst/>
           </a:prstGeom>
-          <a:noFill xmlns:a="http://schemas.openxmlformats.org/drawingml/2006/main"/>
-          <a:ln xmlns:a="http://schemas.openxmlformats.org/drawingml/2006/main" w="0">
+          <a:noFill/>
+          <a:ln w="0">
             <a:noFill/>
           </a:ln>
         </p:spPr>
         <p:txBody>
-          <a:bodyPr xmlns:a="http://schemas.openxmlformats.org/drawingml/2006/main">
+          <a:bodyPr>
             <a:noAutofit/>
           </a:bodyPr>
-          <a:lstStyle xmlns:a="http://schemas.openxmlformats.org/drawingml/2006/main"/>
-          <a:p xmlns:a="http://schemas.openxmlformats.org/drawingml/2006/main">
+          <a:lstStyle/>
+          <a:p>
             <a:pPr>
               <a:defRPr sz="2175" b="0">
                 <a:solidFill>
                   <a:srgbClr val="152C43"/>
                 </a:solidFill>
-                <a:latin typeface="Microsoft YaHei"/>
-                <a:ea typeface="Microsoft YaHei"/>
-                <a:cs typeface="Microsoft YaHei"/>
+                <a:latin typeface="微软雅黑" panose="020B0503020204020204" charset="-122"/>
+                <a:ea typeface="微软雅黑" panose="020B0503020204020204" charset="-122"/>
+                <a:cs typeface="微软雅黑" panose="020B0503020204020204" charset="-122"/>
               </a:defRPr>
             </a:pPr>
             <a:r>
@@ -4459,56 +4335,58 @@
                 <a:solidFill>
                   <a:srgbClr val="152C43"/>
                 </a:solidFill>
-                <a:latin typeface="Microsoft YaHei"/>
-                <a:ea typeface="Microsoft YaHei"/>
-                <a:cs typeface="Microsoft YaHei"/>
+                <a:latin typeface="微软雅黑" panose="020B0503020204020204" charset="-122"/>
+                <a:ea typeface="微软雅黑" panose="020B0503020204020204" charset="-122"/>
+                <a:cs typeface="微软雅黑" panose="020B0503020204020204" charset="-122"/>
               </a:rPr>
               <a:t>本地 Git 仓库 + Git bundle + ZIP；旧代码保留，不上传 GitHub。</a:t>
             </a:r>
+            <a:endParaRPr sz="2175" b="0">
+              <a:solidFill>
+                <a:srgbClr val="152C43"/>
+              </a:solidFill>
+              <a:latin typeface="微软雅黑" panose="020B0503020204020204" charset="-122"/>
+              <a:ea typeface="微软雅黑" panose="020B0503020204020204" charset="-122"/>
+              <a:cs typeface="微软雅黑" panose="020B0503020204020204" charset="-122"/>
+            </a:endParaRPr>
           </a:p>
         </p:txBody>
       </p:sp>
       <p:sp>
         <p:nvSpPr>
-          <p:cNvPr id="4" name="">
-            <a:extLst xmlns:a="http://schemas.openxmlformats.org/drawingml/2006/main">
-              <a:ext uri="{FF2B5EF4-FFF2-40B4-BE49-F238E27FC236}">
-                <a16:creationId xmlns:a16="http://schemas.microsoft.com/office/drawing/2014/main" id="{74C1E0BF-A6C9-4585-94D6-9EDAACB58597}"/>
-              </a:ext>
-            </a:extLst>
-          </p:cNvPr>
+          <p:cNvPr id="4" name="矩形 3"/>
           <p:cNvSpPr>
-            <a:spLocks xmlns:a="http://schemas.openxmlformats.org/drawingml/2006/main" noGrp="1"/>
+            <a:spLocks noGrp="1"/>
           </p:cNvSpPr>
           <p:nvPr/>
         </p:nvSpPr>
         <p:spPr>
-          <a:xfrm xmlns:a="http://schemas.openxmlformats.org/drawingml/2006/main">
+          <a:xfrm>
             <a:off x="628650" y="3733800"/>
             <a:ext cx="10763250" cy="1000125"/>
           </a:xfrm>
-          <a:prstGeom xmlns:a="http://schemas.openxmlformats.org/drawingml/2006/main" prst="rect">
+          <a:prstGeom prst="rect">
             <a:avLst/>
           </a:prstGeom>
-          <a:noFill xmlns:a="http://schemas.openxmlformats.org/drawingml/2006/main"/>
-          <a:ln xmlns:a="http://schemas.openxmlformats.org/drawingml/2006/main" w="0">
+          <a:noFill/>
+          <a:ln w="0">
             <a:noFill/>
           </a:ln>
         </p:spPr>
         <p:txBody>
-          <a:bodyPr xmlns:a="http://schemas.openxmlformats.org/drawingml/2006/main">
+          <a:bodyPr>
             <a:noAutofit/>
           </a:bodyPr>
-          <a:lstStyle xmlns:a="http://schemas.openxmlformats.org/drawingml/2006/main"/>
-          <a:p xmlns:a="http://schemas.openxmlformats.org/drawingml/2006/main">
+          <a:lstStyle/>
+          <a:p>
             <a:pPr>
               <a:defRPr sz="2175" b="0">
                 <a:solidFill>
                   <a:srgbClr val="245B87"/>
                 </a:solidFill>
-                <a:latin typeface="Microsoft YaHei"/>
-                <a:ea typeface="Microsoft YaHei"/>
-                <a:cs typeface="Microsoft YaHei"/>
+                <a:latin typeface="微软雅黑" panose="020B0503020204020204" charset="-122"/>
+                <a:ea typeface="微软雅黑" panose="020B0503020204020204" charset="-122"/>
+                <a:cs typeface="微软雅黑" panose="020B0503020204020204" charset="-122"/>
               </a:defRPr>
             </a:pPr>
             <a:r>
@@ -4516,56 +4394,58 @@
                 <a:solidFill>
                   <a:srgbClr val="245B87"/>
                 </a:solidFill>
-                <a:latin typeface="Microsoft YaHei"/>
-                <a:ea typeface="Microsoft YaHei"/>
-                <a:cs typeface="Microsoft YaHei"/>
+                <a:latin typeface="微软雅黑" panose="020B0503020204020204" charset="-122"/>
+                <a:ea typeface="微软雅黑" panose="020B0503020204020204" charset="-122"/>
+                <a:cs typeface="微软雅黑" panose="020B0503020204020204" charset="-122"/>
               </a:rPr>
               <a:t>144 个预测窗口、483,840 次异常判定完成新旧核对；12 项测试通过。</a:t>
             </a:r>
+            <a:endParaRPr sz="2175" b="0">
+              <a:solidFill>
+                <a:srgbClr val="245B87"/>
+              </a:solidFill>
+              <a:latin typeface="微软雅黑" panose="020B0503020204020204" charset="-122"/>
+              <a:ea typeface="微软雅黑" panose="020B0503020204020204" charset="-122"/>
+              <a:cs typeface="微软雅黑" panose="020B0503020204020204" charset="-122"/>
+            </a:endParaRPr>
           </a:p>
         </p:txBody>
       </p:sp>
       <p:sp>
         <p:nvSpPr>
-          <p:cNvPr id="5" name="">
-            <a:extLst xmlns:a="http://schemas.openxmlformats.org/drawingml/2006/main">
-              <a:ext uri="{FF2B5EF4-FFF2-40B4-BE49-F238E27FC236}">
-                <a16:creationId xmlns:a16="http://schemas.microsoft.com/office/drawing/2014/main" id="{3FB0E3CD-457E-4910-BA61-B283DD41D5AD}"/>
-              </a:ext>
-            </a:extLst>
-          </p:cNvPr>
+          <p:cNvPr id="5" name="矩形 4"/>
           <p:cNvSpPr>
-            <a:spLocks xmlns:a="http://schemas.openxmlformats.org/drawingml/2006/main" noGrp="1"/>
+            <a:spLocks noGrp="1"/>
           </p:cNvSpPr>
           <p:nvPr/>
         </p:nvSpPr>
         <p:spPr>
-          <a:xfrm xmlns:a="http://schemas.openxmlformats.org/drawingml/2006/main">
+          <a:xfrm>
             <a:off x="628650" y="5219700"/>
             <a:ext cx="10763250" cy="1047750"/>
           </a:xfrm>
-          <a:prstGeom xmlns:a="http://schemas.openxmlformats.org/drawingml/2006/main" prst="rect">
+          <a:prstGeom prst="rect">
             <a:avLst/>
           </a:prstGeom>
-          <a:noFill xmlns:a="http://schemas.openxmlformats.org/drawingml/2006/main"/>
-          <a:ln xmlns:a="http://schemas.openxmlformats.org/drawingml/2006/main" w="0">
+          <a:noFill/>
+          <a:ln w="0">
             <a:noFill/>
           </a:ln>
         </p:spPr>
         <p:txBody>
-          <a:bodyPr xmlns:a="http://schemas.openxmlformats.org/drawingml/2006/main">
+          <a:bodyPr>
             <a:noAutofit/>
           </a:bodyPr>
-          <a:lstStyle xmlns:a="http://schemas.openxmlformats.org/drawingml/2006/main"/>
-          <a:p xmlns:a="http://schemas.openxmlformats.org/drawingml/2006/main">
+          <a:lstStyle/>
+          <a:p>
             <a:pPr>
               <a:defRPr sz="2025" b="0">
                 <a:solidFill>
                   <a:srgbClr val="536474"/>
                 </a:solidFill>
-                <a:latin typeface="Microsoft YaHei"/>
-                <a:ea typeface="Microsoft YaHei"/>
-                <a:cs typeface="Microsoft YaHei"/>
+                <a:latin typeface="微软雅黑" panose="020B0503020204020204" charset="-122"/>
+                <a:ea typeface="微软雅黑" panose="020B0503020204020204" charset="-122"/>
+                <a:cs typeface="微软雅黑" panose="020B0503020204020204" charset="-122"/>
               </a:defRPr>
             </a:pPr>
             <a:r>
@@ -4573,22 +4453,28 @@
                 <a:solidFill>
                   <a:srgbClr val="536474"/>
                 </a:solidFill>
-                <a:latin typeface="Microsoft YaHei"/>
-                <a:ea typeface="Microsoft YaHei"/>
-                <a:cs typeface="Microsoft YaHei"/>
+                <a:latin typeface="微软雅黑" panose="020B0503020204020204" charset="-122"/>
+                <a:ea typeface="微软雅黑" panose="020B0503020204020204" charset="-122"/>
+                <a:cs typeface="微软雅黑" panose="020B0503020204020204" charset="-122"/>
               </a:rPr>
               <a:t>下一步：训练期独立拟合预处理；补充真实故障标签和日志；再评估部署。</a:t>
             </a:r>
+            <a:endParaRPr sz="2025" b="0">
+              <a:solidFill>
+                <a:srgbClr val="536474"/>
+              </a:solidFill>
+              <a:latin typeface="微软雅黑" panose="020B0503020204020204" charset="-122"/>
+              <a:ea typeface="微软雅黑" panose="020B0503020204020204" charset="-122"/>
+              <a:cs typeface="微软雅黑" panose="020B0503020204020204" charset="-122"/>
+            </a:endParaRPr>
           </a:p>
         </p:txBody>
       </p:sp>
     </p:spTree>
-    <p:extLst>
-      <p:ext uri="{BB962C8B-B14F-4D97-AF65-F5344CB8AC3E}">
-        <p14:creationId xmlns:p14="http://schemas.microsoft.com/office/powerpoint/2010/main" val="1176587484"/>
-      </p:ext>
-    </p:extLst>
   </p:cSld>
+  <p:clrMapOvr>
+    <a:masterClrMapping/>
+  </p:clrMapOvr>
 </p:sld>
 </file>
 
@@ -4834,5 +4720,260 @@
       </a:bgFillStyleLst>
     </a:fmtScheme>
   </a:themeElements>
+  <a:extLst>
+    <a:ext uri="{05A4C25C-085E-4340-85A3-A5531E510DB2}">
+      <thm15:themeFamily xmlns:thm15="http://schemas.microsoft.com/office/thememl/2012/main" name="Office Theme" id="{62F939B6-93AF-4DB8-9C6B-D6C7DFDC589F}" vid="{4A3C46E8-61CC-4603-A589-7422A47A8E4A}"/>
+    </a:ext>
+  </a:extLst>
+</a:theme>
+</file>
+
+<file path=ppt/theme/theme2.xml><?xml version="1.0" encoding="utf-8"?>
+<a:theme xmlns:a="http://schemas.openxmlformats.org/drawingml/2006/main" name="ChatGPT">
+  <a:themeElements>
+    <a:clrScheme name="ChatGPT">
+      <a:dk1>
+        <a:srgbClr val="000000"/>
+      </a:dk1>
+      <a:lt1>
+        <a:srgbClr val="FFFFFF"/>
+      </a:lt1>
+      <a:dk2>
+        <a:srgbClr val="0E2841"/>
+      </a:dk2>
+      <a:lt2>
+        <a:srgbClr val="E8E8E8"/>
+      </a:lt2>
+      <a:accent1>
+        <a:srgbClr val="156082"/>
+      </a:accent1>
+      <a:accent2>
+        <a:srgbClr val="E97132"/>
+      </a:accent2>
+      <a:accent3>
+        <a:srgbClr val="196B24"/>
+      </a:accent3>
+      <a:accent4>
+        <a:srgbClr val="0F9ED5"/>
+      </a:accent4>
+      <a:accent5>
+        <a:srgbClr val="A02B93"/>
+      </a:accent5>
+      <a:accent6>
+        <a:srgbClr val="4EA72E"/>
+      </a:accent6>
+      <a:hlink>
+        <a:srgbClr val="467886"/>
+      </a:hlink>
+      <a:folHlink>
+        <a:srgbClr val="96607D"/>
+      </a:folHlink>
+    </a:clrScheme>
+    <a:fontScheme name="Office">
+      <a:majorFont>
+        <a:latin typeface="Calibri Light"/>
+        <a:ea typeface="Calibri Light"/>
+        <a:cs typeface="Calibri Light"/>
+      </a:majorFont>
+      <a:minorFont>
+        <a:latin typeface="Calibri"/>
+        <a:ea typeface="Calibri"/>
+        <a:cs typeface="Calibri"/>
+      </a:minorFont>
+    </a:fontScheme>
+    <a:fmtScheme name="ChatGPT">
+      <a:fillStyleLst>
+        <a:solidFill>
+          <a:schemeClr val="phClr"/>
+        </a:solidFill>
+        <a:gradFill>
+          <a:gsLst>
+            <a:gs pos="0">
+              <a:schemeClr val="phClr">
+                <a:tint val="67000"/>
+                <a:lumMod val="110000"/>
+                <a:satMod val="105000"/>
+              </a:schemeClr>
+            </a:gs>
+            <a:gs pos="50000">
+              <a:schemeClr val="phClr">
+                <a:tint val="73000"/>
+                <a:lumMod val="105000"/>
+                <a:satMod val="103000"/>
+              </a:schemeClr>
+            </a:gs>
+            <a:gs pos="100000">
+              <a:schemeClr val="phClr">
+                <a:tint val="81000"/>
+                <a:lumMod val="105000"/>
+                <a:satMod val="109000"/>
+              </a:schemeClr>
+            </a:gs>
+          </a:gsLst>
+          <a:lin ang="5400000" scaled="0"/>
+        </a:gradFill>
+        <a:gradFill>
+          <a:gsLst>
+            <a:gs pos="0">
+              <a:schemeClr val="phClr">
+                <a:tint val="94000"/>
+                <a:lumMod val="102000"/>
+                <a:satMod val="103000"/>
+              </a:schemeClr>
+            </a:gs>
+            <a:gs pos="50000">
+              <a:schemeClr val="phClr">
+                <a:shade val="100000"/>
+                <a:lumMod val="100000"/>
+                <a:satMod val="110000"/>
+              </a:schemeClr>
+            </a:gs>
+            <a:gs pos="100000">
+              <a:schemeClr val="phClr">
+                <a:shade val="78000"/>
+                <a:lumMod val="99000"/>
+                <a:satMod val="120000"/>
+              </a:schemeClr>
+            </a:gs>
+          </a:gsLst>
+          <a:lin ang="5400000" scaled="0"/>
+        </a:gradFill>
+      </a:fillStyleLst>
+      <a:lnStyleLst>
+        <a:ln w="12700">
+          <a:solidFill>
+            <a:schemeClr val="phClr"/>
+          </a:solidFill>
+          <a:prstDash val="solid"/>
+        </a:ln>
+        <a:ln w="19050">
+          <a:solidFill>
+            <a:schemeClr val="phClr"/>
+          </a:solidFill>
+          <a:prstDash val="solid"/>
+        </a:ln>
+        <a:ln w="25400">
+          <a:solidFill>
+            <a:schemeClr val="phClr"/>
+          </a:solidFill>
+          <a:prstDash val="solid"/>
+        </a:ln>
+      </a:lnStyleLst>
+      <a:effectStyleLst>
+        <a:effectStyle>
+          <a:effectLst/>
+        </a:effectStyle>
+        <a:effectStyle>
+          <a:effectLst/>
+        </a:effectStyle>
+        <a:effectStyle>
+          <a:effectLst>
+            <a:outerShdw blurRad="57150" dist="19050" dir="5400000">
+              <a:srgbClr val="000000">
+                <a:alpha val="16000"/>
+              </a:srgbClr>
+            </a:outerShdw>
+          </a:effectLst>
+        </a:effectStyle>
+        <a:effectStyle>
+          <a:effectLst>
+            <a:outerShdw blurRad="19050" dist="9525" dir="5400000">
+              <a:srgbClr val="000000">
+                <a:alpha val="6000"/>
+              </a:srgbClr>
+            </a:outerShdw>
+          </a:effectLst>
+        </a:effectStyle>
+        <a:effectStyle>
+          <a:effectLst>
+            <a:outerShdw blurRad="28575" dist="9525" dir="5400000">
+              <a:srgbClr val="000000">
+                <a:alpha val="8000"/>
+              </a:srgbClr>
+            </a:outerShdw>
+          </a:effectLst>
+        </a:effectStyle>
+        <a:effectStyle>
+          <a:effectLst>
+            <a:outerShdw blurRad="57150" dist="19050" dir="5400000">
+              <a:srgbClr val="000000">
+                <a:alpha val="10000"/>
+              </a:srgbClr>
+            </a:outerShdw>
+          </a:effectLst>
+        </a:effectStyle>
+        <a:effectStyle>
+          <a:effectLst>
+            <a:outerShdw blurRad="114300" dist="38100" dir="5400000">
+              <a:srgbClr val="000000">
+                <a:alpha val="12000"/>
+              </a:srgbClr>
+            </a:outerShdw>
+          </a:effectLst>
+        </a:effectStyle>
+        <a:effectStyle>
+          <a:effectLst>
+            <a:outerShdw blurRad="171450" dist="57150" dir="5400000">
+              <a:srgbClr val="000000">
+                <a:alpha val="16000"/>
+              </a:srgbClr>
+            </a:outerShdw>
+          </a:effectLst>
+        </a:effectStyle>
+        <a:effectStyle>
+          <a:effectLst>
+            <a:outerShdw blurRad="266700" dist="95250" dir="5400000">
+              <a:srgbClr val="000000">
+                <a:alpha val="24000"/>
+              </a:srgbClr>
+            </a:outerShdw>
+          </a:effectLst>
+        </a:effectStyle>
+      </a:effectStyleLst>
+      <a:bgFillStyleLst>
+        <a:solidFill>
+          <a:schemeClr val="phClr"/>
+        </a:solidFill>
+        <a:solidFill>
+          <a:schemeClr val="phClr">
+            <a:tint val="95000"/>
+            <a:satMod val="170000"/>
+          </a:schemeClr>
+        </a:solidFill>
+        <a:gradFill>
+          <a:gsLst>
+            <a:gs pos="0">
+              <a:schemeClr val="phClr">
+                <a:tint val="93000"/>
+                <a:shade val="98000"/>
+                <a:lumMod val="102000"/>
+                <a:satMod val="150000"/>
+              </a:schemeClr>
+            </a:gs>
+            <a:gs pos="50000">
+              <a:schemeClr val="phClr">
+                <a:tint val="98000"/>
+                <a:shade val="90000"/>
+                <a:lumMod val="103000"/>
+                <a:satMod val="130000"/>
+              </a:schemeClr>
+            </a:gs>
+            <a:gs pos="100000">
+              <a:schemeClr val="phClr">
+                <a:shade val="63000"/>
+                <a:satMod val="120000"/>
+              </a:schemeClr>
+            </a:gs>
+          </a:gsLst>
+          <a:lin ang="5400000" scaled="0"/>
+        </a:gradFill>
+      </a:bgFillStyleLst>
+    </a:fmtScheme>
+  </a:themeElements>
+  <a:extLst>
+    <a:ext uri="{05A4C25C-085E-4340-85A3-A5531E510DB2}">
+      <thm15:themeFamily xmlns:thm15="http://schemas.microsoft.com/office/thememl/2012/main" name="Office Theme" id="{62F939B6-93AF-4DB8-9C6B-D6C7DFDC589F}" vid="{4A3C46E8-61CC-4603-A589-7422A47A8E4A}"/>
+    </a:ext>
+  </a:extLst>
 </a:theme>
 </file>